--- a/deck/progress_deck_zh.pptx
+++ b/deck/progress_deck_zh.pptx
@@ -17,6 +17,7 @@
     <p:sldId id="265" r:id="rId16"/>
     <p:sldId id="266" r:id="rId17"/>
     <p:sldId id="267" r:id="rId18"/>
+    <p:sldId id="268" r:id="rId19"/>
   </p:sldIdLst>
   <p:sldSz cx="12191695" cy="6858000" type="screen4x3"/>
   <p:notesSz cx="6858000" cy="9144000"/>
@@ -3492,7 +3493,7 @@
                 </a:solidFill>
                 <a:latin typeface="PingFang HK"/>
               </a:rPr>
-              <a:t>狀態</a:t>
+              <a:t>實際執行</a:t>
             </a:r>
           </a:p>
         </p:txBody>
@@ -3534,7 +3535,7 @@
                 </a:solidFill>
                 <a:latin typeface="PingFang HK"/>
               </a:rPr>
-              <a:t>做好了什麼，下一步是什麼</a:t>
+              <a:t>整條 pipeline 跑得完，而且會老實地報錯</a:t>
             </a:r>
           </a:p>
         </p:txBody>
@@ -3611,76 +3612,40 @@
           </a:p>
         </p:txBody>
       </p:sp>
-      <p:sp>
-        <p:nvSpPr>
-          <p:cNvPr id="8" name="Rectangle 7"/>
-          <p:cNvSpPr/>
-          <p:nvPr/>
-        </p:nvSpPr>
-        <p:spPr>
-          <a:xfrm>
-            <a:off x="868680" y="1691640"/>
-            <a:ext cx="3520440" cy="2926080"/>
-          </a:xfrm>
-          <a:prstGeom prst="rect">
-            <a:avLst/>
-          </a:prstGeom>
-          <a:solidFill>
-            <a:srgbClr val="F4F6F8"/>
-          </a:solidFill>
-          <a:ln>
-            <a:noFill/>
-          </a:ln>
-          <a:effectLst/>
-        </p:spPr>
-        <p:txBody>
-          <a:bodyPr rtlCol="0" anchor="ctr" wrap="square"/>
-          <a:lstStyle/>
-          <a:p>
-            <a:pPr algn="ctr"/>
-          </a:p>
-        </p:txBody>
-      </p:sp>
-      <p:sp>
-        <p:nvSpPr>
-          <p:cNvPr id="9" name="Rectangle 8"/>
-          <p:cNvSpPr/>
-          <p:nvPr/>
-        </p:nvSpPr>
-        <p:spPr>
-          <a:xfrm>
-            <a:off x="868680" y="1691640"/>
-            <a:ext cx="3520440" cy="50292"/>
-          </a:xfrm>
-          <a:prstGeom prst="rect">
-            <a:avLst/>
-          </a:prstGeom>
-          <a:solidFill>
-            <a:srgbClr val="2F7D5D"/>
-          </a:solidFill>
-          <a:ln>
-            <a:noFill/>
-          </a:ln>
-          <a:effectLst/>
-        </p:spPr>
-        <p:txBody>
-          <a:bodyPr rtlCol="0" anchor="ctr" wrap="square"/>
-          <a:lstStyle/>
-          <a:p>
-            <a:pPr algn="ctr"/>
-          </a:p>
-        </p:txBody>
-      </p:sp>
-      <p:sp>
-        <p:nvSpPr>
-          <p:cNvPr id="10" name="TextBox 9"/>
+      <p:pic>
+        <p:nvPicPr>
+          <p:cNvPr id="8" name="Picture 7" descr="console_run.png"/>
+          <p:cNvPicPr>
+            <a:picLocks noChangeAspect="1"/>
+          </p:cNvPicPr>
+          <p:nvPr/>
+        </p:nvPicPr>
+        <p:blipFill>
+          <a:blip r:embed="rId2"/>
+          <a:stretch>
+            <a:fillRect/>
+          </a:stretch>
+        </p:blipFill>
+        <p:spPr>
+          <a:xfrm>
+            <a:off x="868680" y="1645920"/>
+            <a:ext cx="7589520" cy="4827813"/>
+          </a:xfrm>
+          <a:prstGeom prst="rect">
+            <a:avLst/>
+          </a:prstGeom>
+        </p:spPr>
+      </p:pic>
+      <p:sp>
+        <p:nvSpPr>
+          <p:cNvPr id="9" name="TextBox 8"/>
           <p:cNvSpPr txBox="1"/>
           <p:nvPr/>
         </p:nvSpPr>
         <p:spPr>
           <a:xfrm>
-            <a:off x="1097280" y="1874519"/>
-            <a:ext cx="3108960" cy="320040"/>
+            <a:off x="868680" y="6455664"/>
+            <a:ext cx="7589520" cy="274320"/>
           </a:xfrm>
           <a:prstGeom prst="rect">
             <a:avLst/>
@@ -3702,205 +3667,27 @@
               </a:spcBef>
             </a:pPr>
             <a:r>
-              <a:rPr sz="1250" b="1" i="0">
-                <a:solidFill>
-                  <a:srgbClr val="10233A"/>
+              <a:rPr sz="800" b="0" i="1">
+                <a:solidFill>
+                  <a:srgbClr val="5A6B7C"/>
                 </a:solidFill>
                 <a:latin typeface="PingFang HK"/>
               </a:rPr>
-              <a:t>已做好並有測試</a:t>
-            </a:r>
-          </a:p>
-        </p:txBody>
-      </p:sp>
-      <p:sp>
-        <p:nvSpPr>
-          <p:cNvPr id="11" name="TextBox 10"/>
+              <a:t>真實終端輸出；中間幾行省略。</a:t>
+            </a:r>
+          </a:p>
+        </p:txBody>
+      </p:sp>
+      <p:sp>
+        <p:nvSpPr>
+          <p:cNvPr id="10" name="TextBox 9"/>
           <p:cNvSpPr txBox="1"/>
           <p:nvPr/>
         </p:nvSpPr>
         <p:spPr>
           <a:xfrm>
-            <a:off x="1097280" y="2331720"/>
-            <a:ext cx="3154680" cy="2834640"/>
-          </a:xfrm>
-          <a:prstGeom prst="rect">
-            <a:avLst/>
-          </a:prstGeom>
-          <a:noFill/>
-        </p:spPr>
-        <p:txBody>
-          <a:bodyPr wrap="square" anchor="t" lIns="0" rIns="0" tIns="0" bIns="0">
-            <a:spAutoFit/>
-          </a:bodyPr>
-          <a:lstStyle/>
-          <a:p>
-            <a:pPr algn="l">
-              <a:lnSpc>
-                <a:spcPct val="125000"/>
-              </a:lnSpc>
-              <a:spcBef>
-                <a:spcPts val="0"/>
-              </a:spcBef>
-            </a:pPr>
-            <a:r>
-              <a:rPr sz="950" b="0" i="0">
-                <a:solidFill>
-                  <a:srgbClr val="1E3652"/>
-                </a:solidFill>
-                <a:latin typeface="PingFang HK"/>
-              </a:rPr>
-              <a:t>-  parse：章節、圖、圖說</a:t>
-            </a:r>
-          </a:p>
-          <a:p>
-            <a:pPr algn="l">
-              <a:lnSpc>
-                <a:spcPct val="125000"/>
-              </a:lnSpc>
-              <a:spcBef>
-                <a:spcPts val="700"/>
-              </a:spcBef>
-            </a:pPr>
-            <a:r>
-              <a:rPr sz="950" b="0" i="0">
-                <a:solidFill>
-                  <a:srgbClr val="1E3652"/>
-                </a:solidFill>
-                <a:latin typeface="PingFang HK"/>
-              </a:rPr>
-              <a:t>-  裁圖：樣本上 32 個圖說成功 12 個</a:t>
-            </a:r>
-          </a:p>
-          <a:p>
-            <a:pPr algn="l">
-              <a:lnSpc>
-                <a:spcPct val="125000"/>
-              </a:lnSpc>
-              <a:spcBef>
-                <a:spcPts val="700"/>
-              </a:spcBef>
-            </a:pPr>
-            <a:r>
-              <a:rPr sz="950" b="0" i="0">
-                <a:solidFill>
-                  <a:srgbClr val="1E3652"/>
-                </a:solidFill>
-                <a:latin typeface="PingFang HK"/>
-              </a:rPr>
-              <a:t>-  render：原生 .pptx 連講稿</a:t>
-            </a:r>
-          </a:p>
-          <a:p>
-            <a:pPr algn="l">
-              <a:lnSpc>
-                <a:spcPct val="125000"/>
-              </a:lnSpc>
-              <a:spcBef>
-                <a:spcPts val="700"/>
-              </a:spcBef>
-            </a:pPr>
-            <a:r>
-              <a:rPr sz="950" b="0" i="0">
-                <a:solidFill>
-                  <a:srgbClr val="1E3652"/>
-                </a:solidFill>
-                <a:latin typeface="PingFang HK"/>
-              </a:rPr>
-              <a:t>-  G1、G2、G3、G6 + SRR</a:t>
-            </a:r>
-          </a:p>
-          <a:p>
-            <a:pPr algn="l">
-              <a:lnSpc>
-                <a:spcPct val="125000"/>
-              </a:lnSpc>
-              <a:spcBef>
-                <a:spcPts val="700"/>
-              </a:spcBef>
-            </a:pPr>
-            <a:r>
-              <a:rPr sz="950" b="0" i="0">
-                <a:solidFill>
-                  <a:srgbClr val="1E3652"/>
-                </a:solidFill>
-                <a:latin typeface="PingFang HK"/>
-              </a:rPr>
-              <a:t>-  選段規則表，55 個測試函數</a:t>
-            </a:r>
-          </a:p>
-        </p:txBody>
-      </p:sp>
-      <p:sp>
-        <p:nvSpPr>
-          <p:cNvPr id="12" name="Rectangle 11"/>
-          <p:cNvSpPr/>
-          <p:nvPr/>
-        </p:nvSpPr>
-        <p:spPr>
-          <a:xfrm>
-            <a:off x="4553712" y="1691640"/>
-            <a:ext cx="3520440" cy="2926080"/>
-          </a:xfrm>
-          <a:prstGeom prst="rect">
-            <a:avLst/>
-          </a:prstGeom>
-          <a:solidFill>
-            <a:srgbClr val="F4F6F8"/>
-          </a:solidFill>
-          <a:ln>
-            <a:noFill/>
-          </a:ln>
-          <a:effectLst/>
-        </p:spPr>
-        <p:txBody>
-          <a:bodyPr rtlCol="0" anchor="ctr" wrap="square"/>
-          <a:lstStyle/>
-          <a:p>
-            <a:pPr algn="ctr"/>
-          </a:p>
-        </p:txBody>
-      </p:sp>
-      <p:sp>
-        <p:nvSpPr>
-          <p:cNvPr id="13" name="Rectangle 12"/>
-          <p:cNvSpPr/>
-          <p:nvPr/>
-        </p:nvSpPr>
-        <p:spPr>
-          <a:xfrm>
-            <a:off x="4553712" y="1691640"/>
-            <a:ext cx="3520440" cy="50292"/>
-          </a:xfrm>
-          <a:prstGeom prst="rect">
-            <a:avLst/>
-          </a:prstGeom>
-          <a:solidFill>
-            <a:srgbClr val="B07A1E"/>
-          </a:solidFill>
-          <a:ln>
-            <a:noFill/>
-          </a:ln>
-          <a:effectLst/>
-        </p:spPr>
-        <p:txBody>
-          <a:bodyPr rtlCol="0" anchor="ctr" wrap="square"/>
-          <a:lstStyle/>
-          <a:p>
-            <a:pPr algn="ctr"/>
-          </a:p>
-        </p:txBody>
-      </p:sp>
-      <p:sp>
-        <p:nvSpPr>
-          <p:cNvPr id="14" name="TextBox 13"/>
-          <p:cNvSpPr txBox="1"/>
-          <p:nvPr/>
-        </p:nvSpPr>
-        <p:spPr>
-          <a:xfrm>
-            <a:off x="4782312" y="1874519"/>
-            <a:ext cx="3108960" cy="320040"/>
+            <a:off x="8823960" y="1737360"/>
+            <a:ext cx="2926080" cy="713232"/>
           </a:xfrm>
           <a:prstGeom prst="rect">
             <a:avLst/>
@@ -3922,167 +3709,46 @@
               </a:spcBef>
             </a:pPr>
             <a:r>
-              <a:rPr sz="1250" b="1" i="0">
-                <a:solidFill>
-                  <a:srgbClr val="10233A"/>
+              <a:rPr sz="1000" b="1" i="0">
+                <a:solidFill>
+                  <a:srgbClr val="C08A2E"/>
                 </a:solidFill>
                 <a:latin typeface="PingFang HK"/>
               </a:rPr>
-              <a:t>部分完成</a:t>
-            </a:r>
-          </a:p>
-        </p:txBody>
-      </p:sp>
-      <p:sp>
-        <p:nvSpPr>
-          <p:cNvPr id="15" name="TextBox 14"/>
-          <p:cNvSpPr txBox="1"/>
-          <p:nvPr/>
-        </p:nvSpPr>
-        <p:spPr>
-          <a:xfrm>
-            <a:off x="4782312" y="2331720"/>
-            <a:ext cx="3154680" cy="2834640"/>
-          </a:xfrm>
-          <a:prstGeom prst="rect">
-            <a:avLst/>
-          </a:prstGeom>
-          <a:noFill/>
-        </p:spPr>
-        <p:txBody>
-          <a:bodyPr wrap="square" anchor="t" lIns="0" rIns="0" tIns="0" bIns="0">
-            <a:spAutoFit/>
-          </a:bodyPr>
-          <a:lstStyle/>
+              <a:t>parse</a:t>
+            </a:r>
+          </a:p>
           <a:p>
             <a:pPr algn="l">
               <a:lnSpc>
                 <a:spcPct val="125000"/>
               </a:lnSpc>
               <a:spcBef>
-                <a:spcPts val="0"/>
+                <a:spcPts val="100"/>
               </a:spcBef>
             </a:pPr>
             <a:r>
-              <a:rPr sz="950" b="0" i="0">
+              <a:rPr sz="900" b="0" i="0">
                 <a:solidFill>
                   <a:srgbClr val="1E3652"/>
                 </a:solidFill>
                 <a:latin typeface="PingFang HK"/>
               </a:rPr>
-              <a:t>-  G3 / G6 仍然用一個全局門檻</a:t>
-            </a:r>
-          </a:p>
-          <a:p>
-            <a:pPr algn="l">
-              <a:lnSpc>
-                <a:spcPct val="125000"/>
-              </a:lnSpc>
-              <a:spcBef>
-                <a:spcPts val="700"/>
-              </a:spcBef>
-            </a:pPr>
-            <a:r>
-              <a:rPr sz="950" b="0" i="0">
-                <a:solidFill>
-                  <a:srgbClr val="1E3652"/>
-                </a:solidFill>
-                <a:latin typeface="PingFang HK"/>
-              </a:rPr>
-              <a:t>-  圖說截斷要改成詞語邊界</a:t>
-            </a:r>
-          </a:p>
-          <a:p>
-            <a:pPr algn="l">
-              <a:lnSpc>
-                <a:spcPct val="125000"/>
-              </a:lnSpc>
-              <a:spcBef>
-                <a:spcPts val="700"/>
-              </a:spcBef>
-            </a:pPr>
-            <a:r>
-              <a:rPr sz="950" b="0" i="0">
-                <a:solidFill>
-                  <a:srgbClr val="1E3652"/>
-                </a:solidFill>
-                <a:latin typeface="PingFang HK"/>
-              </a:rPr>
-              <a:t>-  claim 仍然由 heuristic 抽取</a:t>
-            </a:r>
-          </a:p>
-        </p:txBody>
-      </p:sp>
-      <p:sp>
-        <p:nvSpPr>
-          <p:cNvPr id="16" name="Rectangle 15"/>
-          <p:cNvSpPr/>
-          <p:nvPr/>
-        </p:nvSpPr>
-        <p:spPr>
-          <a:xfrm>
-            <a:off x="8238744" y="1691640"/>
-            <a:ext cx="3520440" cy="2926080"/>
-          </a:xfrm>
-          <a:prstGeom prst="rect">
-            <a:avLst/>
-          </a:prstGeom>
-          <a:solidFill>
-            <a:srgbClr val="F4F6F8"/>
-          </a:solidFill>
-          <a:ln>
-            <a:noFill/>
-          </a:ln>
-          <a:effectLst/>
-        </p:spPr>
-        <p:txBody>
-          <a:bodyPr rtlCol="0" anchor="ctr" wrap="square"/>
-          <a:lstStyle/>
-          <a:p>
-            <a:pPr algn="ctr"/>
-          </a:p>
-        </p:txBody>
-      </p:sp>
-      <p:sp>
-        <p:nvSpPr>
-          <p:cNvPr id="17" name="Rectangle 16"/>
-          <p:cNvSpPr/>
-          <p:nvPr/>
-        </p:nvSpPr>
-        <p:spPr>
-          <a:xfrm>
-            <a:off x="8238744" y="1691640"/>
-            <a:ext cx="3520440" cy="50292"/>
-          </a:xfrm>
-          <a:prstGeom prst="rect">
-            <a:avLst/>
-          </a:prstGeom>
-          <a:solidFill>
-            <a:srgbClr val="5A6B7C"/>
-          </a:solidFill>
-          <a:ln>
-            <a:noFill/>
-          </a:ln>
-          <a:effectLst/>
-        </p:spPr>
-        <p:txBody>
-          <a:bodyPr rtlCol="0" anchor="ctr" wrap="square"/>
-          <a:lstStyle/>
-          <a:p>
-            <a:pPr algn="ctr"/>
-          </a:p>
-        </p:txBody>
-      </p:sp>
-      <p:sp>
-        <p:nvSpPr>
-          <p:cNvPr id="18" name="TextBox 17"/>
+              <a:t>8 個章節、24 個圖說、裁出 11 張圖</a:t>
+            </a:r>
+          </a:p>
+        </p:txBody>
+      </p:sp>
+      <p:sp>
+        <p:nvSpPr>
+          <p:cNvPr id="11" name="TextBox 10"/>
           <p:cNvSpPr txBox="1"/>
           <p:nvPr/>
         </p:nvSpPr>
         <p:spPr>
           <a:xfrm>
-            <a:off x="8467344" y="1874519"/>
-            <a:ext cx="3108960" cy="320040"/>
+            <a:off x="8823960" y="2578608"/>
+            <a:ext cx="2926080" cy="713232"/>
           </a:xfrm>
           <a:prstGeom prst="rect">
             <a:avLst/>
@@ -4104,126 +3770,46 @@
               </a:spcBef>
             </a:pPr>
             <a:r>
-              <a:rPr sz="1250" b="1" i="0">
-                <a:solidFill>
-                  <a:srgbClr val="10233A"/>
+              <a:rPr sz="1000" b="1" i="0">
+                <a:solidFill>
+                  <a:srgbClr val="C08A2E"/>
                 </a:solidFill>
                 <a:latin typeface="PingFang HK"/>
               </a:rPr>
-              <a:t>未開始</a:t>
-            </a:r>
-          </a:p>
-        </p:txBody>
-      </p:sp>
-      <p:sp>
-        <p:nvSpPr>
-          <p:cNvPr id="19" name="TextBox 18"/>
-          <p:cNvSpPr txBox="1"/>
-          <p:nvPr/>
-        </p:nvSpPr>
-        <p:spPr>
-          <a:xfrm>
-            <a:off x="8467344" y="2331720"/>
-            <a:ext cx="3154680" cy="2834640"/>
-          </a:xfrm>
-          <a:prstGeom prst="rect">
-            <a:avLst/>
-          </a:prstGeom>
-          <a:noFill/>
-        </p:spPr>
-        <p:txBody>
-          <a:bodyPr wrap="square" anchor="t" lIns="0" rIns="0" tIns="0" bIns="0">
-            <a:spAutoFit/>
-          </a:bodyPr>
-          <a:lstStyle/>
+              <a:t>compose</a:t>
+            </a:r>
+          </a:p>
           <a:p>
             <a:pPr algn="l">
               <a:lnSpc>
                 <a:spcPct val="125000"/>
               </a:lnSpc>
               <a:spcBef>
-                <a:spcPts val="0"/>
+                <a:spcPts val="100"/>
               </a:spcBef>
             </a:pPr>
             <a:r>
-              <a:rPr sz="950" b="0" i="0">
+              <a:rPr sz="900" b="0" i="0">
                 <a:solidFill>
                   <a:srgbClr val="1E3652"/>
                 </a:solidFill>
                 <a:latin typeface="PingFang HK"/>
               </a:rPr>
-              <a:t>-  G4 對比、G5 文字溢出</a:t>
-            </a:r>
-          </a:p>
-          <a:p>
-            <a:pPr algn="l">
-              <a:lnSpc>
-                <a:spcPct val="125000"/>
-              </a:lnSpc>
-              <a:spcBef>
-                <a:spcPts val="700"/>
-              </a:spcBef>
-            </a:pPr>
-            <a:r>
-              <a:rPr sz="950" b="0" i="0">
-                <a:solidFill>
-                  <a:srgbClr val="1E3652"/>
-                </a:solidFill>
-                <a:latin typeface="PingFang HK"/>
-              </a:rPr>
-              <a:t>-  修復動作與迴圈</a:t>
-            </a:r>
-          </a:p>
-          <a:p>
-            <a:pPr algn="l">
-              <a:lnSpc>
-                <a:spcPct val="125000"/>
-              </a:lnSpc>
-              <a:spcBef>
-                <a:spcPts val="700"/>
-              </a:spcBef>
-            </a:pPr>
-            <a:r>
-              <a:rPr sz="950" b="0" i="0">
-                <a:solidFill>
-                  <a:srgbClr val="1E3652"/>
-                </a:solidFill>
-                <a:latin typeface="PingFang HK"/>
-              </a:rPr>
-              <a:t>-  110 張測試集與標註</a:t>
-            </a:r>
-          </a:p>
-          <a:p>
-            <a:pPr algn="l">
-              <a:lnSpc>
-                <a:spcPct val="125000"/>
-              </a:lnSpc>
-              <a:spcBef>
-                <a:spcPts val="700"/>
-              </a:spcBef>
-            </a:pPr>
-            <a:r>
-              <a:rPr sz="950" b="0" i="0">
-                <a:solidFill>
-                  <a:srgbClr val="1E3652"/>
-                </a:solidFill>
-                <a:latin typeface="PingFang HK"/>
-              </a:rPr>
-              <a:t>-  人手 deck、baseline、2×2 實驗</a:t>
-            </a:r>
-          </a:p>
-        </p:txBody>
-      </p:sp>
-      <p:sp>
-        <p:nvSpPr>
-          <p:cNvPr id="20" name="TextBox 19"/>
+              <a:t>8 張 slide，每張 90 秒</a:t>
+            </a:r>
+          </a:p>
+        </p:txBody>
+      </p:sp>
+      <p:sp>
+        <p:nvSpPr>
+          <p:cNvPr id="12" name="TextBox 11"/>
           <p:cNvSpPr txBox="1"/>
           <p:nvPr/>
         </p:nvSpPr>
         <p:spPr>
           <a:xfrm>
-            <a:off x="868680" y="4937760"/>
-            <a:ext cx="10881360" cy="548640"/>
+            <a:off x="8823960" y="3419856"/>
+            <a:ext cx="2926080" cy="713232"/>
           </a:xfrm>
           <a:prstGeom prst="rect">
             <a:avLst/>
@@ -4245,13 +3831,154 @@
               </a:spcBef>
             </a:pPr>
             <a:r>
-              <a:rPr sz="1050" b="0" i="1">
-                <a:solidFill>
-                  <a:srgbClr val="5A6B7C"/>
+              <a:rPr sz="1000" b="1" i="0">
+                <a:solidFill>
+                  <a:srgbClr val="C08A2E"/>
                 </a:solidFill>
                 <a:latin typeface="PingFang HK"/>
               </a:rPr>
-              <a:t>76 個測試全綠。上面那份 deck 就是這條 pipeline 由頭到尾跑出來的。</a:t>
+              <a:t>render</a:t>
+            </a:r>
+          </a:p>
+          <a:p>
+            <a:pPr algn="l">
+              <a:lnSpc>
+                <a:spcPct val="125000"/>
+              </a:lnSpc>
+              <a:spcBef>
+                <a:spcPts val="100"/>
+              </a:spcBef>
+            </a:pPr>
+            <a:r>
+              <a:rPr sz="900" b="0" i="0">
+                <a:solidFill>
+                  <a:srgbClr val="1E3652"/>
+                </a:solidFill>
+                <a:latin typeface="PingFang HK"/>
+              </a:rPr>
+              <a:t>9 頁 deck，原生可編輯</a:t>
+            </a:r>
+          </a:p>
+        </p:txBody>
+      </p:sp>
+      <p:sp>
+        <p:nvSpPr>
+          <p:cNvPr id="13" name="TextBox 12"/>
+          <p:cNvSpPr txBox="1"/>
+          <p:nvPr/>
+        </p:nvSpPr>
+        <p:spPr>
+          <a:xfrm>
+            <a:off x="8823960" y="4261104"/>
+            <a:ext cx="2926080" cy="713232"/>
+          </a:xfrm>
+          <a:prstGeom prst="rect">
+            <a:avLst/>
+          </a:prstGeom>
+          <a:noFill/>
+        </p:spPr>
+        <p:txBody>
+          <a:bodyPr wrap="square" anchor="t" lIns="0" rIns="0" tIns="0" bIns="0">
+            <a:spAutoFit/>
+          </a:bodyPr>
+          <a:lstStyle/>
+          <a:p>
+            <a:pPr algn="l">
+              <a:lnSpc>
+                <a:spcPct val="115000"/>
+              </a:lnSpc>
+              <a:spcBef>
+                <a:spcPts val="0"/>
+              </a:spcBef>
+            </a:pPr>
+            <a:r>
+              <a:rPr sz="1000" b="1" i="0">
+                <a:solidFill>
+                  <a:srgbClr val="C08A2E"/>
+                </a:solidFill>
+                <a:latin typeface="PingFang HK"/>
+              </a:rPr>
+              <a:t>detect</a:t>
+            </a:r>
+          </a:p>
+          <a:p>
+            <a:pPr algn="l">
+              <a:lnSpc>
+                <a:spcPct val="125000"/>
+              </a:lnSpc>
+              <a:spcBef>
+                <a:spcPts val="100"/>
+              </a:spcBef>
+            </a:pPr>
+            <a:r>
+              <a:rPr sz="900" b="0" i="0">
+                <a:solidFill>
+                  <a:srgbClr val="1E3652"/>
+                </a:solidFill>
+                <a:latin typeface="PingFang HK"/>
+              </a:rPr>
+              <a:t>32 個違規，SRR 0.00</a:t>
+            </a:r>
+          </a:p>
+        </p:txBody>
+      </p:sp>
+      <p:sp>
+        <p:nvSpPr>
+          <p:cNvPr id="14" name="TextBox 13"/>
+          <p:cNvSpPr txBox="1"/>
+          <p:nvPr/>
+        </p:nvSpPr>
+        <p:spPr>
+          <a:xfrm>
+            <a:off x="8823960" y="5102352"/>
+            <a:ext cx="2926080" cy="713232"/>
+          </a:xfrm>
+          <a:prstGeom prst="rect">
+            <a:avLst/>
+          </a:prstGeom>
+          <a:noFill/>
+        </p:spPr>
+        <p:txBody>
+          <a:bodyPr wrap="square" anchor="t" lIns="0" rIns="0" tIns="0" bIns="0">
+            <a:spAutoFit/>
+          </a:bodyPr>
+          <a:lstStyle/>
+          <a:p>
+            <a:pPr algn="l">
+              <a:lnSpc>
+                <a:spcPct val="115000"/>
+              </a:lnSpc>
+              <a:spcBef>
+                <a:spcPts val="0"/>
+              </a:spcBef>
+            </a:pPr>
+            <a:r>
+              <a:rPr sz="1000" b="1" i="0">
+                <a:solidFill>
+                  <a:srgbClr val="C08A2E"/>
+                </a:solidFill>
+                <a:latin typeface="PingFang HK"/>
+              </a:rPr>
+              <a:t>pytest</a:t>
+            </a:r>
+          </a:p>
+          <a:p>
+            <a:pPr algn="l">
+              <a:lnSpc>
+                <a:spcPct val="125000"/>
+              </a:lnSpc>
+              <a:spcBef>
+                <a:spcPts val="100"/>
+              </a:spcBef>
+            </a:pPr>
+            <a:r>
+              <a:rPr sz="900" b="0" i="0">
+                <a:solidFill>
+                  <a:srgbClr val="1E3652"/>
+                </a:solidFill>
+                <a:latin typeface="PingFang HK"/>
+              </a:rPr>
+              <a:t>76 個測試全綠</a:t>
             </a:r>
           </a:p>
         </p:txBody>
@@ -4371,7 +4098,7 @@
                 </a:solidFill>
                 <a:latin typeface="PingFang HK"/>
               </a:rPr>
-              <a:t>計劃</a:t>
+              <a:t>狀態</a:t>
             </a:r>
           </a:p>
         </p:txBody>
@@ -4413,7 +4140,7 @@
                 </a:solidFill>
                 <a:latin typeface="PingFang HK"/>
               </a:rPr>
-              <a:t>實驗設計，與時間表</a:t>
+              <a:t>做好了什麼，下一步是什麼</a:t>
             </a:r>
           </a:p>
         </p:txBody>
@@ -4486,6 +4213,885 @@
                 <a:latin typeface="PingFang HK"/>
               </a:rPr>
               <a:t>11</a:t>
+            </a:r>
+          </a:p>
+        </p:txBody>
+      </p:sp>
+      <p:sp>
+        <p:nvSpPr>
+          <p:cNvPr id="8" name="Rectangle 7"/>
+          <p:cNvSpPr/>
+          <p:nvPr/>
+        </p:nvSpPr>
+        <p:spPr>
+          <a:xfrm>
+            <a:off x="868680" y="1691640"/>
+            <a:ext cx="3520440" cy="2926080"/>
+          </a:xfrm>
+          <a:prstGeom prst="rect">
+            <a:avLst/>
+          </a:prstGeom>
+          <a:solidFill>
+            <a:srgbClr val="F4F6F8"/>
+          </a:solidFill>
+          <a:ln>
+            <a:noFill/>
+          </a:ln>
+          <a:effectLst/>
+        </p:spPr>
+        <p:txBody>
+          <a:bodyPr rtlCol="0" anchor="ctr" wrap="square"/>
+          <a:lstStyle/>
+          <a:p>
+            <a:pPr algn="ctr"/>
+          </a:p>
+        </p:txBody>
+      </p:sp>
+      <p:sp>
+        <p:nvSpPr>
+          <p:cNvPr id="9" name="Rectangle 8"/>
+          <p:cNvSpPr/>
+          <p:nvPr/>
+        </p:nvSpPr>
+        <p:spPr>
+          <a:xfrm>
+            <a:off x="868680" y="1691640"/>
+            <a:ext cx="3520440" cy="50292"/>
+          </a:xfrm>
+          <a:prstGeom prst="rect">
+            <a:avLst/>
+          </a:prstGeom>
+          <a:solidFill>
+            <a:srgbClr val="2F7D5D"/>
+          </a:solidFill>
+          <a:ln>
+            <a:noFill/>
+          </a:ln>
+          <a:effectLst/>
+        </p:spPr>
+        <p:txBody>
+          <a:bodyPr rtlCol="0" anchor="ctr" wrap="square"/>
+          <a:lstStyle/>
+          <a:p>
+            <a:pPr algn="ctr"/>
+          </a:p>
+        </p:txBody>
+      </p:sp>
+      <p:sp>
+        <p:nvSpPr>
+          <p:cNvPr id="10" name="TextBox 9"/>
+          <p:cNvSpPr txBox="1"/>
+          <p:nvPr/>
+        </p:nvSpPr>
+        <p:spPr>
+          <a:xfrm>
+            <a:off x="1097280" y="1874519"/>
+            <a:ext cx="3108960" cy="320040"/>
+          </a:xfrm>
+          <a:prstGeom prst="rect">
+            <a:avLst/>
+          </a:prstGeom>
+          <a:noFill/>
+        </p:spPr>
+        <p:txBody>
+          <a:bodyPr wrap="square" anchor="t" lIns="0" rIns="0" tIns="0" bIns="0">
+            <a:spAutoFit/>
+          </a:bodyPr>
+          <a:lstStyle/>
+          <a:p>
+            <a:pPr algn="l">
+              <a:lnSpc>
+                <a:spcPct val="115000"/>
+              </a:lnSpc>
+              <a:spcBef>
+                <a:spcPts val="0"/>
+              </a:spcBef>
+            </a:pPr>
+            <a:r>
+              <a:rPr sz="1250" b="1" i="0">
+                <a:solidFill>
+                  <a:srgbClr val="10233A"/>
+                </a:solidFill>
+                <a:latin typeface="PingFang HK"/>
+              </a:rPr>
+              <a:t>已做好並有測試</a:t>
+            </a:r>
+          </a:p>
+        </p:txBody>
+      </p:sp>
+      <p:sp>
+        <p:nvSpPr>
+          <p:cNvPr id="11" name="TextBox 10"/>
+          <p:cNvSpPr txBox="1"/>
+          <p:nvPr/>
+        </p:nvSpPr>
+        <p:spPr>
+          <a:xfrm>
+            <a:off x="1097280" y="2331720"/>
+            <a:ext cx="3154680" cy="2834640"/>
+          </a:xfrm>
+          <a:prstGeom prst="rect">
+            <a:avLst/>
+          </a:prstGeom>
+          <a:noFill/>
+        </p:spPr>
+        <p:txBody>
+          <a:bodyPr wrap="square" anchor="t" lIns="0" rIns="0" tIns="0" bIns="0">
+            <a:spAutoFit/>
+          </a:bodyPr>
+          <a:lstStyle/>
+          <a:p>
+            <a:pPr algn="l">
+              <a:lnSpc>
+                <a:spcPct val="125000"/>
+              </a:lnSpc>
+              <a:spcBef>
+                <a:spcPts val="0"/>
+              </a:spcBef>
+            </a:pPr>
+            <a:r>
+              <a:rPr sz="950" b="0" i="0">
+                <a:solidFill>
+                  <a:srgbClr val="1E3652"/>
+                </a:solidFill>
+                <a:latin typeface="PingFang HK"/>
+              </a:rPr>
+              <a:t>-  parse：章節、圖、圖說</a:t>
+            </a:r>
+          </a:p>
+          <a:p>
+            <a:pPr algn="l">
+              <a:lnSpc>
+                <a:spcPct val="125000"/>
+              </a:lnSpc>
+              <a:spcBef>
+                <a:spcPts val="700"/>
+              </a:spcBef>
+            </a:pPr>
+            <a:r>
+              <a:rPr sz="950" b="0" i="0">
+                <a:solidFill>
+                  <a:srgbClr val="1E3652"/>
+                </a:solidFill>
+                <a:latin typeface="PingFang HK"/>
+              </a:rPr>
+              <a:t>-  裁圖：樣本上 32 個圖說成功 12 個</a:t>
+            </a:r>
+          </a:p>
+          <a:p>
+            <a:pPr algn="l">
+              <a:lnSpc>
+                <a:spcPct val="125000"/>
+              </a:lnSpc>
+              <a:spcBef>
+                <a:spcPts val="700"/>
+              </a:spcBef>
+            </a:pPr>
+            <a:r>
+              <a:rPr sz="950" b="0" i="0">
+                <a:solidFill>
+                  <a:srgbClr val="1E3652"/>
+                </a:solidFill>
+                <a:latin typeface="PingFang HK"/>
+              </a:rPr>
+              <a:t>-  render：原生 .pptx 連講稿</a:t>
+            </a:r>
+          </a:p>
+          <a:p>
+            <a:pPr algn="l">
+              <a:lnSpc>
+                <a:spcPct val="125000"/>
+              </a:lnSpc>
+              <a:spcBef>
+                <a:spcPts val="700"/>
+              </a:spcBef>
+            </a:pPr>
+            <a:r>
+              <a:rPr sz="950" b="0" i="0">
+                <a:solidFill>
+                  <a:srgbClr val="1E3652"/>
+                </a:solidFill>
+                <a:latin typeface="PingFang HK"/>
+              </a:rPr>
+              <a:t>-  G1、G2、G3、G6 + SRR</a:t>
+            </a:r>
+          </a:p>
+          <a:p>
+            <a:pPr algn="l">
+              <a:lnSpc>
+                <a:spcPct val="125000"/>
+              </a:lnSpc>
+              <a:spcBef>
+                <a:spcPts val="700"/>
+              </a:spcBef>
+            </a:pPr>
+            <a:r>
+              <a:rPr sz="950" b="0" i="0">
+                <a:solidFill>
+                  <a:srgbClr val="1E3652"/>
+                </a:solidFill>
+                <a:latin typeface="PingFang HK"/>
+              </a:rPr>
+              <a:t>-  選段規則表，55 個測試函數</a:t>
+            </a:r>
+          </a:p>
+        </p:txBody>
+      </p:sp>
+      <p:sp>
+        <p:nvSpPr>
+          <p:cNvPr id="12" name="Rectangle 11"/>
+          <p:cNvSpPr/>
+          <p:nvPr/>
+        </p:nvSpPr>
+        <p:spPr>
+          <a:xfrm>
+            <a:off x="4553712" y="1691640"/>
+            <a:ext cx="3520440" cy="2926080"/>
+          </a:xfrm>
+          <a:prstGeom prst="rect">
+            <a:avLst/>
+          </a:prstGeom>
+          <a:solidFill>
+            <a:srgbClr val="F4F6F8"/>
+          </a:solidFill>
+          <a:ln>
+            <a:noFill/>
+          </a:ln>
+          <a:effectLst/>
+        </p:spPr>
+        <p:txBody>
+          <a:bodyPr rtlCol="0" anchor="ctr" wrap="square"/>
+          <a:lstStyle/>
+          <a:p>
+            <a:pPr algn="ctr"/>
+          </a:p>
+        </p:txBody>
+      </p:sp>
+      <p:sp>
+        <p:nvSpPr>
+          <p:cNvPr id="13" name="Rectangle 12"/>
+          <p:cNvSpPr/>
+          <p:nvPr/>
+        </p:nvSpPr>
+        <p:spPr>
+          <a:xfrm>
+            <a:off x="4553712" y="1691640"/>
+            <a:ext cx="3520440" cy="50292"/>
+          </a:xfrm>
+          <a:prstGeom prst="rect">
+            <a:avLst/>
+          </a:prstGeom>
+          <a:solidFill>
+            <a:srgbClr val="B07A1E"/>
+          </a:solidFill>
+          <a:ln>
+            <a:noFill/>
+          </a:ln>
+          <a:effectLst/>
+        </p:spPr>
+        <p:txBody>
+          <a:bodyPr rtlCol="0" anchor="ctr" wrap="square"/>
+          <a:lstStyle/>
+          <a:p>
+            <a:pPr algn="ctr"/>
+          </a:p>
+        </p:txBody>
+      </p:sp>
+      <p:sp>
+        <p:nvSpPr>
+          <p:cNvPr id="14" name="TextBox 13"/>
+          <p:cNvSpPr txBox="1"/>
+          <p:nvPr/>
+        </p:nvSpPr>
+        <p:spPr>
+          <a:xfrm>
+            <a:off x="4782312" y="1874519"/>
+            <a:ext cx="3108960" cy="320040"/>
+          </a:xfrm>
+          <a:prstGeom prst="rect">
+            <a:avLst/>
+          </a:prstGeom>
+          <a:noFill/>
+        </p:spPr>
+        <p:txBody>
+          <a:bodyPr wrap="square" anchor="t" lIns="0" rIns="0" tIns="0" bIns="0">
+            <a:spAutoFit/>
+          </a:bodyPr>
+          <a:lstStyle/>
+          <a:p>
+            <a:pPr algn="l">
+              <a:lnSpc>
+                <a:spcPct val="115000"/>
+              </a:lnSpc>
+              <a:spcBef>
+                <a:spcPts val="0"/>
+              </a:spcBef>
+            </a:pPr>
+            <a:r>
+              <a:rPr sz="1250" b="1" i="0">
+                <a:solidFill>
+                  <a:srgbClr val="10233A"/>
+                </a:solidFill>
+                <a:latin typeface="PingFang HK"/>
+              </a:rPr>
+              <a:t>部分完成</a:t>
+            </a:r>
+          </a:p>
+        </p:txBody>
+      </p:sp>
+      <p:sp>
+        <p:nvSpPr>
+          <p:cNvPr id="15" name="TextBox 14"/>
+          <p:cNvSpPr txBox="1"/>
+          <p:nvPr/>
+        </p:nvSpPr>
+        <p:spPr>
+          <a:xfrm>
+            <a:off x="4782312" y="2331720"/>
+            <a:ext cx="3154680" cy="2834640"/>
+          </a:xfrm>
+          <a:prstGeom prst="rect">
+            <a:avLst/>
+          </a:prstGeom>
+          <a:noFill/>
+        </p:spPr>
+        <p:txBody>
+          <a:bodyPr wrap="square" anchor="t" lIns="0" rIns="0" tIns="0" bIns="0">
+            <a:spAutoFit/>
+          </a:bodyPr>
+          <a:lstStyle/>
+          <a:p>
+            <a:pPr algn="l">
+              <a:lnSpc>
+                <a:spcPct val="125000"/>
+              </a:lnSpc>
+              <a:spcBef>
+                <a:spcPts val="0"/>
+              </a:spcBef>
+            </a:pPr>
+            <a:r>
+              <a:rPr sz="950" b="0" i="0">
+                <a:solidFill>
+                  <a:srgbClr val="1E3652"/>
+                </a:solidFill>
+                <a:latin typeface="PingFang HK"/>
+              </a:rPr>
+              <a:t>-  G3 / G6 仍然用一個全局門檻</a:t>
+            </a:r>
+          </a:p>
+          <a:p>
+            <a:pPr algn="l">
+              <a:lnSpc>
+                <a:spcPct val="125000"/>
+              </a:lnSpc>
+              <a:spcBef>
+                <a:spcPts val="700"/>
+              </a:spcBef>
+            </a:pPr>
+            <a:r>
+              <a:rPr sz="950" b="0" i="0">
+                <a:solidFill>
+                  <a:srgbClr val="1E3652"/>
+                </a:solidFill>
+                <a:latin typeface="PingFang HK"/>
+              </a:rPr>
+              <a:t>-  圖說截斷要改成詞語邊界</a:t>
+            </a:r>
+          </a:p>
+          <a:p>
+            <a:pPr algn="l">
+              <a:lnSpc>
+                <a:spcPct val="125000"/>
+              </a:lnSpc>
+              <a:spcBef>
+                <a:spcPts val="700"/>
+              </a:spcBef>
+            </a:pPr>
+            <a:r>
+              <a:rPr sz="950" b="0" i="0">
+                <a:solidFill>
+                  <a:srgbClr val="1E3652"/>
+                </a:solidFill>
+                <a:latin typeface="PingFang HK"/>
+              </a:rPr>
+              <a:t>-  claim 仍然由 heuristic 抽取</a:t>
+            </a:r>
+          </a:p>
+        </p:txBody>
+      </p:sp>
+      <p:sp>
+        <p:nvSpPr>
+          <p:cNvPr id="16" name="Rectangle 15"/>
+          <p:cNvSpPr/>
+          <p:nvPr/>
+        </p:nvSpPr>
+        <p:spPr>
+          <a:xfrm>
+            <a:off x="8238744" y="1691640"/>
+            <a:ext cx="3520440" cy="2926080"/>
+          </a:xfrm>
+          <a:prstGeom prst="rect">
+            <a:avLst/>
+          </a:prstGeom>
+          <a:solidFill>
+            <a:srgbClr val="F4F6F8"/>
+          </a:solidFill>
+          <a:ln>
+            <a:noFill/>
+          </a:ln>
+          <a:effectLst/>
+        </p:spPr>
+        <p:txBody>
+          <a:bodyPr rtlCol="0" anchor="ctr" wrap="square"/>
+          <a:lstStyle/>
+          <a:p>
+            <a:pPr algn="ctr"/>
+          </a:p>
+        </p:txBody>
+      </p:sp>
+      <p:sp>
+        <p:nvSpPr>
+          <p:cNvPr id="17" name="Rectangle 16"/>
+          <p:cNvSpPr/>
+          <p:nvPr/>
+        </p:nvSpPr>
+        <p:spPr>
+          <a:xfrm>
+            <a:off x="8238744" y="1691640"/>
+            <a:ext cx="3520440" cy="50292"/>
+          </a:xfrm>
+          <a:prstGeom prst="rect">
+            <a:avLst/>
+          </a:prstGeom>
+          <a:solidFill>
+            <a:srgbClr val="5A6B7C"/>
+          </a:solidFill>
+          <a:ln>
+            <a:noFill/>
+          </a:ln>
+          <a:effectLst/>
+        </p:spPr>
+        <p:txBody>
+          <a:bodyPr rtlCol="0" anchor="ctr" wrap="square"/>
+          <a:lstStyle/>
+          <a:p>
+            <a:pPr algn="ctr"/>
+          </a:p>
+        </p:txBody>
+      </p:sp>
+      <p:sp>
+        <p:nvSpPr>
+          <p:cNvPr id="18" name="TextBox 17"/>
+          <p:cNvSpPr txBox="1"/>
+          <p:nvPr/>
+        </p:nvSpPr>
+        <p:spPr>
+          <a:xfrm>
+            <a:off x="8467344" y="1874519"/>
+            <a:ext cx="3108960" cy="320040"/>
+          </a:xfrm>
+          <a:prstGeom prst="rect">
+            <a:avLst/>
+          </a:prstGeom>
+          <a:noFill/>
+        </p:spPr>
+        <p:txBody>
+          <a:bodyPr wrap="square" anchor="t" lIns="0" rIns="0" tIns="0" bIns="0">
+            <a:spAutoFit/>
+          </a:bodyPr>
+          <a:lstStyle/>
+          <a:p>
+            <a:pPr algn="l">
+              <a:lnSpc>
+                <a:spcPct val="115000"/>
+              </a:lnSpc>
+              <a:spcBef>
+                <a:spcPts val="0"/>
+              </a:spcBef>
+            </a:pPr>
+            <a:r>
+              <a:rPr sz="1250" b="1" i="0">
+                <a:solidFill>
+                  <a:srgbClr val="10233A"/>
+                </a:solidFill>
+                <a:latin typeface="PingFang HK"/>
+              </a:rPr>
+              <a:t>未開始</a:t>
+            </a:r>
+          </a:p>
+        </p:txBody>
+      </p:sp>
+      <p:sp>
+        <p:nvSpPr>
+          <p:cNvPr id="19" name="TextBox 18"/>
+          <p:cNvSpPr txBox="1"/>
+          <p:nvPr/>
+        </p:nvSpPr>
+        <p:spPr>
+          <a:xfrm>
+            <a:off x="8467344" y="2331720"/>
+            <a:ext cx="3154680" cy="2834640"/>
+          </a:xfrm>
+          <a:prstGeom prst="rect">
+            <a:avLst/>
+          </a:prstGeom>
+          <a:noFill/>
+        </p:spPr>
+        <p:txBody>
+          <a:bodyPr wrap="square" anchor="t" lIns="0" rIns="0" tIns="0" bIns="0">
+            <a:spAutoFit/>
+          </a:bodyPr>
+          <a:lstStyle/>
+          <a:p>
+            <a:pPr algn="l">
+              <a:lnSpc>
+                <a:spcPct val="125000"/>
+              </a:lnSpc>
+              <a:spcBef>
+                <a:spcPts val="0"/>
+              </a:spcBef>
+            </a:pPr>
+            <a:r>
+              <a:rPr sz="950" b="0" i="0">
+                <a:solidFill>
+                  <a:srgbClr val="1E3652"/>
+                </a:solidFill>
+                <a:latin typeface="PingFang HK"/>
+              </a:rPr>
+              <a:t>-  G4 對比、G5 文字溢出</a:t>
+            </a:r>
+          </a:p>
+          <a:p>
+            <a:pPr algn="l">
+              <a:lnSpc>
+                <a:spcPct val="125000"/>
+              </a:lnSpc>
+              <a:spcBef>
+                <a:spcPts val="700"/>
+              </a:spcBef>
+            </a:pPr>
+            <a:r>
+              <a:rPr sz="950" b="0" i="0">
+                <a:solidFill>
+                  <a:srgbClr val="1E3652"/>
+                </a:solidFill>
+                <a:latin typeface="PingFang HK"/>
+              </a:rPr>
+              <a:t>-  修復動作與迴圈</a:t>
+            </a:r>
+          </a:p>
+          <a:p>
+            <a:pPr algn="l">
+              <a:lnSpc>
+                <a:spcPct val="125000"/>
+              </a:lnSpc>
+              <a:spcBef>
+                <a:spcPts val="700"/>
+              </a:spcBef>
+            </a:pPr>
+            <a:r>
+              <a:rPr sz="950" b="0" i="0">
+                <a:solidFill>
+                  <a:srgbClr val="1E3652"/>
+                </a:solidFill>
+                <a:latin typeface="PingFang HK"/>
+              </a:rPr>
+              <a:t>-  110 張測試集與標註</a:t>
+            </a:r>
+          </a:p>
+          <a:p>
+            <a:pPr algn="l">
+              <a:lnSpc>
+                <a:spcPct val="125000"/>
+              </a:lnSpc>
+              <a:spcBef>
+                <a:spcPts val="700"/>
+              </a:spcBef>
+            </a:pPr>
+            <a:r>
+              <a:rPr sz="950" b="0" i="0">
+                <a:solidFill>
+                  <a:srgbClr val="1E3652"/>
+                </a:solidFill>
+                <a:latin typeface="PingFang HK"/>
+              </a:rPr>
+              <a:t>-  人手 deck、baseline、2×2 實驗</a:t>
+            </a:r>
+          </a:p>
+        </p:txBody>
+      </p:sp>
+      <p:sp>
+        <p:nvSpPr>
+          <p:cNvPr id="20" name="TextBox 19"/>
+          <p:cNvSpPr txBox="1"/>
+          <p:nvPr/>
+        </p:nvSpPr>
+        <p:spPr>
+          <a:xfrm>
+            <a:off x="868680" y="4937760"/>
+            <a:ext cx="10881360" cy="548640"/>
+          </a:xfrm>
+          <a:prstGeom prst="rect">
+            <a:avLst/>
+          </a:prstGeom>
+          <a:noFill/>
+        </p:spPr>
+        <p:txBody>
+          <a:bodyPr wrap="square" anchor="t" lIns="0" rIns="0" tIns="0" bIns="0">
+            <a:spAutoFit/>
+          </a:bodyPr>
+          <a:lstStyle/>
+          <a:p>
+            <a:pPr algn="l">
+              <a:lnSpc>
+                <a:spcPct val="115000"/>
+              </a:lnSpc>
+              <a:spcBef>
+                <a:spcPts val="0"/>
+              </a:spcBef>
+            </a:pPr>
+            <a:r>
+              <a:rPr sz="1050" b="0" i="1">
+                <a:solidFill>
+                  <a:srgbClr val="5A6B7C"/>
+                </a:solidFill>
+                <a:latin typeface="PingFang HK"/>
+              </a:rPr>
+              <a:t>76 個測試全綠。上面那份 deck 就是這條 pipeline 由頭到尾跑出來的。</a:t>
+            </a:r>
+          </a:p>
+        </p:txBody>
+      </p:sp>
+    </p:spTree>
+  </p:cSld>
+  <p:clrMapOvr>
+    <a:masterClrMapping/>
+  </p:clrMapOvr>
+</p:sld>
+</file>
+
+<file path=ppt/slides/slide12.xml><?xml version="1.0" encoding="utf-8"?>
+<p:sld xmlns:a="http://schemas.openxmlformats.org/drawingml/2006/main" xmlns:p="http://schemas.openxmlformats.org/presentationml/2006/main" xmlns:r="http://schemas.openxmlformats.org/officeDocument/2006/relationships">
+  <p:cSld>
+    <p:spTree>
+      <p:nvGrpSpPr>
+        <p:cNvPr id="1" name=""/>
+        <p:cNvGrpSpPr/>
+        <p:nvPr/>
+      </p:nvGrpSpPr>
+      <p:grpSpPr/>
+      <p:sp>
+        <p:nvSpPr>
+          <p:cNvPr id="2" name="Rectangle 1"/>
+          <p:cNvSpPr/>
+          <p:nvPr/>
+        </p:nvSpPr>
+        <p:spPr>
+          <a:xfrm>
+            <a:off x="0" y="0"/>
+            <a:ext cx="237744" cy="6858000"/>
+          </a:xfrm>
+          <a:prstGeom prst="rect">
+            <a:avLst/>
+          </a:prstGeom>
+          <a:solidFill>
+            <a:srgbClr val="10233A"/>
+          </a:solidFill>
+          <a:ln>
+            <a:noFill/>
+          </a:ln>
+          <a:effectLst/>
+        </p:spPr>
+        <p:txBody>
+          <a:bodyPr rtlCol="0" anchor="ctr" wrap="square"/>
+          <a:lstStyle/>
+          <a:p>
+            <a:pPr algn="ctr"/>
+          </a:p>
+        </p:txBody>
+      </p:sp>
+      <p:sp>
+        <p:nvSpPr>
+          <p:cNvPr id="3" name="Rectangle 2"/>
+          <p:cNvSpPr/>
+          <p:nvPr/>
+        </p:nvSpPr>
+        <p:spPr>
+          <a:xfrm>
+            <a:off x="237744" y="0"/>
+            <a:ext cx="45720" cy="6858000"/>
+          </a:xfrm>
+          <a:prstGeom prst="rect">
+            <a:avLst/>
+          </a:prstGeom>
+          <a:solidFill>
+            <a:srgbClr val="C08A2E"/>
+          </a:solidFill>
+          <a:ln>
+            <a:noFill/>
+          </a:ln>
+          <a:effectLst/>
+        </p:spPr>
+        <p:txBody>
+          <a:bodyPr rtlCol="0" anchor="ctr" wrap="square"/>
+          <a:lstStyle/>
+          <a:p>
+            <a:pPr algn="ctr"/>
+          </a:p>
+        </p:txBody>
+      </p:sp>
+      <p:sp>
+        <p:nvSpPr>
+          <p:cNvPr id="4" name="TextBox 3"/>
+          <p:cNvSpPr txBox="1"/>
+          <p:nvPr/>
+        </p:nvSpPr>
+        <p:spPr>
+          <a:xfrm>
+            <a:off x="868680" y="384048"/>
+            <a:ext cx="10607040" cy="274320"/>
+          </a:xfrm>
+          <a:prstGeom prst="rect">
+            <a:avLst/>
+          </a:prstGeom>
+          <a:noFill/>
+        </p:spPr>
+        <p:txBody>
+          <a:bodyPr wrap="square" anchor="t" lIns="0" rIns="0" tIns="0" bIns="0">
+            <a:spAutoFit/>
+          </a:bodyPr>
+          <a:lstStyle/>
+          <a:p>
+            <a:pPr algn="l">
+              <a:lnSpc>
+                <a:spcPct val="115000"/>
+              </a:lnSpc>
+              <a:spcBef>
+                <a:spcPts val="0"/>
+              </a:spcBef>
+            </a:pPr>
+            <a:r>
+              <a:rPr sz="950" b="1" i="0">
+                <a:solidFill>
+                  <a:srgbClr val="C08A2E"/>
+                </a:solidFill>
+                <a:latin typeface="PingFang HK"/>
+              </a:rPr>
+              <a:t>計劃</a:t>
+            </a:r>
+          </a:p>
+        </p:txBody>
+      </p:sp>
+      <p:sp>
+        <p:nvSpPr>
+          <p:cNvPr id="5" name="TextBox 4"/>
+          <p:cNvSpPr txBox="1"/>
+          <p:nvPr/>
+        </p:nvSpPr>
+        <p:spPr>
+          <a:xfrm>
+            <a:off x="868680" y="640080"/>
+            <a:ext cx="10881360" cy="685800"/>
+          </a:xfrm>
+          <a:prstGeom prst="rect">
+            <a:avLst/>
+          </a:prstGeom>
+          <a:noFill/>
+        </p:spPr>
+        <p:txBody>
+          <a:bodyPr wrap="square" anchor="t" lIns="0" rIns="0" tIns="0" bIns="0">
+            <a:spAutoFit/>
+          </a:bodyPr>
+          <a:lstStyle/>
+          <a:p>
+            <a:pPr algn="l">
+              <a:lnSpc>
+                <a:spcPct val="105000"/>
+              </a:lnSpc>
+              <a:spcBef>
+                <a:spcPts val="0"/>
+              </a:spcBef>
+            </a:pPr>
+            <a:r>
+              <a:rPr sz="2500" b="1" i="0">
+                <a:solidFill>
+                  <a:srgbClr val="10233A"/>
+                </a:solidFill>
+                <a:latin typeface="PingFang HK"/>
+              </a:rPr>
+              <a:t>實驗設計，與時間表</a:t>
+            </a:r>
+          </a:p>
+        </p:txBody>
+      </p:sp>
+      <p:sp>
+        <p:nvSpPr>
+          <p:cNvPr id="6" name="Rectangle 5"/>
+          <p:cNvSpPr/>
+          <p:nvPr/>
+        </p:nvSpPr>
+        <p:spPr>
+          <a:xfrm>
+            <a:off x="868680" y="1389888"/>
+            <a:ext cx="10881360" cy="12801"/>
+          </a:xfrm>
+          <a:prstGeom prst="rect">
+            <a:avLst/>
+          </a:prstGeom>
+          <a:solidFill>
+            <a:srgbClr val="DDE2E8"/>
+          </a:solidFill>
+          <a:ln>
+            <a:noFill/>
+          </a:ln>
+          <a:effectLst/>
+        </p:spPr>
+        <p:txBody>
+          <a:bodyPr rtlCol="0" anchor="ctr" wrap="square"/>
+          <a:lstStyle/>
+          <a:p>
+            <a:pPr algn="ctr"/>
+          </a:p>
+        </p:txBody>
+      </p:sp>
+      <p:sp>
+        <p:nvSpPr>
+          <p:cNvPr id="7" name="TextBox 6"/>
+          <p:cNvSpPr txBox="1"/>
+          <p:nvPr/>
+        </p:nvSpPr>
+        <p:spPr>
+          <a:xfrm>
+            <a:off x="11155680" y="6355080"/>
+            <a:ext cx="640080" cy="274320"/>
+          </a:xfrm>
+          <a:prstGeom prst="rect">
+            <a:avLst/>
+          </a:prstGeom>
+          <a:noFill/>
+        </p:spPr>
+        <p:txBody>
+          <a:bodyPr wrap="square" anchor="t" lIns="0" rIns="0" tIns="0" bIns="0">
+            <a:spAutoFit/>
+          </a:bodyPr>
+          <a:lstStyle/>
+          <a:p>
+            <a:pPr algn="r">
+              <a:lnSpc>
+                <a:spcPct val="115000"/>
+              </a:lnSpc>
+              <a:spcBef>
+                <a:spcPts val="0"/>
+              </a:spcBef>
+            </a:pPr>
+            <a:r>
+              <a:rPr sz="900" b="0" i="0">
+                <a:solidFill>
+                  <a:srgbClr val="8A99A8"/>
+                </a:solidFill>
+                <a:latin typeface="PingFang HK"/>
+              </a:rPr>
+              <a:t>12</a:t>
             </a:r>
           </a:p>
         </p:txBody>
@@ -5525,7 +6131,7 @@
 </p:sld>
 </file>
 
-<file path=ppt/slides/slide12.xml><?xml version="1.0" encoding="utf-8"?>
+<file path=ppt/slides/slide13.xml><?xml version="1.0" encoding="utf-8"?>
 <p:sld xmlns:a="http://schemas.openxmlformats.org/drawingml/2006/main" xmlns:p="http://schemas.openxmlformats.org/presentationml/2006/main" xmlns:r="http://schemas.openxmlformats.org/officeDocument/2006/relationships">
   <p:cSld>
     <p:spTree>
@@ -5746,7 +6352,7 @@
                 </a:solidFill>
                 <a:latin typeface="PingFang HK"/>
               </a:rPr>
-              <a:t>12</a:t>
+              <a:t>13</a:t>
             </a:r>
           </a:p>
         </p:txBody>

--- a/deck/progress_deck_zh.pptx
+++ b/deck/progress_deck_zh.pptx
@@ -18,6 +18,7 @@
     <p:sldId id="266" r:id="rId17"/>
     <p:sldId id="267" r:id="rId18"/>
     <p:sldId id="268" r:id="rId19"/>
+    <p:sldId id="269" r:id="rId20"/>
   </p:sldIdLst>
   <p:sldSz cx="12191695" cy="6858000" type="screen4x3"/>
   <p:notesSz cx="6858000" cy="9144000"/>
@@ -3493,7 +3494,7 @@
                 </a:solidFill>
                 <a:latin typeface="PingFang HK"/>
               </a:rPr>
-              <a:t>實際執行</a:t>
+              <a:t>目前結果</a:t>
             </a:r>
           </a:p>
         </p:txBody>
@@ -3535,7 +3536,7 @@
                 </a:solidFill>
                 <a:latin typeface="PingFang HK"/>
               </a:rPr>
-              <a:t>整條 pipeline 跑得完，而且會老實地報錯</a:t>
+              <a:t>每一張生成出來的 slide 都至少違反一個 gate</a:t>
             </a:r>
           </a:p>
         </p:txBody>
@@ -3614,7 +3615,7 @@
       </p:sp>
       <p:pic>
         <p:nvPicPr>
-          <p:cNvPr id="8" name="Picture 7" descr="console_run.png"/>
+          <p:cNvPr id="8" name="Picture 7" descr="slide02.png"/>
           <p:cNvPicPr>
             <a:picLocks noChangeAspect="1"/>
           </p:cNvPicPr>
@@ -3629,7 +3630,7 @@
         <p:spPr>
           <a:xfrm>
             <a:off x="868680" y="1645920"/>
-            <a:ext cx="7589520" cy="4827813"/>
+            <a:ext cx="6263640" cy="3523298"/>
           </a:xfrm>
           <a:prstGeom prst="rect">
             <a:avLst/>
@@ -3644,8 +3645,8 @@
         </p:nvSpPr>
         <p:spPr>
           <a:xfrm>
-            <a:off x="868680" y="6455664"/>
-            <a:ext cx="7589520" cy="274320"/>
+            <a:off x="868680" y="5257800"/>
+            <a:ext cx="6263640" cy="457200"/>
           </a:xfrm>
           <a:prstGeom prst="rect">
             <a:avLst/>
@@ -3667,27 +3668,698 @@
               </a:spcBef>
             </a:pPr>
             <a:r>
-              <a:rPr sz="800" b="0" i="1">
+              <a:rPr sz="850" b="0" i="1">
                 <a:solidFill>
                   <a:srgbClr val="5A6B7C"/>
                 </a:solidFill>
                 <a:latin typeface="PingFang HK"/>
               </a:rPr>
-              <a:t>真實終端輸出；中間幾行省略。</a:t>
-            </a:r>
-          </a:p>
-        </p:txBody>
-      </p:sp>
-      <p:sp>
-        <p:nvSpPr>
-          <p:cNvPr id="10" name="TextBox 9"/>
+              <a:t>生成的 deck 第 2 頁：圖已放入，圖說在下面</a:t>
+            </a:r>
+          </a:p>
+        </p:txBody>
+      </p:sp>
+      <p:graphicFrame>
+        <p:nvGraphicFramePr>
+          <p:cNvPr id="10" name="Table 9"/>
+          <p:cNvGraphicFramePr>
+            <a:graphicFrameLocks noGrp="1"/>
+          </p:cNvGraphicFramePr>
+          <p:nvPr/>
+        </p:nvGraphicFramePr>
+        <p:xfrm>
+          <a:off x="7452360" y="1664208"/>
+          <a:ext cx="4160519" cy="2121408"/>
+        </p:xfrm>
+        <a:graphic>
+          <a:graphicData uri="http://schemas.openxmlformats.org/drawingml/2006/table">
+            <a:tbl>
+              <a:tblPr firstRow="1" bandRow="1">
+                <a:tableStyleId>{5C22544A-7EE6-4342-B048-85BDC9FD1C3A}</a:tableStyleId>
+              </a:tblPr>
+              <a:tblGrid>
+                <a:gridCol w="1874519"/>
+                <a:gridCol w="1143000"/>
+                <a:gridCol w="1143000"/>
+              </a:tblGrid>
+              <a:tr h="310896">
+                <a:tc>
+                  <a:txBody>
+                    <a:bodyPr wrap="square"/>
+                    <a:lstStyle/>
+                    <a:p>
+                      <a:pPr algn="l">
+                        <a:lnSpc>
+                          <a:spcPct val="115000"/>
+                        </a:lnSpc>
+                        <a:spcBef>
+                          <a:spcPts val="0"/>
+                        </a:spcBef>
+                      </a:pPr>
+                      <a:r>
+                        <a:rPr sz="950" b="1" i="0">
+                          <a:solidFill>
+                            <a:srgbClr val="10233A"/>
+                          </a:solidFill>
+                          <a:latin typeface="PingFang HK"/>
+                        </a:rPr>
+                        <a:t/>
+                      </a:r>
+                    </a:p>
+                  </a:txBody>
+                  <a:tcPr marL="73152" marT="36576" marB="36576">
+                    <a:solidFill>
+                      <a:srgbClr val="ECF1F5"/>
+                    </a:solidFill>
+                  </a:tcPr>
+                </a:tc>
+                <a:tc>
+                  <a:txBody>
+                    <a:bodyPr wrap="square"/>
+                    <a:lstStyle/>
+                    <a:p>
+                      <a:pPr algn="l">
+                        <a:lnSpc>
+                          <a:spcPct val="115000"/>
+                        </a:lnSpc>
+                        <a:spcBef>
+                          <a:spcPts val="0"/>
+                        </a:spcBef>
+                      </a:pPr>
+                      <a:r>
+                        <a:rPr sz="950" b="1" i="0">
+                          <a:solidFill>
+                            <a:srgbClr val="10233A"/>
+                          </a:solidFill>
+                          <a:latin typeface="PingFang HK"/>
+                        </a:rPr>
+                        <a:t>PPTAgent</a:t>
+                      </a:r>
+                    </a:p>
+                  </a:txBody>
+                  <a:tcPr marL="73152" marT="36576" marB="36576">
+                    <a:solidFill>
+                      <a:srgbClr val="ECF1F5"/>
+                    </a:solidFill>
+                  </a:tcPr>
+                </a:tc>
+                <a:tc>
+                  <a:txBody>
+                    <a:bodyPr wrap="square"/>
+                    <a:lstStyle/>
+                    <a:p>
+                      <a:pPr algn="l">
+                        <a:lnSpc>
+                          <a:spcPct val="115000"/>
+                        </a:lnSpc>
+                        <a:spcBef>
+                          <a:spcPts val="0"/>
+                        </a:spcBef>
+                      </a:pPr>
+                      <a:r>
+                        <a:rPr sz="950" b="1" i="0">
+                          <a:solidFill>
+                            <a:srgbClr val="10233A"/>
+                          </a:solidFill>
+                          <a:latin typeface="PingFang HK"/>
+                        </a:rPr>
+                        <a:t>DOC2PPT</a:t>
+                      </a:r>
+                    </a:p>
+                  </a:txBody>
+                  <a:tcPr marL="73152" marT="36576" marB="36576">
+                    <a:solidFill>
+                      <a:srgbClr val="ECF1F5"/>
+                    </a:solidFill>
+                  </a:tcPr>
+                </a:tc>
+              </a:tr>
+              <a:tr h="301752">
+                <a:tc>
+                  <a:txBody>
+                    <a:bodyPr wrap="square"/>
+                    <a:lstStyle/>
+                    <a:p>
+                      <a:pPr algn="l">
+                        <a:lnSpc>
+                          <a:spcPct val="110000"/>
+                        </a:lnSpc>
+                        <a:spcBef>
+                          <a:spcPts val="0"/>
+                        </a:spcBef>
+                      </a:pPr>
+                      <a:r>
+                        <a:rPr sz="1000" b="1" i="0">
+                          <a:solidFill>
+                            <a:srgbClr val="10233A"/>
+                          </a:solidFill>
+                          <a:latin typeface="PingFang HK"/>
+                        </a:rPr>
+                        <a:t>頁數</a:t>
+                      </a:r>
+                    </a:p>
+                  </a:txBody>
+                  <a:tcPr marL="73152" marT="36576" marB="36576">
+                    <a:solidFill>
+                      <a:srgbClr val="FFFFFF"/>
+                    </a:solidFill>
+                  </a:tcPr>
+                </a:tc>
+                <a:tc>
+                  <a:txBody>
+                    <a:bodyPr wrap="square"/>
+                    <a:lstStyle/>
+                    <a:p>
+                      <a:pPr algn="l">
+                        <a:lnSpc>
+                          <a:spcPct val="110000"/>
+                        </a:lnSpc>
+                        <a:spcBef>
+                          <a:spcPts val="0"/>
+                        </a:spcBef>
+                      </a:pPr>
+                      <a:r>
+                        <a:rPr sz="1000" b="0" i="0">
+                          <a:solidFill>
+                            <a:srgbClr val="1E3652"/>
+                          </a:solidFill>
+                          <a:latin typeface="PingFang HK"/>
+                        </a:rPr>
+                        <a:t>9</a:t>
+                      </a:r>
+                    </a:p>
+                  </a:txBody>
+                  <a:tcPr marL="73152" marT="36576" marB="36576">
+                    <a:solidFill>
+                      <a:srgbClr val="FFFFFF"/>
+                    </a:solidFill>
+                  </a:tcPr>
+                </a:tc>
+                <a:tc>
+                  <a:txBody>
+                    <a:bodyPr wrap="square"/>
+                    <a:lstStyle/>
+                    <a:p>
+                      <a:pPr algn="l">
+                        <a:lnSpc>
+                          <a:spcPct val="110000"/>
+                        </a:lnSpc>
+                        <a:spcBef>
+                          <a:spcPts val="0"/>
+                        </a:spcBef>
+                      </a:pPr>
+                      <a:r>
+                        <a:rPr sz="1000" b="0" i="0">
+                          <a:solidFill>
+                            <a:srgbClr val="1E3652"/>
+                          </a:solidFill>
+                          <a:latin typeface="PingFang HK"/>
+                        </a:rPr>
+                        <a:t>9</a:t>
+                      </a:r>
+                    </a:p>
+                  </a:txBody>
+                  <a:tcPr marL="73152" marT="36576" marB="36576">
+                    <a:solidFill>
+                      <a:srgbClr val="FFFFFF"/>
+                    </a:solidFill>
+                  </a:tcPr>
+                </a:tc>
+              </a:tr>
+              <a:tr h="301752">
+                <a:tc>
+                  <a:txBody>
+                    <a:bodyPr wrap="square"/>
+                    <a:lstStyle/>
+                    <a:p>
+                      <a:pPr algn="l">
+                        <a:lnSpc>
+                          <a:spcPct val="110000"/>
+                        </a:lnSpc>
+                        <a:spcBef>
+                          <a:spcPts val="0"/>
+                        </a:spcBef>
+                      </a:pPr>
+                      <a:r>
+                        <a:rPr sz="1000" b="1" i="0">
+                          <a:solidFill>
+                            <a:srgbClr val="10233A"/>
+                          </a:solidFill>
+                          <a:latin typeface="PingFang HK"/>
+                        </a:rPr>
+                        <a:t>合格頁</a:t>
+                      </a:r>
+                    </a:p>
+                  </a:txBody>
+                  <a:tcPr marL="73152" marT="36576" marB="36576">
+                    <a:solidFill>
+                      <a:srgbClr val="FFFFFF"/>
+                    </a:solidFill>
+                  </a:tcPr>
+                </a:tc>
+                <a:tc>
+                  <a:txBody>
+                    <a:bodyPr wrap="square"/>
+                    <a:lstStyle/>
+                    <a:p>
+                      <a:pPr algn="l">
+                        <a:lnSpc>
+                          <a:spcPct val="110000"/>
+                        </a:lnSpc>
+                        <a:spcBef>
+                          <a:spcPts val="0"/>
+                        </a:spcBef>
+                      </a:pPr>
+                      <a:r>
+                        <a:rPr sz="1000" b="0" i="0">
+                          <a:solidFill>
+                            <a:srgbClr val="1E3652"/>
+                          </a:solidFill>
+                          <a:latin typeface="PingFang HK"/>
+                        </a:rPr>
+                        <a:t>0</a:t>
+                      </a:r>
+                    </a:p>
+                  </a:txBody>
+                  <a:tcPr marL="73152" marT="36576" marB="36576">
+                    <a:solidFill>
+                      <a:srgbClr val="FFFFFF"/>
+                    </a:solidFill>
+                  </a:tcPr>
+                </a:tc>
+                <a:tc>
+                  <a:txBody>
+                    <a:bodyPr wrap="square"/>
+                    <a:lstStyle/>
+                    <a:p>
+                      <a:pPr algn="l">
+                        <a:lnSpc>
+                          <a:spcPct val="110000"/>
+                        </a:lnSpc>
+                        <a:spcBef>
+                          <a:spcPts val="0"/>
+                        </a:spcBef>
+                      </a:pPr>
+                      <a:r>
+                        <a:rPr sz="1000" b="0" i="0">
+                          <a:solidFill>
+                            <a:srgbClr val="1E3652"/>
+                          </a:solidFill>
+                          <a:latin typeface="PingFang HK"/>
+                        </a:rPr>
+                        <a:t>0</a:t>
+                      </a:r>
+                    </a:p>
+                  </a:txBody>
+                  <a:tcPr marL="73152" marT="36576" marB="36576">
+                    <a:solidFill>
+                      <a:srgbClr val="FFFFFF"/>
+                    </a:solidFill>
+                  </a:tcPr>
+                </a:tc>
+              </a:tr>
+              <a:tr h="301752">
+                <a:tc>
+                  <a:txBody>
+                    <a:bodyPr wrap="square"/>
+                    <a:lstStyle/>
+                    <a:p>
+                      <a:pPr algn="l">
+                        <a:lnSpc>
+                          <a:spcPct val="110000"/>
+                        </a:lnSpc>
+                        <a:spcBef>
+                          <a:spcPts val="0"/>
+                        </a:spcBef>
+                      </a:pPr>
+                      <a:r>
+                        <a:rPr sz="1000" b="1" i="0">
+                          <a:solidFill>
+                            <a:srgbClr val="10233A"/>
+                          </a:solidFill>
+                          <a:latin typeface="PingFang HK"/>
+                        </a:rPr>
+                        <a:t>SRR（頁面級）</a:t>
+                      </a:r>
+                    </a:p>
+                  </a:txBody>
+                  <a:tcPr marL="73152" marT="36576" marB="36576">
+                    <a:solidFill>
+                      <a:srgbClr val="FFFFFF"/>
+                    </a:solidFill>
+                  </a:tcPr>
+                </a:tc>
+                <a:tc>
+                  <a:txBody>
+                    <a:bodyPr wrap="square"/>
+                    <a:lstStyle/>
+                    <a:p>
+                      <a:pPr algn="l">
+                        <a:lnSpc>
+                          <a:spcPct val="110000"/>
+                        </a:lnSpc>
+                        <a:spcBef>
+                          <a:spcPts val="0"/>
+                        </a:spcBef>
+                      </a:pPr>
+                      <a:r>
+                        <a:rPr sz="1000" b="0" i="0">
+                          <a:solidFill>
+                            <a:srgbClr val="1E3652"/>
+                          </a:solidFill>
+                          <a:latin typeface="PingFang HK"/>
+                        </a:rPr>
+                        <a:t>0.00</a:t>
+                      </a:r>
+                    </a:p>
+                  </a:txBody>
+                  <a:tcPr marL="73152" marT="36576" marB="36576">
+                    <a:solidFill>
+                      <a:srgbClr val="FFFFFF"/>
+                    </a:solidFill>
+                  </a:tcPr>
+                </a:tc>
+                <a:tc>
+                  <a:txBody>
+                    <a:bodyPr wrap="square"/>
+                    <a:lstStyle/>
+                    <a:p>
+                      <a:pPr algn="l">
+                        <a:lnSpc>
+                          <a:spcPct val="110000"/>
+                        </a:lnSpc>
+                        <a:spcBef>
+                          <a:spcPts val="0"/>
+                        </a:spcBef>
+                      </a:pPr>
+                      <a:r>
+                        <a:rPr sz="1000" b="0" i="0">
+                          <a:solidFill>
+                            <a:srgbClr val="1E3652"/>
+                          </a:solidFill>
+                          <a:latin typeface="PingFang HK"/>
+                        </a:rPr>
+                        <a:t>0.00</a:t>
+                      </a:r>
+                    </a:p>
+                  </a:txBody>
+                  <a:tcPr marL="73152" marT="36576" marB="36576">
+                    <a:solidFill>
+                      <a:srgbClr val="FFFFFF"/>
+                    </a:solidFill>
+                  </a:tcPr>
+                </a:tc>
+              </a:tr>
+              <a:tr h="301752">
+                <a:tc>
+                  <a:txBody>
+                    <a:bodyPr wrap="square"/>
+                    <a:lstStyle/>
+                    <a:p>
+                      <a:pPr algn="l">
+                        <a:lnSpc>
+                          <a:spcPct val="110000"/>
+                        </a:lnSpc>
+                        <a:spcBef>
+                          <a:spcPts val="0"/>
+                        </a:spcBef>
+                      </a:pPr>
+                      <a:r>
+                        <a:rPr sz="1000" b="1" i="0">
+                          <a:solidFill>
+                            <a:srgbClr val="10233A"/>
+                          </a:solidFill>
+                          <a:latin typeface="PingFang HK"/>
+                        </a:rPr>
+                        <a:t>違規數</a:t>
+                      </a:r>
+                    </a:p>
+                  </a:txBody>
+                  <a:tcPr marL="73152" marT="36576" marB="36576">
+                    <a:solidFill>
+                      <a:srgbClr val="FFFFFF"/>
+                    </a:solidFill>
+                  </a:tcPr>
+                </a:tc>
+                <a:tc>
+                  <a:txBody>
+                    <a:bodyPr wrap="square"/>
+                    <a:lstStyle/>
+                    <a:p>
+                      <a:pPr algn="l">
+                        <a:lnSpc>
+                          <a:spcPct val="110000"/>
+                        </a:lnSpc>
+                        <a:spcBef>
+                          <a:spcPts val="0"/>
+                        </a:spcBef>
+                      </a:pPr>
+                      <a:r>
+                        <a:rPr sz="1000" b="0" i="0">
+                          <a:solidFill>
+                            <a:srgbClr val="1E3652"/>
+                          </a:solidFill>
+                          <a:latin typeface="PingFang HK"/>
+                        </a:rPr>
+                        <a:t>33</a:t>
+                      </a:r>
+                    </a:p>
+                  </a:txBody>
+                  <a:tcPr marL="73152" marT="36576" marB="36576">
+                    <a:solidFill>
+                      <a:srgbClr val="FFFFFF"/>
+                    </a:solidFill>
+                  </a:tcPr>
+                </a:tc>
+                <a:tc>
+                  <a:txBody>
+                    <a:bodyPr wrap="square"/>
+                    <a:lstStyle/>
+                    <a:p>
+                      <a:pPr algn="l">
+                        <a:lnSpc>
+                          <a:spcPct val="110000"/>
+                        </a:lnSpc>
+                        <a:spcBef>
+                          <a:spcPts val="0"/>
+                        </a:spcBef>
+                      </a:pPr>
+                      <a:r>
+                        <a:rPr sz="1000" b="0" i="0">
+                          <a:solidFill>
+                            <a:srgbClr val="1E3652"/>
+                          </a:solidFill>
+                          <a:latin typeface="PingFang HK"/>
+                        </a:rPr>
+                        <a:t>32</a:t>
+                      </a:r>
+                    </a:p>
+                  </a:txBody>
+                  <a:tcPr marL="73152" marT="36576" marB="36576">
+                    <a:solidFill>
+                      <a:srgbClr val="FFFFFF"/>
+                    </a:solidFill>
+                  </a:tcPr>
+                </a:tc>
+              </a:tr>
+              <a:tr h="301752">
+                <a:tc>
+                  <a:txBody>
+                    <a:bodyPr wrap="square"/>
+                    <a:lstStyle/>
+                    <a:p>
+                      <a:pPr algn="l">
+                        <a:lnSpc>
+                          <a:spcPct val="110000"/>
+                        </a:lnSpc>
+                        <a:spcBef>
+                          <a:spcPts val="0"/>
+                        </a:spcBef>
+                      </a:pPr>
+                      <a:r>
+                        <a:rPr sz="1000" b="1" i="0">
+                          <a:solidFill>
+                            <a:srgbClr val="10233A"/>
+                          </a:solidFill>
+                          <a:latin typeface="PingFang HK"/>
+                        </a:rPr>
+                        <a:t>G3 違規頁</a:t>
+                      </a:r>
+                    </a:p>
+                  </a:txBody>
+                  <a:tcPr marL="73152" marT="36576" marB="36576">
+                    <a:solidFill>
+                      <a:srgbClr val="FFFFFF"/>
+                    </a:solidFill>
+                  </a:tcPr>
+                </a:tc>
+                <a:tc>
+                  <a:txBody>
+                    <a:bodyPr wrap="square"/>
+                    <a:lstStyle/>
+                    <a:p>
+                      <a:pPr algn="l">
+                        <a:lnSpc>
+                          <a:spcPct val="110000"/>
+                        </a:lnSpc>
+                        <a:spcBef>
+                          <a:spcPts val="0"/>
+                        </a:spcBef>
+                      </a:pPr>
+                      <a:r>
+                        <a:rPr sz="1000" b="0" i="0">
+                          <a:solidFill>
+                            <a:srgbClr val="1E3652"/>
+                          </a:solidFill>
+                          <a:latin typeface="PingFang HK"/>
+                        </a:rPr>
+                        <a:t>9 / 9</a:t>
+                      </a:r>
+                    </a:p>
+                  </a:txBody>
+                  <a:tcPr marL="73152" marT="36576" marB="36576">
+                    <a:solidFill>
+                      <a:srgbClr val="FFFFFF"/>
+                    </a:solidFill>
+                  </a:tcPr>
+                </a:tc>
+                <a:tc>
+                  <a:txBody>
+                    <a:bodyPr wrap="square"/>
+                    <a:lstStyle/>
+                    <a:p>
+                      <a:pPr algn="l">
+                        <a:lnSpc>
+                          <a:spcPct val="110000"/>
+                        </a:lnSpc>
+                        <a:spcBef>
+                          <a:spcPts val="0"/>
+                        </a:spcBef>
+                      </a:pPr>
+                      <a:r>
+                        <a:rPr sz="1000" b="0" i="0">
+                          <a:solidFill>
+                            <a:srgbClr val="1E3652"/>
+                          </a:solidFill>
+                          <a:latin typeface="PingFang HK"/>
+                        </a:rPr>
+                        <a:t>9 / 9</a:t>
+                      </a:r>
+                    </a:p>
+                  </a:txBody>
+                  <a:tcPr marL="73152" marT="36576" marB="36576">
+                    <a:solidFill>
+                      <a:srgbClr val="FFFFFF"/>
+                    </a:solidFill>
+                  </a:tcPr>
+                </a:tc>
+              </a:tr>
+              <a:tr h="301752">
+                <a:tc>
+                  <a:txBody>
+                    <a:bodyPr wrap="square"/>
+                    <a:lstStyle/>
+                    <a:p>
+                      <a:pPr algn="l">
+                        <a:lnSpc>
+                          <a:spcPct val="110000"/>
+                        </a:lnSpc>
+                        <a:spcBef>
+                          <a:spcPts val="0"/>
+                        </a:spcBef>
+                      </a:pPr>
+                      <a:r>
+                        <a:rPr sz="1000" b="1" i="0">
+                          <a:solidFill>
+                            <a:srgbClr val="10233A"/>
+                          </a:solidFill>
+                          <a:latin typeface="PingFang HK"/>
+                        </a:rPr>
+                        <a:t>G6 違規頁</a:t>
+                      </a:r>
+                    </a:p>
+                  </a:txBody>
+                  <a:tcPr marL="73152" marT="36576" marB="36576">
+                    <a:solidFill>
+                      <a:srgbClr val="FFFFFF"/>
+                    </a:solidFill>
+                  </a:tcPr>
+                </a:tc>
+                <a:tc>
+                  <a:txBody>
+                    <a:bodyPr wrap="square"/>
+                    <a:lstStyle/>
+                    <a:p>
+                      <a:pPr algn="l">
+                        <a:lnSpc>
+                          <a:spcPct val="110000"/>
+                        </a:lnSpc>
+                        <a:spcBef>
+                          <a:spcPts val="0"/>
+                        </a:spcBef>
+                      </a:pPr>
+                      <a:r>
+                        <a:rPr sz="1000" b="0" i="0">
+                          <a:solidFill>
+                            <a:srgbClr val="1E3652"/>
+                          </a:solidFill>
+                          <a:latin typeface="PingFang HK"/>
+                        </a:rPr>
+                        <a:t>8 / 9</a:t>
+                      </a:r>
+                    </a:p>
+                  </a:txBody>
+                  <a:tcPr marL="73152" marT="36576" marB="36576">
+                    <a:solidFill>
+                      <a:srgbClr val="FFFFFF"/>
+                    </a:solidFill>
+                  </a:tcPr>
+                </a:tc>
+                <a:tc>
+                  <a:txBody>
+                    <a:bodyPr wrap="square"/>
+                    <a:lstStyle/>
+                    <a:p>
+                      <a:pPr algn="l">
+                        <a:lnSpc>
+                          <a:spcPct val="110000"/>
+                        </a:lnSpc>
+                        <a:spcBef>
+                          <a:spcPts val="0"/>
+                        </a:spcBef>
+                      </a:pPr>
+                      <a:r>
+                        <a:rPr sz="1000" b="0" i="0">
+                          <a:solidFill>
+                            <a:srgbClr val="1E3652"/>
+                          </a:solidFill>
+                          <a:latin typeface="PingFang HK"/>
+                        </a:rPr>
+                        <a:t>8 / 9</a:t>
+                      </a:r>
+                    </a:p>
+                  </a:txBody>
+                  <a:tcPr marL="73152" marT="36576" marB="36576">
+                    <a:solidFill>
+                      <a:srgbClr val="FFFFFF"/>
+                    </a:solidFill>
+                  </a:tcPr>
+                </a:tc>
+              </a:tr>
+            </a:tbl>
+          </a:graphicData>
+        </a:graphic>
+      </p:graphicFrame>
+      <p:sp>
+        <p:nvSpPr>
+          <p:cNvPr id="11" name="TextBox 10"/>
           <p:cNvSpPr txBox="1"/>
           <p:nvPr/>
         </p:nvSpPr>
         <p:spPr>
           <a:xfrm>
-            <a:off x="8823960" y="1737360"/>
-            <a:ext cx="2926080" cy="713232"/>
+            <a:off x="7452360" y="4224528"/>
+            <a:ext cx="4206240" cy="1463040"/>
           </a:xfrm>
           <a:prstGeom prst="rect">
             <a:avLst/>
@@ -3702,283 +4374,20 @@
           <a:p>
             <a:pPr algn="l">
               <a:lnSpc>
-                <a:spcPct val="115000"/>
+                <a:spcPct val="135000"/>
               </a:lnSpc>
               <a:spcBef>
                 <a:spcPts val="0"/>
               </a:spcBef>
             </a:pPr>
             <a:r>
-              <a:rPr sz="1000" b="1" i="0">
-                <a:solidFill>
-                  <a:srgbClr val="C08A2E"/>
+              <a:rPr sz="1000" b="0" i="0">
+                <a:solidFill>
+                  <a:srgbClr val="1E3652"/>
                 </a:solidFill>
                 <a:latin typeface="PingFang HK"/>
               </a:rPr>
-              <a:t>parse</a:t>
-            </a:r>
-          </a:p>
-          <a:p>
-            <a:pPr algn="l">
-              <a:lnSpc>
-                <a:spcPct val="125000"/>
-              </a:lnSpc>
-              <a:spcBef>
-                <a:spcPts val="100"/>
-              </a:spcBef>
-            </a:pPr>
-            <a:r>
-              <a:rPr sz="900" b="0" i="0">
-                <a:solidFill>
-                  <a:srgbClr val="1E3652"/>
-                </a:solidFill>
-                <a:latin typeface="PingFang HK"/>
-              </a:rPr>
-              <a:t>8 個章節、24 個圖說、裁出 11 張圖</a:t>
-            </a:r>
-          </a:p>
-        </p:txBody>
-      </p:sp>
-      <p:sp>
-        <p:nvSpPr>
-          <p:cNvPr id="11" name="TextBox 10"/>
-          <p:cNvSpPr txBox="1"/>
-          <p:nvPr/>
-        </p:nvSpPr>
-        <p:spPr>
-          <a:xfrm>
-            <a:off x="8823960" y="2578608"/>
-            <a:ext cx="2926080" cy="713232"/>
-          </a:xfrm>
-          <a:prstGeom prst="rect">
-            <a:avLst/>
-          </a:prstGeom>
-          <a:noFill/>
-        </p:spPr>
-        <p:txBody>
-          <a:bodyPr wrap="square" anchor="t" lIns="0" rIns="0" tIns="0" bIns="0">
-            <a:spAutoFit/>
-          </a:bodyPr>
-          <a:lstStyle/>
-          <a:p>
-            <a:pPr algn="l">
-              <a:lnSpc>
-                <a:spcPct val="115000"/>
-              </a:lnSpc>
-              <a:spcBef>
-                <a:spcPts val="0"/>
-              </a:spcBef>
-            </a:pPr>
-            <a:r>
-              <a:rPr sz="1000" b="1" i="0">
-                <a:solidFill>
-                  <a:srgbClr val="C08A2E"/>
-                </a:solidFill>
-                <a:latin typeface="PingFang HK"/>
-              </a:rPr>
-              <a:t>compose</a:t>
-            </a:r>
-          </a:p>
-          <a:p>
-            <a:pPr algn="l">
-              <a:lnSpc>
-                <a:spcPct val="125000"/>
-              </a:lnSpc>
-              <a:spcBef>
-                <a:spcPts val="100"/>
-              </a:spcBef>
-            </a:pPr>
-            <a:r>
-              <a:rPr sz="900" b="0" i="0">
-                <a:solidFill>
-                  <a:srgbClr val="1E3652"/>
-                </a:solidFill>
-                <a:latin typeface="PingFang HK"/>
-              </a:rPr>
-              <a:t>8 張 slide，每張 90 秒</a:t>
-            </a:r>
-          </a:p>
-        </p:txBody>
-      </p:sp>
-      <p:sp>
-        <p:nvSpPr>
-          <p:cNvPr id="12" name="TextBox 11"/>
-          <p:cNvSpPr txBox="1"/>
-          <p:nvPr/>
-        </p:nvSpPr>
-        <p:spPr>
-          <a:xfrm>
-            <a:off x="8823960" y="3419856"/>
-            <a:ext cx="2926080" cy="713232"/>
-          </a:xfrm>
-          <a:prstGeom prst="rect">
-            <a:avLst/>
-          </a:prstGeom>
-          <a:noFill/>
-        </p:spPr>
-        <p:txBody>
-          <a:bodyPr wrap="square" anchor="t" lIns="0" rIns="0" tIns="0" bIns="0">
-            <a:spAutoFit/>
-          </a:bodyPr>
-          <a:lstStyle/>
-          <a:p>
-            <a:pPr algn="l">
-              <a:lnSpc>
-                <a:spcPct val="115000"/>
-              </a:lnSpc>
-              <a:spcBef>
-                <a:spcPts val="0"/>
-              </a:spcBef>
-            </a:pPr>
-            <a:r>
-              <a:rPr sz="1000" b="1" i="0">
-                <a:solidFill>
-                  <a:srgbClr val="C08A2E"/>
-                </a:solidFill>
-                <a:latin typeface="PingFang HK"/>
-              </a:rPr>
-              <a:t>render</a:t>
-            </a:r>
-          </a:p>
-          <a:p>
-            <a:pPr algn="l">
-              <a:lnSpc>
-                <a:spcPct val="125000"/>
-              </a:lnSpc>
-              <a:spcBef>
-                <a:spcPts val="100"/>
-              </a:spcBef>
-            </a:pPr>
-            <a:r>
-              <a:rPr sz="900" b="0" i="0">
-                <a:solidFill>
-                  <a:srgbClr val="1E3652"/>
-                </a:solidFill>
-                <a:latin typeface="PingFang HK"/>
-              </a:rPr>
-              <a:t>9 頁 deck，原生可編輯</a:t>
-            </a:r>
-          </a:p>
-        </p:txBody>
-      </p:sp>
-      <p:sp>
-        <p:nvSpPr>
-          <p:cNvPr id="13" name="TextBox 12"/>
-          <p:cNvSpPr txBox="1"/>
-          <p:nvPr/>
-        </p:nvSpPr>
-        <p:spPr>
-          <a:xfrm>
-            <a:off x="8823960" y="4261104"/>
-            <a:ext cx="2926080" cy="713232"/>
-          </a:xfrm>
-          <a:prstGeom prst="rect">
-            <a:avLst/>
-          </a:prstGeom>
-          <a:noFill/>
-        </p:spPr>
-        <p:txBody>
-          <a:bodyPr wrap="square" anchor="t" lIns="0" rIns="0" tIns="0" bIns="0">
-            <a:spAutoFit/>
-          </a:bodyPr>
-          <a:lstStyle/>
-          <a:p>
-            <a:pPr algn="l">
-              <a:lnSpc>
-                <a:spcPct val="115000"/>
-              </a:lnSpc>
-              <a:spcBef>
-                <a:spcPts val="0"/>
-              </a:spcBef>
-            </a:pPr>
-            <a:r>
-              <a:rPr sz="1000" b="1" i="0">
-                <a:solidFill>
-                  <a:srgbClr val="C08A2E"/>
-                </a:solidFill>
-                <a:latin typeface="PingFang HK"/>
-              </a:rPr>
-              <a:t>detect</a:t>
-            </a:r>
-          </a:p>
-          <a:p>
-            <a:pPr algn="l">
-              <a:lnSpc>
-                <a:spcPct val="125000"/>
-              </a:lnSpc>
-              <a:spcBef>
-                <a:spcPts val="100"/>
-              </a:spcBef>
-            </a:pPr>
-            <a:r>
-              <a:rPr sz="900" b="0" i="0">
-                <a:solidFill>
-                  <a:srgbClr val="1E3652"/>
-                </a:solidFill>
-                <a:latin typeface="PingFang HK"/>
-              </a:rPr>
-              <a:t>32 個違規，SRR 0.00</a:t>
-            </a:r>
-          </a:p>
-        </p:txBody>
-      </p:sp>
-      <p:sp>
-        <p:nvSpPr>
-          <p:cNvPr id="14" name="TextBox 13"/>
-          <p:cNvSpPr txBox="1"/>
-          <p:nvPr/>
-        </p:nvSpPr>
-        <p:spPr>
-          <a:xfrm>
-            <a:off x="8823960" y="5102352"/>
-            <a:ext cx="2926080" cy="713232"/>
-          </a:xfrm>
-          <a:prstGeom prst="rect">
-            <a:avLst/>
-          </a:prstGeom>
-          <a:noFill/>
-        </p:spPr>
-        <p:txBody>
-          <a:bodyPr wrap="square" anchor="t" lIns="0" rIns="0" tIns="0" bIns="0">
-            <a:spAutoFit/>
-          </a:bodyPr>
-          <a:lstStyle/>
-          <a:p>
-            <a:pPr algn="l">
-              <a:lnSpc>
-                <a:spcPct val="115000"/>
-              </a:lnSpc>
-              <a:spcBef>
-                <a:spcPts val="0"/>
-              </a:spcBef>
-            </a:pPr>
-            <a:r>
-              <a:rPr sz="1000" b="1" i="0">
-                <a:solidFill>
-                  <a:srgbClr val="C08A2E"/>
-                </a:solidFill>
-                <a:latin typeface="PingFang HK"/>
-              </a:rPr>
-              <a:t>pytest</a:t>
-            </a:r>
-          </a:p>
-          <a:p>
-            <a:pPr algn="l">
-              <a:lnSpc>
-                <a:spcPct val="125000"/>
-              </a:lnSpc>
-              <a:spcBef>
-                <a:spcPts val="100"/>
-              </a:spcBef>
-            </a:pPr>
-            <a:r>
-              <a:rPr sz="900" b="0" i="0">
-                <a:solidFill>
-                  <a:srgbClr val="1E3652"/>
-                </a:solidFill>
-                <a:latin typeface="PingFang HK"/>
-              </a:rPr>
-              <a:t>76 個測試全綠</a:t>
+              <a:t>這是預期結果，不是缺陷：baseline 生成器完全不理會這些 gate。重點是這個數字可以重跑，而違規是逐項命名的。</a:t>
             </a:r>
           </a:p>
         </p:txBody>
@@ -4098,7 +4507,7 @@
                 </a:solidFill>
                 <a:latin typeface="PingFang HK"/>
               </a:rPr>
-              <a:t>狀態</a:t>
+              <a:t>實際執行</a:t>
             </a:r>
           </a:p>
         </p:txBody>
@@ -4140,7 +4549,7 @@
                 </a:solidFill>
                 <a:latin typeface="PingFang HK"/>
               </a:rPr>
-              <a:t>做好了什麼，下一步是什麼</a:t>
+              <a:t>整條 pipeline 跑得完，而且會老實地報錯</a:t>
             </a:r>
           </a:p>
         </p:txBody>
@@ -4217,76 +4626,40 @@
           </a:p>
         </p:txBody>
       </p:sp>
-      <p:sp>
-        <p:nvSpPr>
-          <p:cNvPr id="8" name="Rectangle 7"/>
-          <p:cNvSpPr/>
-          <p:nvPr/>
-        </p:nvSpPr>
-        <p:spPr>
-          <a:xfrm>
-            <a:off x="868680" y="1691640"/>
-            <a:ext cx="3520440" cy="2926080"/>
-          </a:xfrm>
-          <a:prstGeom prst="rect">
-            <a:avLst/>
-          </a:prstGeom>
-          <a:solidFill>
-            <a:srgbClr val="F4F6F8"/>
-          </a:solidFill>
-          <a:ln>
-            <a:noFill/>
-          </a:ln>
-          <a:effectLst/>
-        </p:spPr>
-        <p:txBody>
-          <a:bodyPr rtlCol="0" anchor="ctr" wrap="square"/>
-          <a:lstStyle/>
-          <a:p>
-            <a:pPr algn="ctr"/>
-          </a:p>
-        </p:txBody>
-      </p:sp>
-      <p:sp>
-        <p:nvSpPr>
-          <p:cNvPr id="9" name="Rectangle 8"/>
-          <p:cNvSpPr/>
-          <p:nvPr/>
-        </p:nvSpPr>
-        <p:spPr>
-          <a:xfrm>
-            <a:off x="868680" y="1691640"/>
-            <a:ext cx="3520440" cy="50292"/>
-          </a:xfrm>
-          <a:prstGeom prst="rect">
-            <a:avLst/>
-          </a:prstGeom>
-          <a:solidFill>
-            <a:srgbClr val="2F7D5D"/>
-          </a:solidFill>
-          <a:ln>
-            <a:noFill/>
-          </a:ln>
-          <a:effectLst/>
-        </p:spPr>
-        <p:txBody>
-          <a:bodyPr rtlCol="0" anchor="ctr" wrap="square"/>
-          <a:lstStyle/>
-          <a:p>
-            <a:pPr algn="ctr"/>
-          </a:p>
-        </p:txBody>
-      </p:sp>
-      <p:sp>
-        <p:nvSpPr>
-          <p:cNvPr id="10" name="TextBox 9"/>
+      <p:pic>
+        <p:nvPicPr>
+          <p:cNvPr id="8" name="Picture 7" descr="console_run.png"/>
+          <p:cNvPicPr>
+            <a:picLocks noChangeAspect="1"/>
+          </p:cNvPicPr>
+          <p:nvPr/>
+        </p:nvPicPr>
+        <p:blipFill>
+          <a:blip r:embed="rId2"/>
+          <a:stretch>
+            <a:fillRect/>
+          </a:stretch>
+        </p:blipFill>
+        <p:spPr>
+          <a:xfrm>
+            <a:off x="868680" y="1645920"/>
+            <a:ext cx="7589520" cy="4827813"/>
+          </a:xfrm>
+          <a:prstGeom prst="rect">
+            <a:avLst/>
+          </a:prstGeom>
+        </p:spPr>
+      </p:pic>
+      <p:sp>
+        <p:nvSpPr>
+          <p:cNvPr id="9" name="TextBox 8"/>
           <p:cNvSpPr txBox="1"/>
           <p:nvPr/>
         </p:nvSpPr>
         <p:spPr>
           <a:xfrm>
-            <a:off x="1097280" y="1874519"/>
-            <a:ext cx="3108960" cy="320040"/>
+            <a:off x="868680" y="6455664"/>
+            <a:ext cx="7589520" cy="274320"/>
           </a:xfrm>
           <a:prstGeom prst="rect">
             <a:avLst/>
@@ -4308,205 +4681,27 @@
               </a:spcBef>
             </a:pPr>
             <a:r>
-              <a:rPr sz="1250" b="1" i="0">
-                <a:solidFill>
-                  <a:srgbClr val="10233A"/>
+              <a:rPr sz="800" b="0" i="1">
+                <a:solidFill>
+                  <a:srgbClr val="5A6B7C"/>
                 </a:solidFill>
                 <a:latin typeface="PingFang HK"/>
               </a:rPr>
-              <a:t>已做好並有測試</a:t>
-            </a:r>
-          </a:p>
-        </p:txBody>
-      </p:sp>
-      <p:sp>
-        <p:nvSpPr>
-          <p:cNvPr id="11" name="TextBox 10"/>
+              <a:t>真實終端輸出；中間幾行省略。</a:t>
+            </a:r>
+          </a:p>
+        </p:txBody>
+      </p:sp>
+      <p:sp>
+        <p:nvSpPr>
+          <p:cNvPr id="10" name="TextBox 9"/>
           <p:cNvSpPr txBox="1"/>
           <p:nvPr/>
         </p:nvSpPr>
         <p:spPr>
           <a:xfrm>
-            <a:off x="1097280" y="2331720"/>
-            <a:ext cx="3154680" cy="2834640"/>
-          </a:xfrm>
-          <a:prstGeom prst="rect">
-            <a:avLst/>
-          </a:prstGeom>
-          <a:noFill/>
-        </p:spPr>
-        <p:txBody>
-          <a:bodyPr wrap="square" anchor="t" lIns="0" rIns="0" tIns="0" bIns="0">
-            <a:spAutoFit/>
-          </a:bodyPr>
-          <a:lstStyle/>
-          <a:p>
-            <a:pPr algn="l">
-              <a:lnSpc>
-                <a:spcPct val="125000"/>
-              </a:lnSpc>
-              <a:spcBef>
-                <a:spcPts val="0"/>
-              </a:spcBef>
-            </a:pPr>
-            <a:r>
-              <a:rPr sz="950" b="0" i="0">
-                <a:solidFill>
-                  <a:srgbClr val="1E3652"/>
-                </a:solidFill>
-                <a:latin typeface="PingFang HK"/>
-              </a:rPr>
-              <a:t>-  parse：章節、圖、圖說</a:t>
-            </a:r>
-          </a:p>
-          <a:p>
-            <a:pPr algn="l">
-              <a:lnSpc>
-                <a:spcPct val="125000"/>
-              </a:lnSpc>
-              <a:spcBef>
-                <a:spcPts val="700"/>
-              </a:spcBef>
-            </a:pPr>
-            <a:r>
-              <a:rPr sz="950" b="0" i="0">
-                <a:solidFill>
-                  <a:srgbClr val="1E3652"/>
-                </a:solidFill>
-                <a:latin typeface="PingFang HK"/>
-              </a:rPr>
-              <a:t>-  裁圖：樣本上 32 個圖說成功 12 個</a:t>
-            </a:r>
-          </a:p>
-          <a:p>
-            <a:pPr algn="l">
-              <a:lnSpc>
-                <a:spcPct val="125000"/>
-              </a:lnSpc>
-              <a:spcBef>
-                <a:spcPts val="700"/>
-              </a:spcBef>
-            </a:pPr>
-            <a:r>
-              <a:rPr sz="950" b="0" i="0">
-                <a:solidFill>
-                  <a:srgbClr val="1E3652"/>
-                </a:solidFill>
-                <a:latin typeface="PingFang HK"/>
-              </a:rPr>
-              <a:t>-  render：原生 .pptx 連講稿</a:t>
-            </a:r>
-          </a:p>
-          <a:p>
-            <a:pPr algn="l">
-              <a:lnSpc>
-                <a:spcPct val="125000"/>
-              </a:lnSpc>
-              <a:spcBef>
-                <a:spcPts val="700"/>
-              </a:spcBef>
-            </a:pPr>
-            <a:r>
-              <a:rPr sz="950" b="0" i="0">
-                <a:solidFill>
-                  <a:srgbClr val="1E3652"/>
-                </a:solidFill>
-                <a:latin typeface="PingFang HK"/>
-              </a:rPr>
-              <a:t>-  G1、G2、G3、G6 + SRR</a:t>
-            </a:r>
-          </a:p>
-          <a:p>
-            <a:pPr algn="l">
-              <a:lnSpc>
-                <a:spcPct val="125000"/>
-              </a:lnSpc>
-              <a:spcBef>
-                <a:spcPts val="700"/>
-              </a:spcBef>
-            </a:pPr>
-            <a:r>
-              <a:rPr sz="950" b="0" i="0">
-                <a:solidFill>
-                  <a:srgbClr val="1E3652"/>
-                </a:solidFill>
-                <a:latin typeface="PingFang HK"/>
-              </a:rPr>
-              <a:t>-  選段規則表，55 個測試函數</a:t>
-            </a:r>
-          </a:p>
-        </p:txBody>
-      </p:sp>
-      <p:sp>
-        <p:nvSpPr>
-          <p:cNvPr id="12" name="Rectangle 11"/>
-          <p:cNvSpPr/>
-          <p:nvPr/>
-        </p:nvSpPr>
-        <p:spPr>
-          <a:xfrm>
-            <a:off x="4553712" y="1691640"/>
-            <a:ext cx="3520440" cy="2926080"/>
-          </a:xfrm>
-          <a:prstGeom prst="rect">
-            <a:avLst/>
-          </a:prstGeom>
-          <a:solidFill>
-            <a:srgbClr val="F4F6F8"/>
-          </a:solidFill>
-          <a:ln>
-            <a:noFill/>
-          </a:ln>
-          <a:effectLst/>
-        </p:spPr>
-        <p:txBody>
-          <a:bodyPr rtlCol="0" anchor="ctr" wrap="square"/>
-          <a:lstStyle/>
-          <a:p>
-            <a:pPr algn="ctr"/>
-          </a:p>
-        </p:txBody>
-      </p:sp>
-      <p:sp>
-        <p:nvSpPr>
-          <p:cNvPr id="13" name="Rectangle 12"/>
-          <p:cNvSpPr/>
-          <p:nvPr/>
-        </p:nvSpPr>
-        <p:spPr>
-          <a:xfrm>
-            <a:off x="4553712" y="1691640"/>
-            <a:ext cx="3520440" cy="50292"/>
-          </a:xfrm>
-          <a:prstGeom prst="rect">
-            <a:avLst/>
-          </a:prstGeom>
-          <a:solidFill>
-            <a:srgbClr val="B07A1E"/>
-          </a:solidFill>
-          <a:ln>
-            <a:noFill/>
-          </a:ln>
-          <a:effectLst/>
-        </p:spPr>
-        <p:txBody>
-          <a:bodyPr rtlCol="0" anchor="ctr" wrap="square"/>
-          <a:lstStyle/>
-          <a:p>
-            <a:pPr algn="ctr"/>
-          </a:p>
-        </p:txBody>
-      </p:sp>
-      <p:sp>
-        <p:nvSpPr>
-          <p:cNvPr id="14" name="TextBox 13"/>
-          <p:cNvSpPr txBox="1"/>
-          <p:nvPr/>
-        </p:nvSpPr>
-        <p:spPr>
-          <a:xfrm>
-            <a:off x="4782312" y="1874519"/>
-            <a:ext cx="3108960" cy="320040"/>
+            <a:off x="8823960" y="1737360"/>
+            <a:ext cx="2926080" cy="713232"/>
           </a:xfrm>
           <a:prstGeom prst="rect">
             <a:avLst/>
@@ -4528,167 +4723,46 @@
               </a:spcBef>
             </a:pPr>
             <a:r>
-              <a:rPr sz="1250" b="1" i="0">
-                <a:solidFill>
-                  <a:srgbClr val="10233A"/>
+              <a:rPr sz="1000" b="1" i="0">
+                <a:solidFill>
+                  <a:srgbClr val="C08A2E"/>
                 </a:solidFill>
                 <a:latin typeface="PingFang HK"/>
               </a:rPr>
-              <a:t>部分完成</a:t>
-            </a:r>
-          </a:p>
-        </p:txBody>
-      </p:sp>
-      <p:sp>
-        <p:nvSpPr>
-          <p:cNvPr id="15" name="TextBox 14"/>
-          <p:cNvSpPr txBox="1"/>
-          <p:nvPr/>
-        </p:nvSpPr>
-        <p:spPr>
-          <a:xfrm>
-            <a:off x="4782312" y="2331720"/>
-            <a:ext cx="3154680" cy="2834640"/>
-          </a:xfrm>
-          <a:prstGeom prst="rect">
-            <a:avLst/>
-          </a:prstGeom>
-          <a:noFill/>
-        </p:spPr>
-        <p:txBody>
-          <a:bodyPr wrap="square" anchor="t" lIns="0" rIns="0" tIns="0" bIns="0">
-            <a:spAutoFit/>
-          </a:bodyPr>
-          <a:lstStyle/>
+              <a:t>parse</a:t>
+            </a:r>
+          </a:p>
           <a:p>
             <a:pPr algn="l">
               <a:lnSpc>
                 <a:spcPct val="125000"/>
               </a:lnSpc>
               <a:spcBef>
-                <a:spcPts val="0"/>
+                <a:spcPts val="100"/>
               </a:spcBef>
             </a:pPr>
             <a:r>
-              <a:rPr sz="950" b="0" i="0">
+              <a:rPr sz="900" b="0" i="0">
                 <a:solidFill>
                   <a:srgbClr val="1E3652"/>
                 </a:solidFill>
                 <a:latin typeface="PingFang HK"/>
               </a:rPr>
-              <a:t>-  G3 / G6 仍然用一個全局門檻</a:t>
-            </a:r>
-          </a:p>
-          <a:p>
-            <a:pPr algn="l">
-              <a:lnSpc>
-                <a:spcPct val="125000"/>
-              </a:lnSpc>
-              <a:spcBef>
-                <a:spcPts val="700"/>
-              </a:spcBef>
-            </a:pPr>
-            <a:r>
-              <a:rPr sz="950" b="0" i="0">
-                <a:solidFill>
-                  <a:srgbClr val="1E3652"/>
-                </a:solidFill>
-                <a:latin typeface="PingFang HK"/>
-              </a:rPr>
-              <a:t>-  圖說截斷要改成詞語邊界</a:t>
-            </a:r>
-          </a:p>
-          <a:p>
-            <a:pPr algn="l">
-              <a:lnSpc>
-                <a:spcPct val="125000"/>
-              </a:lnSpc>
-              <a:spcBef>
-                <a:spcPts val="700"/>
-              </a:spcBef>
-            </a:pPr>
-            <a:r>
-              <a:rPr sz="950" b="0" i="0">
-                <a:solidFill>
-                  <a:srgbClr val="1E3652"/>
-                </a:solidFill>
-                <a:latin typeface="PingFang HK"/>
-              </a:rPr>
-              <a:t>-  claim 仍然由 heuristic 抽取</a:t>
-            </a:r>
-          </a:p>
-        </p:txBody>
-      </p:sp>
-      <p:sp>
-        <p:nvSpPr>
-          <p:cNvPr id="16" name="Rectangle 15"/>
-          <p:cNvSpPr/>
-          <p:nvPr/>
-        </p:nvSpPr>
-        <p:spPr>
-          <a:xfrm>
-            <a:off x="8238744" y="1691640"/>
-            <a:ext cx="3520440" cy="2926080"/>
-          </a:xfrm>
-          <a:prstGeom prst="rect">
-            <a:avLst/>
-          </a:prstGeom>
-          <a:solidFill>
-            <a:srgbClr val="F4F6F8"/>
-          </a:solidFill>
-          <a:ln>
-            <a:noFill/>
-          </a:ln>
-          <a:effectLst/>
-        </p:spPr>
-        <p:txBody>
-          <a:bodyPr rtlCol="0" anchor="ctr" wrap="square"/>
-          <a:lstStyle/>
-          <a:p>
-            <a:pPr algn="ctr"/>
-          </a:p>
-        </p:txBody>
-      </p:sp>
-      <p:sp>
-        <p:nvSpPr>
-          <p:cNvPr id="17" name="Rectangle 16"/>
-          <p:cNvSpPr/>
-          <p:nvPr/>
-        </p:nvSpPr>
-        <p:spPr>
-          <a:xfrm>
-            <a:off x="8238744" y="1691640"/>
-            <a:ext cx="3520440" cy="50292"/>
-          </a:xfrm>
-          <a:prstGeom prst="rect">
-            <a:avLst/>
-          </a:prstGeom>
-          <a:solidFill>
-            <a:srgbClr val="5A6B7C"/>
-          </a:solidFill>
-          <a:ln>
-            <a:noFill/>
-          </a:ln>
-          <a:effectLst/>
-        </p:spPr>
-        <p:txBody>
-          <a:bodyPr rtlCol="0" anchor="ctr" wrap="square"/>
-          <a:lstStyle/>
-          <a:p>
-            <a:pPr algn="ctr"/>
-          </a:p>
-        </p:txBody>
-      </p:sp>
-      <p:sp>
-        <p:nvSpPr>
-          <p:cNvPr id="18" name="TextBox 17"/>
+              <a:t>8 個章節、24 個圖說、裁出 11 張圖</a:t>
+            </a:r>
+          </a:p>
+        </p:txBody>
+      </p:sp>
+      <p:sp>
+        <p:nvSpPr>
+          <p:cNvPr id="11" name="TextBox 10"/>
           <p:cNvSpPr txBox="1"/>
           <p:nvPr/>
         </p:nvSpPr>
         <p:spPr>
           <a:xfrm>
-            <a:off x="8467344" y="1874519"/>
-            <a:ext cx="3108960" cy="320040"/>
+            <a:off x="8823960" y="2578608"/>
+            <a:ext cx="2926080" cy="713232"/>
           </a:xfrm>
           <a:prstGeom prst="rect">
             <a:avLst/>
@@ -4710,126 +4784,46 @@
               </a:spcBef>
             </a:pPr>
             <a:r>
-              <a:rPr sz="1250" b="1" i="0">
-                <a:solidFill>
-                  <a:srgbClr val="10233A"/>
+              <a:rPr sz="1000" b="1" i="0">
+                <a:solidFill>
+                  <a:srgbClr val="C08A2E"/>
                 </a:solidFill>
                 <a:latin typeface="PingFang HK"/>
               </a:rPr>
-              <a:t>未開始</a:t>
-            </a:r>
-          </a:p>
-        </p:txBody>
-      </p:sp>
-      <p:sp>
-        <p:nvSpPr>
-          <p:cNvPr id="19" name="TextBox 18"/>
-          <p:cNvSpPr txBox="1"/>
-          <p:nvPr/>
-        </p:nvSpPr>
-        <p:spPr>
-          <a:xfrm>
-            <a:off x="8467344" y="2331720"/>
-            <a:ext cx="3154680" cy="2834640"/>
-          </a:xfrm>
-          <a:prstGeom prst="rect">
-            <a:avLst/>
-          </a:prstGeom>
-          <a:noFill/>
-        </p:spPr>
-        <p:txBody>
-          <a:bodyPr wrap="square" anchor="t" lIns="0" rIns="0" tIns="0" bIns="0">
-            <a:spAutoFit/>
-          </a:bodyPr>
-          <a:lstStyle/>
+              <a:t>compose</a:t>
+            </a:r>
+          </a:p>
           <a:p>
             <a:pPr algn="l">
               <a:lnSpc>
                 <a:spcPct val="125000"/>
               </a:lnSpc>
               <a:spcBef>
-                <a:spcPts val="0"/>
+                <a:spcPts val="100"/>
               </a:spcBef>
             </a:pPr>
             <a:r>
-              <a:rPr sz="950" b="0" i="0">
+              <a:rPr sz="900" b="0" i="0">
                 <a:solidFill>
                   <a:srgbClr val="1E3652"/>
                 </a:solidFill>
                 <a:latin typeface="PingFang HK"/>
               </a:rPr>
-              <a:t>-  G4 對比、G5 文字溢出</a:t>
-            </a:r>
-          </a:p>
-          <a:p>
-            <a:pPr algn="l">
-              <a:lnSpc>
-                <a:spcPct val="125000"/>
-              </a:lnSpc>
-              <a:spcBef>
-                <a:spcPts val="700"/>
-              </a:spcBef>
-            </a:pPr>
-            <a:r>
-              <a:rPr sz="950" b="0" i="0">
-                <a:solidFill>
-                  <a:srgbClr val="1E3652"/>
-                </a:solidFill>
-                <a:latin typeface="PingFang HK"/>
-              </a:rPr>
-              <a:t>-  修復動作與迴圈</a:t>
-            </a:r>
-          </a:p>
-          <a:p>
-            <a:pPr algn="l">
-              <a:lnSpc>
-                <a:spcPct val="125000"/>
-              </a:lnSpc>
-              <a:spcBef>
-                <a:spcPts val="700"/>
-              </a:spcBef>
-            </a:pPr>
-            <a:r>
-              <a:rPr sz="950" b="0" i="0">
-                <a:solidFill>
-                  <a:srgbClr val="1E3652"/>
-                </a:solidFill>
-                <a:latin typeface="PingFang HK"/>
-              </a:rPr>
-              <a:t>-  110 張測試集與標註</a:t>
-            </a:r>
-          </a:p>
-          <a:p>
-            <a:pPr algn="l">
-              <a:lnSpc>
-                <a:spcPct val="125000"/>
-              </a:lnSpc>
-              <a:spcBef>
-                <a:spcPts val="700"/>
-              </a:spcBef>
-            </a:pPr>
-            <a:r>
-              <a:rPr sz="950" b="0" i="0">
-                <a:solidFill>
-                  <a:srgbClr val="1E3652"/>
-                </a:solidFill>
-                <a:latin typeface="PingFang HK"/>
-              </a:rPr>
-              <a:t>-  人手 deck、baseline、2×2 實驗</a:t>
-            </a:r>
-          </a:p>
-        </p:txBody>
-      </p:sp>
-      <p:sp>
-        <p:nvSpPr>
-          <p:cNvPr id="20" name="TextBox 19"/>
+              <a:t>8 張 slide，每張 90 秒</a:t>
+            </a:r>
+          </a:p>
+        </p:txBody>
+      </p:sp>
+      <p:sp>
+        <p:nvSpPr>
+          <p:cNvPr id="12" name="TextBox 11"/>
           <p:cNvSpPr txBox="1"/>
           <p:nvPr/>
         </p:nvSpPr>
         <p:spPr>
           <a:xfrm>
-            <a:off x="868680" y="4937760"/>
-            <a:ext cx="10881360" cy="548640"/>
+            <a:off x="8823960" y="3419856"/>
+            <a:ext cx="2926080" cy="713232"/>
           </a:xfrm>
           <a:prstGeom prst="rect">
             <a:avLst/>
@@ -4851,13 +4845,154 @@
               </a:spcBef>
             </a:pPr>
             <a:r>
-              <a:rPr sz="1050" b="0" i="1">
-                <a:solidFill>
-                  <a:srgbClr val="5A6B7C"/>
+              <a:rPr sz="1000" b="1" i="0">
+                <a:solidFill>
+                  <a:srgbClr val="C08A2E"/>
                 </a:solidFill>
                 <a:latin typeface="PingFang HK"/>
               </a:rPr>
-              <a:t>76 個測試全綠。上面那份 deck 就是這條 pipeline 由頭到尾跑出來的。</a:t>
+              <a:t>render</a:t>
+            </a:r>
+          </a:p>
+          <a:p>
+            <a:pPr algn="l">
+              <a:lnSpc>
+                <a:spcPct val="125000"/>
+              </a:lnSpc>
+              <a:spcBef>
+                <a:spcPts val="100"/>
+              </a:spcBef>
+            </a:pPr>
+            <a:r>
+              <a:rPr sz="900" b="0" i="0">
+                <a:solidFill>
+                  <a:srgbClr val="1E3652"/>
+                </a:solidFill>
+                <a:latin typeface="PingFang HK"/>
+              </a:rPr>
+              <a:t>9 頁 deck，原生可編輯</a:t>
+            </a:r>
+          </a:p>
+        </p:txBody>
+      </p:sp>
+      <p:sp>
+        <p:nvSpPr>
+          <p:cNvPr id="13" name="TextBox 12"/>
+          <p:cNvSpPr txBox="1"/>
+          <p:nvPr/>
+        </p:nvSpPr>
+        <p:spPr>
+          <a:xfrm>
+            <a:off x="8823960" y="4261104"/>
+            <a:ext cx="2926080" cy="713232"/>
+          </a:xfrm>
+          <a:prstGeom prst="rect">
+            <a:avLst/>
+          </a:prstGeom>
+          <a:noFill/>
+        </p:spPr>
+        <p:txBody>
+          <a:bodyPr wrap="square" anchor="t" lIns="0" rIns="0" tIns="0" bIns="0">
+            <a:spAutoFit/>
+          </a:bodyPr>
+          <a:lstStyle/>
+          <a:p>
+            <a:pPr algn="l">
+              <a:lnSpc>
+                <a:spcPct val="115000"/>
+              </a:lnSpc>
+              <a:spcBef>
+                <a:spcPts val="0"/>
+              </a:spcBef>
+            </a:pPr>
+            <a:r>
+              <a:rPr sz="1000" b="1" i="0">
+                <a:solidFill>
+                  <a:srgbClr val="C08A2E"/>
+                </a:solidFill>
+                <a:latin typeface="PingFang HK"/>
+              </a:rPr>
+              <a:t>detect</a:t>
+            </a:r>
+          </a:p>
+          <a:p>
+            <a:pPr algn="l">
+              <a:lnSpc>
+                <a:spcPct val="125000"/>
+              </a:lnSpc>
+              <a:spcBef>
+                <a:spcPts val="100"/>
+              </a:spcBef>
+            </a:pPr>
+            <a:r>
+              <a:rPr sz="900" b="0" i="0">
+                <a:solidFill>
+                  <a:srgbClr val="1E3652"/>
+                </a:solidFill>
+                <a:latin typeface="PingFang HK"/>
+              </a:rPr>
+              <a:t>32 個違規，SRR 0.00</a:t>
+            </a:r>
+          </a:p>
+        </p:txBody>
+      </p:sp>
+      <p:sp>
+        <p:nvSpPr>
+          <p:cNvPr id="14" name="TextBox 13"/>
+          <p:cNvSpPr txBox="1"/>
+          <p:nvPr/>
+        </p:nvSpPr>
+        <p:spPr>
+          <a:xfrm>
+            <a:off x="8823960" y="5102352"/>
+            <a:ext cx="2926080" cy="713232"/>
+          </a:xfrm>
+          <a:prstGeom prst="rect">
+            <a:avLst/>
+          </a:prstGeom>
+          <a:noFill/>
+        </p:spPr>
+        <p:txBody>
+          <a:bodyPr wrap="square" anchor="t" lIns="0" rIns="0" tIns="0" bIns="0">
+            <a:spAutoFit/>
+          </a:bodyPr>
+          <a:lstStyle/>
+          <a:p>
+            <a:pPr algn="l">
+              <a:lnSpc>
+                <a:spcPct val="115000"/>
+              </a:lnSpc>
+              <a:spcBef>
+                <a:spcPts val="0"/>
+              </a:spcBef>
+            </a:pPr>
+            <a:r>
+              <a:rPr sz="1000" b="1" i="0">
+                <a:solidFill>
+                  <a:srgbClr val="C08A2E"/>
+                </a:solidFill>
+                <a:latin typeface="PingFang HK"/>
+              </a:rPr>
+              <a:t>pytest</a:t>
+            </a:r>
+          </a:p>
+          <a:p>
+            <a:pPr algn="l">
+              <a:lnSpc>
+                <a:spcPct val="125000"/>
+              </a:lnSpc>
+              <a:spcBef>
+                <a:spcPts val="100"/>
+              </a:spcBef>
+            </a:pPr>
+            <a:r>
+              <a:rPr sz="900" b="0" i="0">
+                <a:solidFill>
+                  <a:srgbClr val="1E3652"/>
+                </a:solidFill>
+                <a:latin typeface="PingFang HK"/>
+              </a:rPr>
+              <a:t>76 個測試全綠</a:t>
             </a:r>
           </a:p>
         </p:txBody>
@@ -4977,7 +5112,7 @@
                 </a:solidFill>
                 <a:latin typeface="PingFang HK"/>
               </a:rPr>
-              <a:t>計劃</a:t>
+              <a:t>狀態</a:t>
             </a:r>
           </a:p>
         </p:txBody>
@@ -5019,7 +5154,7 @@
                 </a:solidFill>
                 <a:latin typeface="PingFang HK"/>
               </a:rPr>
-              <a:t>實驗設計，與時間表</a:t>
+              <a:t>做好了什麼，下一步是什麼</a:t>
             </a:r>
           </a:p>
         </p:txBody>
@@ -5092,6 +5227,885 @@
                 <a:latin typeface="PingFang HK"/>
               </a:rPr>
               <a:t>12</a:t>
+            </a:r>
+          </a:p>
+        </p:txBody>
+      </p:sp>
+      <p:sp>
+        <p:nvSpPr>
+          <p:cNvPr id="8" name="Rectangle 7"/>
+          <p:cNvSpPr/>
+          <p:nvPr/>
+        </p:nvSpPr>
+        <p:spPr>
+          <a:xfrm>
+            <a:off x="868680" y="1691640"/>
+            <a:ext cx="3520440" cy="2926080"/>
+          </a:xfrm>
+          <a:prstGeom prst="rect">
+            <a:avLst/>
+          </a:prstGeom>
+          <a:solidFill>
+            <a:srgbClr val="F4F6F8"/>
+          </a:solidFill>
+          <a:ln>
+            <a:noFill/>
+          </a:ln>
+          <a:effectLst/>
+        </p:spPr>
+        <p:txBody>
+          <a:bodyPr rtlCol="0" anchor="ctr" wrap="square"/>
+          <a:lstStyle/>
+          <a:p>
+            <a:pPr algn="ctr"/>
+          </a:p>
+        </p:txBody>
+      </p:sp>
+      <p:sp>
+        <p:nvSpPr>
+          <p:cNvPr id="9" name="Rectangle 8"/>
+          <p:cNvSpPr/>
+          <p:nvPr/>
+        </p:nvSpPr>
+        <p:spPr>
+          <a:xfrm>
+            <a:off x="868680" y="1691640"/>
+            <a:ext cx="3520440" cy="50292"/>
+          </a:xfrm>
+          <a:prstGeom prst="rect">
+            <a:avLst/>
+          </a:prstGeom>
+          <a:solidFill>
+            <a:srgbClr val="2F7D5D"/>
+          </a:solidFill>
+          <a:ln>
+            <a:noFill/>
+          </a:ln>
+          <a:effectLst/>
+        </p:spPr>
+        <p:txBody>
+          <a:bodyPr rtlCol="0" anchor="ctr" wrap="square"/>
+          <a:lstStyle/>
+          <a:p>
+            <a:pPr algn="ctr"/>
+          </a:p>
+        </p:txBody>
+      </p:sp>
+      <p:sp>
+        <p:nvSpPr>
+          <p:cNvPr id="10" name="TextBox 9"/>
+          <p:cNvSpPr txBox="1"/>
+          <p:nvPr/>
+        </p:nvSpPr>
+        <p:spPr>
+          <a:xfrm>
+            <a:off x="1097280" y="1874519"/>
+            <a:ext cx="3108960" cy="320040"/>
+          </a:xfrm>
+          <a:prstGeom prst="rect">
+            <a:avLst/>
+          </a:prstGeom>
+          <a:noFill/>
+        </p:spPr>
+        <p:txBody>
+          <a:bodyPr wrap="square" anchor="t" lIns="0" rIns="0" tIns="0" bIns="0">
+            <a:spAutoFit/>
+          </a:bodyPr>
+          <a:lstStyle/>
+          <a:p>
+            <a:pPr algn="l">
+              <a:lnSpc>
+                <a:spcPct val="115000"/>
+              </a:lnSpc>
+              <a:spcBef>
+                <a:spcPts val="0"/>
+              </a:spcBef>
+            </a:pPr>
+            <a:r>
+              <a:rPr sz="1250" b="1" i="0">
+                <a:solidFill>
+                  <a:srgbClr val="10233A"/>
+                </a:solidFill>
+                <a:latin typeface="PingFang HK"/>
+              </a:rPr>
+              <a:t>已做好並有測試</a:t>
+            </a:r>
+          </a:p>
+        </p:txBody>
+      </p:sp>
+      <p:sp>
+        <p:nvSpPr>
+          <p:cNvPr id="11" name="TextBox 10"/>
+          <p:cNvSpPr txBox="1"/>
+          <p:nvPr/>
+        </p:nvSpPr>
+        <p:spPr>
+          <a:xfrm>
+            <a:off x="1097280" y="2331720"/>
+            <a:ext cx="3154680" cy="2834640"/>
+          </a:xfrm>
+          <a:prstGeom prst="rect">
+            <a:avLst/>
+          </a:prstGeom>
+          <a:noFill/>
+        </p:spPr>
+        <p:txBody>
+          <a:bodyPr wrap="square" anchor="t" lIns="0" rIns="0" tIns="0" bIns="0">
+            <a:spAutoFit/>
+          </a:bodyPr>
+          <a:lstStyle/>
+          <a:p>
+            <a:pPr algn="l">
+              <a:lnSpc>
+                <a:spcPct val="125000"/>
+              </a:lnSpc>
+              <a:spcBef>
+                <a:spcPts val="0"/>
+              </a:spcBef>
+            </a:pPr>
+            <a:r>
+              <a:rPr sz="950" b="0" i="0">
+                <a:solidFill>
+                  <a:srgbClr val="1E3652"/>
+                </a:solidFill>
+                <a:latin typeface="PingFang HK"/>
+              </a:rPr>
+              <a:t>-  parse：章節、圖、圖說</a:t>
+            </a:r>
+          </a:p>
+          <a:p>
+            <a:pPr algn="l">
+              <a:lnSpc>
+                <a:spcPct val="125000"/>
+              </a:lnSpc>
+              <a:spcBef>
+                <a:spcPts val="700"/>
+              </a:spcBef>
+            </a:pPr>
+            <a:r>
+              <a:rPr sz="950" b="0" i="0">
+                <a:solidFill>
+                  <a:srgbClr val="1E3652"/>
+                </a:solidFill>
+                <a:latin typeface="PingFang HK"/>
+              </a:rPr>
+              <a:t>-  裁圖：樣本上 32 個圖說成功 12 個</a:t>
+            </a:r>
+          </a:p>
+          <a:p>
+            <a:pPr algn="l">
+              <a:lnSpc>
+                <a:spcPct val="125000"/>
+              </a:lnSpc>
+              <a:spcBef>
+                <a:spcPts val="700"/>
+              </a:spcBef>
+            </a:pPr>
+            <a:r>
+              <a:rPr sz="950" b="0" i="0">
+                <a:solidFill>
+                  <a:srgbClr val="1E3652"/>
+                </a:solidFill>
+                <a:latin typeface="PingFang HK"/>
+              </a:rPr>
+              <a:t>-  render：原生 .pptx 連講稿</a:t>
+            </a:r>
+          </a:p>
+          <a:p>
+            <a:pPr algn="l">
+              <a:lnSpc>
+                <a:spcPct val="125000"/>
+              </a:lnSpc>
+              <a:spcBef>
+                <a:spcPts val="700"/>
+              </a:spcBef>
+            </a:pPr>
+            <a:r>
+              <a:rPr sz="950" b="0" i="0">
+                <a:solidFill>
+                  <a:srgbClr val="1E3652"/>
+                </a:solidFill>
+                <a:latin typeface="PingFang HK"/>
+              </a:rPr>
+              <a:t>-  G1、G2、G3、G6 + SRR</a:t>
+            </a:r>
+          </a:p>
+          <a:p>
+            <a:pPr algn="l">
+              <a:lnSpc>
+                <a:spcPct val="125000"/>
+              </a:lnSpc>
+              <a:spcBef>
+                <a:spcPts val="700"/>
+              </a:spcBef>
+            </a:pPr>
+            <a:r>
+              <a:rPr sz="950" b="0" i="0">
+                <a:solidFill>
+                  <a:srgbClr val="1E3652"/>
+                </a:solidFill>
+                <a:latin typeface="PingFang HK"/>
+              </a:rPr>
+              <a:t>-  選段規則表，55 個測試函數</a:t>
+            </a:r>
+          </a:p>
+        </p:txBody>
+      </p:sp>
+      <p:sp>
+        <p:nvSpPr>
+          <p:cNvPr id="12" name="Rectangle 11"/>
+          <p:cNvSpPr/>
+          <p:nvPr/>
+        </p:nvSpPr>
+        <p:spPr>
+          <a:xfrm>
+            <a:off x="4553712" y="1691640"/>
+            <a:ext cx="3520440" cy="2926080"/>
+          </a:xfrm>
+          <a:prstGeom prst="rect">
+            <a:avLst/>
+          </a:prstGeom>
+          <a:solidFill>
+            <a:srgbClr val="F4F6F8"/>
+          </a:solidFill>
+          <a:ln>
+            <a:noFill/>
+          </a:ln>
+          <a:effectLst/>
+        </p:spPr>
+        <p:txBody>
+          <a:bodyPr rtlCol="0" anchor="ctr" wrap="square"/>
+          <a:lstStyle/>
+          <a:p>
+            <a:pPr algn="ctr"/>
+          </a:p>
+        </p:txBody>
+      </p:sp>
+      <p:sp>
+        <p:nvSpPr>
+          <p:cNvPr id="13" name="Rectangle 12"/>
+          <p:cNvSpPr/>
+          <p:nvPr/>
+        </p:nvSpPr>
+        <p:spPr>
+          <a:xfrm>
+            <a:off x="4553712" y="1691640"/>
+            <a:ext cx="3520440" cy="50292"/>
+          </a:xfrm>
+          <a:prstGeom prst="rect">
+            <a:avLst/>
+          </a:prstGeom>
+          <a:solidFill>
+            <a:srgbClr val="B07A1E"/>
+          </a:solidFill>
+          <a:ln>
+            <a:noFill/>
+          </a:ln>
+          <a:effectLst/>
+        </p:spPr>
+        <p:txBody>
+          <a:bodyPr rtlCol="0" anchor="ctr" wrap="square"/>
+          <a:lstStyle/>
+          <a:p>
+            <a:pPr algn="ctr"/>
+          </a:p>
+        </p:txBody>
+      </p:sp>
+      <p:sp>
+        <p:nvSpPr>
+          <p:cNvPr id="14" name="TextBox 13"/>
+          <p:cNvSpPr txBox="1"/>
+          <p:nvPr/>
+        </p:nvSpPr>
+        <p:spPr>
+          <a:xfrm>
+            <a:off x="4782312" y="1874519"/>
+            <a:ext cx="3108960" cy="320040"/>
+          </a:xfrm>
+          <a:prstGeom prst="rect">
+            <a:avLst/>
+          </a:prstGeom>
+          <a:noFill/>
+        </p:spPr>
+        <p:txBody>
+          <a:bodyPr wrap="square" anchor="t" lIns="0" rIns="0" tIns="0" bIns="0">
+            <a:spAutoFit/>
+          </a:bodyPr>
+          <a:lstStyle/>
+          <a:p>
+            <a:pPr algn="l">
+              <a:lnSpc>
+                <a:spcPct val="115000"/>
+              </a:lnSpc>
+              <a:spcBef>
+                <a:spcPts val="0"/>
+              </a:spcBef>
+            </a:pPr>
+            <a:r>
+              <a:rPr sz="1250" b="1" i="0">
+                <a:solidFill>
+                  <a:srgbClr val="10233A"/>
+                </a:solidFill>
+                <a:latin typeface="PingFang HK"/>
+              </a:rPr>
+              <a:t>部分完成</a:t>
+            </a:r>
+          </a:p>
+        </p:txBody>
+      </p:sp>
+      <p:sp>
+        <p:nvSpPr>
+          <p:cNvPr id="15" name="TextBox 14"/>
+          <p:cNvSpPr txBox="1"/>
+          <p:nvPr/>
+        </p:nvSpPr>
+        <p:spPr>
+          <a:xfrm>
+            <a:off x="4782312" y="2331720"/>
+            <a:ext cx="3154680" cy="2834640"/>
+          </a:xfrm>
+          <a:prstGeom prst="rect">
+            <a:avLst/>
+          </a:prstGeom>
+          <a:noFill/>
+        </p:spPr>
+        <p:txBody>
+          <a:bodyPr wrap="square" anchor="t" lIns="0" rIns="0" tIns="0" bIns="0">
+            <a:spAutoFit/>
+          </a:bodyPr>
+          <a:lstStyle/>
+          <a:p>
+            <a:pPr algn="l">
+              <a:lnSpc>
+                <a:spcPct val="125000"/>
+              </a:lnSpc>
+              <a:spcBef>
+                <a:spcPts val="0"/>
+              </a:spcBef>
+            </a:pPr>
+            <a:r>
+              <a:rPr sz="950" b="0" i="0">
+                <a:solidFill>
+                  <a:srgbClr val="1E3652"/>
+                </a:solidFill>
+                <a:latin typeface="PingFang HK"/>
+              </a:rPr>
+              <a:t>-  G3 / G6 仍然用一個全局門檻</a:t>
+            </a:r>
+          </a:p>
+          <a:p>
+            <a:pPr algn="l">
+              <a:lnSpc>
+                <a:spcPct val="125000"/>
+              </a:lnSpc>
+              <a:spcBef>
+                <a:spcPts val="700"/>
+              </a:spcBef>
+            </a:pPr>
+            <a:r>
+              <a:rPr sz="950" b="0" i="0">
+                <a:solidFill>
+                  <a:srgbClr val="1E3652"/>
+                </a:solidFill>
+                <a:latin typeface="PingFang HK"/>
+              </a:rPr>
+              <a:t>-  圖說截斷要改成詞語邊界</a:t>
+            </a:r>
+          </a:p>
+          <a:p>
+            <a:pPr algn="l">
+              <a:lnSpc>
+                <a:spcPct val="125000"/>
+              </a:lnSpc>
+              <a:spcBef>
+                <a:spcPts val="700"/>
+              </a:spcBef>
+            </a:pPr>
+            <a:r>
+              <a:rPr sz="950" b="0" i="0">
+                <a:solidFill>
+                  <a:srgbClr val="1E3652"/>
+                </a:solidFill>
+                <a:latin typeface="PingFang HK"/>
+              </a:rPr>
+              <a:t>-  claim 仍然由 heuristic 抽取</a:t>
+            </a:r>
+          </a:p>
+        </p:txBody>
+      </p:sp>
+      <p:sp>
+        <p:nvSpPr>
+          <p:cNvPr id="16" name="Rectangle 15"/>
+          <p:cNvSpPr/>
+          <p:nvPr/>
+        </p:nvSpPr>
+        <p:spPr>
+          <a:xfrm>
+            <a:off x="8238744" y="1691640"/>
+            <a:ext cx="3520440" cy="2926080"/>
+          </a:xfrm>
+          <a:prstGeom prst="rect">
+            <a:avLst/>
+          </a:prstGeom>
+          <a:solidFill>
+            <a:srgbClr val="F4F6F8"/>
+          </a:solidFill>
+          <a:ln>
+            <a:noFill/>
+          </a:ln>
+          <a:effectLst/>
+        </p:spPr>
+        <p:txBody>
+          <a:bodyPr rtlCol="0" anchor="ctr" wrap="square"/>
+          <a:lstStyle/>
+          <a:p>
+            <a:pPr algn="ctr"/>
+          </a:p>
+        </p:txBody>
+      </p:sp>
+      <p:sp>
+        <p:nvSpPr>
+          <p:cNvPr id="17" name="Rectangle 16"/>
+          <p:cNvSpPr/>
+          <p:nvPr/>
+        </p:nvSpPr>
+        <p:spPr>
+          <a:xfrm>
+            <a:off x="8238744" y="1691640"/>
+            <a:ext cx="3520440" cy="50292"/>
+          </a:xfrm>
+          <a:prstGeom prst="rect">
+            <a:avLst/>
+          </a:prstGeom>
+          <a:solidFill>
+            <a:srgbClr val="5A6B7C"/>
+          </a:solidFill>
+          <a:ln>
+            <a:noFill/>
+          </a:ln>
+          <a:effectLst/>
+        </p:spPr>
+        <p:txBody>
+          <a:bodyPr rtlCol="0" anchor="ctr" wrap="square"/>
+          <a:lstStyle/>
+          <a:p>
+            <a:pPr algn="ctr"/>
+          </a:p>
+        </p:txBody>
+      </p:sp>
+      <p:sp>
+        <p:nvSpPr>
+          <p:cNvPr id="18" name="TextBox 17"/>
+          <p:cNvSpPr txBox="1"/>
+          <p:nvPr/>
+        </p:nvSpPr>
+        <p:spPr>
+          <a:xfrm>
+            <a:off x="8467344" y="1874519"/>
+            <a:ext cx="3108960" cy="320040"/>
+          </a:xfrm>
+          <a:prstGeom prst="rect">
+            <a:avLst/>
+          </a:prstGeom>
+          <a:noFill/>
+        </p:spPr>
+        <p:txBody>
+          <a:bodyPr wrap="square" anchor="t" lIns="0" rIns="0" tIns="0" bIns="0">
+            <a:spAutoFit/>
+          </a:bodyPr>
+          <a:lstStyle/>
+          <a:p>
+            <a:pPr algn="l">
+              <a:lnSpc>
+                <a:spcPct val="115000"/>
+              </a:lnSpc>
+              <a:spcBef>
+                <a:spcPts val="0"/>
+              </a:spcBef>
+            </a:pPr>
+            <a:r>
+              <a:rPr sz="1250" b="1" i="0">
+                <a:solidFill>
+                  <a:srgbClr val="10233A"/>
+                </a:solidFill>
+                <a:latin typeface="PingFang HK"/>
+              </a:rPr>
+              <a:t>未開始</a:t>
+            </a:r>
+          </a:p>
+        </p:txBody>
+      </p:sp>
+      <p:sp>
+        <p:nvSpPr>
+          <p:cNvPr id="19" name="TextBox 18"/>
+          <p:cNvSpPr txBox="1"/>
+          <p:nvPr/>
+        </p:nvSpPr>
+        <p:spPr>
+          <a:xfrm>
+            <a:off x="8467344" y="2331720"/>
+            <a:ext cx="3154680" cy="2834640"/>
+          </a:xfrm>
+          <a:prstGeom prst="rect">
+            <a:avLst/>
+          </a:prstGeom>
+          <a:noFill/>
+        </p:spPr>
+        <p:txBody>
+          <a:bodyPr wrap="square" anchor="t" lIns="0" rIns="0" tIns="0" bIns="0">
+            <a:spAutoFit/>
+          </a:bodyPr>
+          <a:lstStyle/>
+          <a:p>
+            <a:pPr algn="l">
+              <a:lnSpc>
+                <a:spcPct val="125000"/>
+              </a:lnSpc>
+              <a:spcBef>
+                <a:spcPts val="0"/>
+              </a:spcBef>
+            </a:pPr>
+            <a:r>
+              <a:rPr sz="950" b="0" i="0">
+                <a:solidFill>
+                  <a:srgbClr val="1E3652"/>
+                </a:solidFill>
+                <a:latin typeface="PingFang HK"/>
+              </a:rPr>
+              <a:t>-  G4 對比、G5 文字溢出</a:t>
+            </a:r>
+          </a:p>
+          <a:p>
+            <a:pPr algn="l">
+              <a:lnSpc>
+                <a:spcPct val="125000"/>
+              </a:lnSpc>
+              <a:spcBef>
+                <a:spcPts val="700"/>
+              </a:spcBef>
+            </a:pPr>
+            <a:r>
+              <a:rPr sz="950" b="0" i="0">
+                <a:solidFill>
+                  <a:srgbClr val="1E3652"/>
+                </a:solidFill>
+                <a:latin typeface="PingFang HK"/>
+              </a:rPr>
+              <a:t>-  修復動作與迴圈</a:t>
+            </a:r>
+          </a:p>
+          <a:p>
+            <a:pPr algn="l">
+              <a:lnSpc>
+                <a:spcPct val="125000"/>
+              </a:lnSpc>
+              <a:spcBef>
+                <a:spcPts val="700"/>
+              </a:spcBef>
+            </a:pPr>
+            <a:r>
+              <a:rPr sz="950" b="0" i="0">
+                <a:solidFill>
+                  <a:srgbClr val="1E3652"/>
+                </a:solidFill>
+                <a:latin typeface="PingFang HK"/>
+              </a:rPr>
+              <a:t>-  110 張測試集與標註</a:t>
+            </a:r>
+          </a:p>
+          <a:p>
+            <a:pPr algn="l">
+              <a:lnSpc>
+                <a:spcPct val="125000"/>
+              </a:lnSpc>
+              <a:spcBef>
+                <a:spcPts val="700"/>
+              </a:spcBef>
+            </a:pPr>
+            <a:r>
+              <a:rPr sz="950" b="0" i="0">
+                <a:solidFill>
+                  <a:srgbClr val="1E3652"/>
+                </a:solidFill>
+                <a:latin typeface="PingFang HK"/>
+              </a:rPr>
+              <a:t>-  人手 deck、baseline、2×2 實驗</a:t>
+            </a:r>
+          </a:p>
+        </p:txBody>
+      </p:sp>
+      <p:sp>
+        <p:nvSpPr>
+          <p:cNvPr id="20" name="TextBox 19"/>
+          <p:cNvSpPr txBox="1"/>
+          <p:nvPr/>
+        </p:nvSpPr>
+        <p:spPr>
+          <a:xfrm>
+            <a:off x="868680" y="4937760"/>
+            <a:ext cx="10881360" cy="548640"/>
+          </a:xfrm>
+          <a:prstGeom prst="rect">
+            <a:avLst/>
+          </a:prstGeom>
+          <a:noFill/>
+        </p:spPr>
+        <p:txBody>
+          <a:bodyPr wrap="square" anchor="t" lIns="0" rIns="0" tIns="0" bIns="0">
+            <a:spAutoFit/>
+          </a:bodyPr>
+          <a:lstStyle/>
+          <a:p>
+            <a:pPr algn="l">
+              <a:lnSpc>
+                <a:spcPct val="115000"/>
+              </a:lnSpc>
+              <a:spcBef>
+                <a:spcPts val="0"/>
+              </a:spcBef>
+            </a:pPr>
+            <a:r>
+              <a:rPr sz="1050" b="0" i="1">
+                <a:solidFill>
+                  <a:srgbClr val="5A6B7C"/>
+                </a:solidFill>
+                <a:latin typeface="PingFang HK"/>
+              </a:rPr>
+              <a:t>76 個測試全綠。上面那份 deck 就是這條 pipeline 由頭到尾跑出來的。</a:t>
+            </a:r>
+          </a:p>
+        </p:txBody>
+      </p:sp>
+    </p:spTree>
+  </p:cSld>
+  <p:clrMapOvr>
+    <a:masterClrMapping/>
+  </p:clrMapOvr>
+</p:sld>
+</file>
+
+<file path=ppt/slides/slide13.xml><?xml version="1.0" encoding="utf-8"?>
+<p:sld xmlns:a="http://schemas.openxmlformats.org/drawingml/2006/main" xmlns:p="http://schemas.openxmlformats.org/presentationml/2006/main" xmlns:r="http://schemas.openxmlformats.org/officeDocument/2006/relationships">
+  <p:cSld>
+    <p:spTree>
+      <p:nvGrpSpPr>
+        <p:cNvPr id="1" name=""/>
+        <p:cNvGrpSpPr/>
+        <p:nvPr/>
+      </p:nvGrpSpPr>
+      <p:grpSpPr/>
+      <p:sp>
+        <p:nvSpPr>
+          <p:cNvPr id="2" name="Rectangle 1"/>
+          <p:cNvSpPr/>
+          <p:nvPr/>
+        </p:nvSpPr>
+        <p:spPr>
+          <a:xfrm>
+            <a:off x="0" y="0"/>
+            <a:ext cx="237744" cy="6858000"/>
+          </a:xfrm>
+          <a:prstGeom prst="rect">
+            <a:avLst/>
+          </a:prstGeom>
+          <a:solidFill>
+            <a:srgbClr val="10233A"/>
+          </a:solidFill>
+          <a:ln>
+            <a:noFill/>
+          </a:ln>
+          <a:effectLst/>
+        </p:spPr>
+        <p:txBody>
+          <a:bodyPr rtlCol="0" anchor="ctr" wrap="square"/>
+          <a:lstStyle/>
+          <a:p>
+            <a:pPr algn="ctr"/>
+          </a:p>
+        </p:txBody>
+      </p:sp>
+      <p:sp>
+        <p:nvSpPr>
+          <p:cNvPr id="3" name="Rectangle 2"/>
+          <p:cNvSpPr/>
+          <p:nvPr/>
+        </p:nvSpPr>
+        <p:spPr>
+          <a:xfrm>
+            <a:off x="237744" y="0"/>
+            <a:ext cx="45720" cy="6858000"/>
+          </a:xfrm>
+          <a:prstGeom prst="rect">
+            <a:avLst/>
+          </a:prstGeom>
+          <a:solidFill>
+            <a:srgbClr val="C08A2E"/>
+          </a:solidFill>
+          <a:ln>
+            <a:noFill/>
+          </a:ln>
+          <a:effectLst/>
+        </p:spPr>
+        <p:txBody>
+          <a:bodyPr rtlCol="0" anchor="ctr" wrap="square"/>
+          <a:lstStyle/>
+          <a:p>
+            <a:pPr algn="ctr"/>
+          </a:p>
+        </p:txBody>
+      </p:sp>
+      <p:sp>
+        <p:nvSpPr>
+          <p:cNvPr id="4" name="TextBox 3"/>
+          <p:cNvSpPr txBox="1"/>
+          <p:nvPr/>
+        </p:nvSpPr>
+        <p:spPr>
+          <a:xfrm>
+            <a:off x="868680" y="384048"/>
+            <a:ext cx="10607040" cy="274320"/>
+          </a:xfrm>
+          <a:prstGeom prst="rect">
+            <a:avLst/>
+          </a:prstGeom>
+          <a:noFill/>
+        </p:spPr>
+        <p:txBody>
+          <a:bodyPr wrap="square" anchor="t" lIns="0" rIns="0" tIns="0" bIns="0">
+            <a:spAutoFit/>
+          </a:bodyPr>
+          <a:lstStyle/>
+          <a:p>
+            <a:pPr algn="l">
+              <a:lnSpc>
+                <a:spcPct val="115000"/>
+              </a:lnSpc>
+              <a:spcBef>
+                <a:spcPts val="0"/>
+              </a:spcBef>
+            </a:pPr>
+            <a:r>
+              <a:rPr sz="950" b="1" i="0">
+                <a:solidFill>
+                  <a:srgbClr val="C08A2E"/>
+                </a:solidFill>
+                <a:latin typeface="PingFang HK"/>
+              </a:rPr>
+              <a:t>計劃</a:t>
+            </a:r>
+          </a:p>
+        </p:txBody>
+      </p:sp>
+      <p:sp>
+        <p:nvSpPr>
+          <p:cNvPr id="5" name="TextBox 4"/>
+          <p:cNvSpPr txBox="1"/>
+          <p:nvPr/>
+        </p:nvSpPr>
+        <p:spPr>
+          <a:xfrm>
+            <a:off x="868680" y="640080"/>
+            <a:ext cx="10881360" cy="685800"/>
+          </a:xfrm>
+          <a:prstGeom prst="rect">
+            <a:avLst/>
+          </a:prstGeom>
+          <a:noFill/>
+        </p:spPr>
+        <p:txBody>
+          <a:bodyPr wrap="square" anchor="t" lIns="0" rIns="0" tIns="0" bIns="0">
+            <a:spAutoFit/>
+          </a:bodyPr>
+          <a:lstStyle/>
+          <a:p>
+            <a:pPr algn="l">
+              <a:lnSpc>
+                <a:spcPct val="105000"/>
+              </a:lnSpc>
+              <a:spcBef>
+                <a:spcPts val="0"/>
+              </a:spcBef>
+            </a:pPr>
+            <a:r>
+              <a:rPr sz="2500" b="1" i="0">
+                <a:solidFill>
+                  <a:srgbClr val="10233A"/>
+                </a:solidFill>
+                <a:latin typeface="PingFang HK"/>
+              </a:rPr>
+              <a:t>實驗設計，與時間表</a:t>
+            </a:r>
+          </a:p>
+        </p:txBody>
+      </p:sp>
+      <p:sp>
+        <p:nvSpPr>
+          <p:cNvPr id="6" name="Rectangle 5"/>
+          <p:cNvSpPr/>
+          <p:nvPr/>
+        </p:nvSpPr>
+        <p:spPr>
+          <a:xfrm>
+            <a:off x="868680" y="1389888"/>
+            <a:ext cx="10881360" cy="12801"/>
+          </a:xfrm>
+          <a:prstGeom prst="rect">
+            <a:avLst/>
+          </a:prstGeom>
+          <a:solidFill>
+            <a:srgbClr val="DDE2E8"/>
+          </a:solidFill>
+          <a:ln>
+            <a:noFill/>
+          </a:ln>
+          <a:effectLst/>
+        </p:spPr>
+        <p:txBody>
+          <a:bodyPr rtlCol="0" anchor="ctr" wrap="square"/>
+          <a:lstStyle/>
+          <a:p>
+            <a:pPr algn="ctr"/>
+          </a:p>
+        </p:txBody>
+      </p:sp>
+      <p:sp>
+        <p:nvSpPr>
+          <p:cNvPr id="7" name="TextBox 6"/>
+          <p:cNvSpPr txBox="1"/>
+          <p:nvPr/>
+        </p:nvSpPr>
+        <p:spPr>
+          <a:xfrm>
+            <a:off x="11155680" y="6355080"/>
+            <a:ext cx="640080" cy="274320"/>
+          </a:xfrm>
+          <a:prstGeom prst="rect">
+            <a:avLst/>
+          </a:prstGeom>
+          <a:noFill/>
+        </p:spPr>
+        <p:txBody>
+          <a:bodyPr wrap="square" anchor="t" lIns="0" rIns="0" tIns="0" bIns="0">
+            <a:spAutoFit/>
+          </a:bodyPr>
+          <a:lstStyle/>
+          <a:p>
+            <a:pPr algn="r">
+              <a:lnSpc>
+                <a:spcPct val="115000"/>
+              </a:lnSpc>
+              <a:spcBef>
+                <a:spcPts val="0"/>
+              </a:spcBef>
+            </a:pPr>
+            <a:r>
+              <a:rPr sz="900" b="0" i="0">
+                <a:solidFill>
+                  <a:srgbClr val="8A99A8"/>
+                </a:solidFill>
+                <a:latin typeface="PingFang HK"/>
+              </a:rPr>
+              <a:t>13</a:t>
             </a:r>
           </a:p>
         </p:txBody>
@@ -6131,7 +7145,7 @@
 </p:sld>
 </file>
 
-<file path=ppt/slides/slide13.xml><?xml version="1.0" encoding="utf-8"?>
+<file path=ppt/slides/slide14.xml><?xml version="1.0" encoding="utf-8"?>
 <p:sld xmlns:a="http://schemas.openxmlformats.org/drawingml/2006/main" xmlns:p="http://schemas.openxmlformats.org/presentationml/2006/main" xmlns:r="http://schemas.openxmlformats.org/officeDocument/2006/relationships">
   <p:cSld>
     <p:spTree>
@@ -6352,7 +7366,7 @@
                 </a:solidFill>
                 <a:latin typeface="PingFang HK"/>
               </a:rPr>
-              <a:t>13</a:t>
+              <a:t>14</a:t>
             </a:r>
           </a:p>
         </p:txBody>
@@ -14728,7 +15742,7 @@
                 </a:solidFill>
                 <a:latin typeface="PingFang HK"/>
               </a:rPr>
-              <a:t>目前結果</a:t>
+              <a:t>範圍</a:t>
             </a:r>
           </a:p>
         </p:txBody>
@@ -14770,7 +15784,7 @@
                 </a:solidFill>
                 <a:latin typeface="PingFang HK"/>
               </a:rPr>
-              <a:t>每一張生成出來的 slide 都至少違反一個 gate</a:t>
+              <a:t>可以量的有 65 項，值得做的有 6 項</a:t>
             </a:r>
           </a:p>
         </p:txBody>
@@ -14847,83 +15861,17 @@
           </a:p>
         </p:txBody>
       </p:sp>
-      <p:pic>
-        <p:nvPicPr>
-          <p:cNvPr id="8" name="Picture 7" descr="slide02.png"/>
-          <p:cNvPicPr>
-            <a:picLocks noChangeAspect="1"/>
-          </p:cNvPicPr>
-          <p:nvPr/>
-        </p:nvPicPr>
-        <p:blipFill>
-          <a:blip r:embed="rId2"/>
-          <a:stretch>
-            <a:fillRect/>
-          </a:stretch>
-        </p:blipFill>
-        <p:spPr>
-          <a:xfrm>
-            <a:off x="868680" y="1645920"/>
-            <a:ext cx="6263640" cy="3523298"/>
-          </a:xfrm>
-          <a:prstGeom prst="rect">
-            <a:avLst/>
-          </a:prstGeom>
-        </p:spPr>
-      </p:pic>
-      <p:sp>
-        <p:nvSpPr>
-          <p:cNvPr id="9" name="TextBox 8"/>
-          <p:cNvSpPr txBox="1"/>
-          <p:nvPr/>
-        </p:nvSpPr>
-        <p:spPr>
-          <a:xfrm>
-            <a:off x="868680" y="5257800"/>
-            <a:ext cx="6263640" cy="457200"/>
-          </a:xfrm>
-          <a:prstGeom prst="rect">
-            <a:avLst/>
-          </a:prstGeom>
-          <a:noFill/>
-        </p:spPr>
-        <p:txBody>
-          <a:bodyPr wrap="square" anchor="t" lIns="0" rIns="0" tIns="0" bIns="0">
-            <a:spAutoFit/>
-          </a:bodyPr>
-          <a:lstStyle/>
-          <a:p>
-            <a:pPr algn="l">
-              <a:lnSpc>
-                <a:spcPct val="115000"/>
-              </a:lnSpc>
-              <a:spcBef>
-                <a:spcPts val="0"/>
-              </a:spcBef>
-            </a:pPr>
-            <a:r>
-              <a:rPr sz="850" b="0" i="1">
-                <a:solidFill>
-                  <a:srgbClr val="5A6B7C"/>
-                </a:solidFill>
-                <a:latin typeface="PingFang HK"/>
-              </a:rPr>
-              <a:t>生成的 deck 第 2 頁：圖已放入，圖說在下面</a:t>
-            </a:r>
-          </a:p>
-        </p:txBody>
-      </p:sp>
       <p:graphicFrame>
         <p:nvGraphicFramePr>
-          <p:cNvPr id="10" name="Table 9"/>
+          <p:cNvPr id="8" name="Table 7"/>
           <p:cNvGraphicFramePr>
             <a:graphicFrameLocks noGrp="1"/>
           </p:cNvGraphicFramePr>
           <p:nvPr/>
         </p:nvGraphicFramePr>
         <p:xfrm>
-          <a:off x="7452360" y="1664208"/>
-          <a:ext cx="4160519" cy="2121408"/>
+          <a:off x="868680" y="1691640"/>
+          <a:ext cx="3566160" cy="2798064"/>
         </p:xfrm>
         <a:graphic>
           <a:graphicData uri="http://schemas.openxmlformats.org/drawingml/2006/table">
@@ -14932,9 +15880,8 @@
                 <a:tableStyleId>{5C22544A-7EE6-4342-B048-85BDC9FD1C3A}</a:tableStyleId>
               </a:tblPr>
               <a:tblGrid>
-                <a:gridCol w="1874519"/>
-                <a:gridCol w="1143000"/>
-                <a:gridCol w="1143000"/>
+                <a:gridCol w="2651760"/>
+                <a:gridCol w="914400"/>
               </a:tblGrid>
               <a:tr h="310896">
                 <a:tc>
@@ -14951,13 +15898,13 @@
                         </a:spcBef>
                       </a:pPr>
                       <a:r>
-                        <a:rPr sz="950" b="1" i="0">
+                        <a:rPr sz="900" b="1" i="0">
                           <a:solidFill>
                             <a:srgbClr val="10233A"/>
                           </a:solidFill>
                           <a:latin typeface="PingFang HK"/>
                         </a:rPr>
-                        <a:t/>
+                        <a:t>候選</a:t>
                       </a:r>
                     </a:p>
                   </a:txBody>
@@ -14981,13 +15928,769 @@
                         </a:spcBef>
                       </a:pPr>
                       <a:r>
+                        <a:rPr sz="900" b="1" i="0">
+                          <a:solidFill>
+                            <a:srgbClr val="10233A"/>
+                          </a:solidFill>
+                          <a:latin typeface="PingFang HK"/>
+                        </a:rPr>
+                        <a:t>數量</a:t>
+                      </a:r>
+                    </a:p>
+                  </a:txBody>
+                  <a:tcPr marL="73152" marT="36576" marB="36576">
+                    <a:solidFill>
+                      <a:srgbClr val="ECF1F5"/>
+                    </a:solidFill>
+                  </a:tcPr>
+                </a:tc>
+              </a:tr>
+              <a:tr h="310896">
+                <a:tc>
+                  <a:txBody>
+                    <a:bodyPr wrap="square"/>
+                    <a:lstStyle/>
+                    <a:p>
+                      <a:pPr algn="l">
+                        <a:lnSpc>
+                          <a:spcPct val="110000"/>
+                        </a:lnSpc>
+                        <a:spcBef>
+                          <a:spcPts val="0"/>
+                        </a:spcBef>
+                      </a:pPr>
+                      <a:r>
                         <a:rPr sz="950" b="1" i="0">
                           <a:solidFill>
                             <a:srgbClr val="10233A"/>
                           </a:solidFill>
                           <a:latin typeface="PingFang HK"/>
                         </a:rPr>
-                        <a:t>PPTAgent</a:t>
+                        <a:t>A  版面幾何</a:t>
+                      </a:r>
+                    </a:p>
+                  </a:txBody>
+                  <a:tcPr marL="73152" marT="36576" marB="36576">
+                    <a:solidFill>
+                      <a:srgbClr val="FFFFFF"/>
+                    </a:solidFill>
+                  </a:tcPr>
+                </a:tc>
+                <a:tc>
+                  <a:txBody>
+                    <a:bodyPr wrap="square"/>
+                    <a:lstStyle/>
+                    <a:p>
+                      <a:pPr algn="l">
+                        <a:lnSpc>
+                          <a:spcPct val="110000"/>
+                        </a:lnSpc>
+                        <a:spcBef>
+                          <a:spcPts val="0"/>
+                        </a:spcBef>
+                      </a:pPr>
+                      <a:r>
+                        <a:rPr sz="950" b="0" i="0">
+                          <a:solidFill>
+                            <a:srgbClr val="1E3652"/>
+                          </a:solidFill>
+                          <a:latin typeface="PingFang HK"/>
+                        </a:rPr>
+                        <a:t>14</a:t>
+                      </a:r>
+                    </a:p>
+                  </a:txBody>
+                  <a:tcPr marL="73152" marT="36576" marB="36576">
+                    <a:solidFill>
+                      <a:srgbClr val="FFFFFF"/>
+                    </a:solidFill>
+                  </a:tcPr>
+                </a:tc>
+              </a:tr>
+              <a:tr h="310896">
+                <a:tc>
+                  <a:txBody>
+                    <a:bodyPr wrap="square"/>
+                    <a:lstStyle/>
+                    <a:p>
+                      <a:pPr algn="l">
+                        <a:lnSpc>
+                          <a:spcPct val="110000"/>
+                        </a:lnSpc>
+                        <a:spcBef>
+                          <a:spcPts val="0"/>
+                        </a:spcBef>
+                      </a:pPr>
+                      <a:r>
+                        <a:rPr sz="950" b="1" i="0">
+                          <a:solidFill>
+                            <a:srgbClr val="10233A"/>
+                          </a:solidFill>
+                          <a:latin typeface="PingFang HK"/>
+                        </a:rPr>
+                        <a:t>B  字體與排版</a:t>
+                      </a:r>
+                    </a:p>
+                  </a:txBody>
+                  <a:tcPr marL="73152" marT="36576" marB="36576">
+                    <a:solidFill>
+                      <a:srgbClr val="FFFFFF"/>
+                    </a:solidFill>
+                  </a:tcPr>
+                </a:tc>
+                <a:tc>
+                  <a:txBody>
+                    <a:bodyPr wrap="square"/>
+                    <a:lstStyle/>
+                    <a:p>
+                      <a:pPr algn="l">
+                        <a:lnSpc>
+                          <a:spcPct val="110000"/>
+                        </a:lnSpc>
+                        <a:spcBef>
+                          <a:spcPts val="0"/>
+                        </a:spcBef>
+                      </a:pPr>
+                      <a:r>
+                        <a:rPr sz="950" b="0" i="0">
+                          <a:solidFill>
+                            <a:srgbClr val="1E3652"/>
+                          </a:solidFill>
+                          <a:latin typeface="PingFang HK"/>
+                        </a:rPr>
+                        <a:t>15</a:t>
+                      </a:r>
+                    </a:p>
+                  </a:txBody>
+                  <a:tcPr marL="73152" marT="36576" marB="36576">
+                    <a:solidFill>
+                      <a:srgbClr val="FFFFFF"/>
+                    </a:solidFill>
+                  </a:tcPr>
+                </a:tc>
+              </a:tr>
+              <a:tr h="310896">
+                <a:tc>
+                  <a:txBody>
+                    <a:bodyPr wrap="square"/>
+                    <a:lstStyle/>
+                    <a:p>
+                      <a:pPr algn="l">
+                        <a:lnSpc>
+                          <a:spcPct val="110000"/>
+                        </a:lnSpc>
+                        <a:spcBef>
+                          <a:spcPts val="0"/>
+                        </a:spcBef>
+                      </a:pPr>
+                      <a:r>
+                        <a:rPr sz="950" b="1" i="0">
+                          <a:solidFill>
+                            <a:srgbClr val="10233A"/>
+                          </a:solidFill>
+                          <a:latin typeface="PingFang HK"/>
+                        </a:rPr>
+                        <a:t>C  顏色與對比</a:t>
+                      </a:r>
+                    </a:p>
+                  </a:txBody>
+                  <a:tcPr marL="73152" marT="36576" marB="36576">
+                    <a:solidFill>
+                      <a:srgbClr val="FFFFFF"/>
+                    </a:solidFill>
+                  </a:tcPr>
+                </a:tc>
+                <a:tc>
+                  <a:txBody>
+                    <a:bodyPr wrap="square"/>
+                    <a:lstStyle/>
+                    <a:p>
+                      <a:pPr algn="l">
+                        <a:lnSpc>
+                          <a:spcPct val="110000"/>
+                        </a:lnSpc>
+                        <a:spcBef>
+                          <a:spcPts val="0"/>
+                        </a:spcBef>
+                      </a:pPr>
+                      <a:r>
+                        <a:rPr sz="950" b="0" i="0">
+                          <a:solidFill>
+                            <a:srgbClr val="1E3652"/>
+                          </a:solidFill>
+                          <a:latin typeface="PingFang HK"/>
+                        </a:rPr>
+                        <a:t>7</a:t>
+                      </a:r>
+                    </a:p>
+                  </a:txBody>
+                  <a:tcPr marL="73152" marT="36576" marB="36576">
+                    <a:solidFill>
+                      <a:srgbClr val="FFFFFF"/>
+                    </a:solidFill>
+                  </a:tcPr>
+                </a:tc>
+              </a:tr>
+              <a:tr h="310896">
+                <a:tc>
+                  <a:txBody>
+                    <a:bodyPr wrap="square"/>
+                    <a:lstStyle/>
+                    <a:p>
+                      <a:pPr algn="l">
+                        <a:lnSpc>
+                          <a:spcPct val="110000"/>
+                        </a:lnSpc>
+                        <a:spcBef>
+                          <a:spcPts val="0"/>
+                        </a:spcBef>
+                      </a:pPr>
+                      <a:r>
+                        <a:rPr sz="950" b="1" i="0">
+                          <a:solidFill>
+                            <a:srgbClr val="10233A"/>
+                          </a:solidFill>
+                          <a:latin typeface="PingFang HK"/>
+                        </a:rPr>
+                        <a:t>D  內容與語意</a:t>
+                      </a:r>
+                    </a:p>
+                  </a:txBody>
+                  <a:tcPr marL="73152" marT="36576" marB="36576">
+                    <a:solidFill>
+                      <a:srgbClr val="FFFFFF"/>
+                    </a:solidFill>
+                  </a:tcPr>
+                </a:tc>
+                <a:tc>
+                  <a:txBody>
+                    <a:bodyPr wrap="square"/>
+                    <a:lstStyle/>
+                    <a:p>
+                      <a:pPr algn="l">
+                        <a:lnSpc>
+                          <a:spcPct val="110000"/>
+                        </a:lnSpc>
+                        <a:spcBef>
+                          <a:spcPts val="0"/>
+                        </a:spcBef>
+                      </a:pPr>
+                      <a:r>
+                        <a:rPr sz="950" b="0" i="0">
+                          <a:solidFill>
+                            <a:srgbClr val="1E3652"/>
+                          </a:solidFill>
+                          <a:latin typeface="PingFang HK"/>
+                        </a:rPr>
+                        <a:t>12</a:t>
+                      </a:r>
+                    </a:p>
+                  </a:txBody>
+                  <a:tcPr marL="73152" marT="36576" marB="36576">
+                    <a:solidFill>
+                      <a:srgbClr val="FFFFFF"/>
+                    </a:solidFill>
+                  </a:tcPr>
+                </a:tc>
+              </a:tr>
+              <a:tr h="310896">
+                <a:tc>
+                  <a:txBody>
+                    <a:bodyPr wrap="square"/>
+                    <a:lstStyle/>
+                    <a:p>
+                      <a:pPr algn="l">
+                        <a:lnSpc>
+                          <a:spcPct val="110000"/>
+                        </a:lnSpc>
+                        <a:spcBef>
+                          <a:spcPts val="0"/>
+                        </a:spcBef>
+                      </a:pPr>
+                      <a:r>
+                        <a:rPr sz="950" b="1" i="0">
+                          <a:solidFill>
+                            <a:srgbClr val="10233A"/>
+                          </a:solidFill>
+                          <a:latin typeface="PingFang HK"/>
+                        </a:rPr>
+                        <a:t>E  結構</a:t>
+                      </a:r>
+                    </a:p>
+                  </a:txBody>
+                  <a:tcPr marL="73152" marT="36576" marB="36576">
+                    <a:solidFill>
+                      <a:srgbClr val="FFFFFF"/>
+                    </a:solidFill>
+                  </a:tcPr>
+                </a:tc>
+                <a:tc>
+                  <a:txBody>
+                    <a:bodyPr wrap="square"/>
+                    <a:lstStyle/>
+                    <a:p>
+                      <a:pPr algn="l">
+                        <a:lnSpc>
+                          <a:spcPct val="110000"/>
+                        </a:lnSpc>
+                        <a:spcBef>
+                          <a:spcPts val="0"/>
+                        </a:spcBef>
+                      </a:pPr>
+                      <a:r>
+                        <a:rPr sz="950" b="0" i="0">
+                          <a:solidFill>
+                            <a:srgbClr val="1E3652"/>
+                          </a:solidFill>
+                          <a:latin typeface="PingFang HK"/>
+                        </a:rPr>
+                        <a:t>8</a:t>
+                      </a:r>
+                    </a:p>
+                  </a:txBody>
+                  <a:tcPr marL="73152" marT="36576" marB="36576">
+                    <a:solidFill>
+                      <a:srgbClr val="FFFFFF"/>
+                    </a:solidFill>
+                  </a:tcPr>
+                </a:tc>
+              </a:tr>
+              <a:tr h="310896">
+                <a:tc>
+                  <a:txBody>
+                    <a:bodyPr wrap="square"/>
+                    <a:lstStyle/>
+                    <a:p>
+                      <a:pPr algn="l">
+                        <a:lnSpc>
+                          <a:spcPct val="110000"/>
+                        </a:lnSpc>
+                        <a:spcBef>
+                          <a:spcPts val="0"/>
+                        </a:spcBef>
+                      </a:pPr>
+                      <a:r>
+                        <a:rPr sz="950" b="1" i="0">
+                          <a:solidFill>
+                            <a:srgbClr val="10233A"/>
+                          </a:solidFill>
+                          <a:latin typeface="PingFang HK"/>
+                        </a:rPr>
+                        <a:t>F  渲染</a:t>
+                      </a:r>
+                    </a:p>
+                  </a:txBody>
+                  <a:tcPr marL="73152" marT="36576" marB="36576">
+                    <a:solidFill>
+                      <a:srgbClr val="FFFFFF"/>
+                    </a:solidFill>
+                  </a:tcPr>
+                </a:tc>
+                <a:tc>
+                  <a:txBody>
+                    <a:bodyPr wrap="square"/>
+                    <a:lstStyle/>
+                    <a:p>
+                      <a:pPr algn="l">
+                        <a:lnSpc>
+                          <a:spcPct val="110000"/>
+                        </a:lnSpc>
+                        <a:spcBef>
+                          <a:spcPts val="0"/>
+                        </a:spcBef>
+                      </a:pPr>
+                      <a:r>
+                        <a:rPr sz="950" b="0" i="0">
+                          <a:solidFill>
+                            <a:srgbClr val="1E3652"/>
+                          </a:solidFill>
+                          <a:latin typeface="PingFang HK"/>
+                        </a:rPr>
+                        <a:t>5</a:t>
+                      </a:r>
+                    </a:p>
+                  </a:txBody>
+                  <a:tcPr marL="73152" marT="36576" marB="36576">
+                    <a:solidFill>
+                      <a:srgbClr val="FFFFFF"/>
+                    </a:solidFill>
+                  </a:tcPr>
+                </a:tc>
+              </a:tr>
+              <a:tr h="310896">
+                <a:tc>
+                  <a:txBody>
+                    <a:bodyPr wrap="square"/>
+                    <a:lstStyle/>
+                    <a:p>
+                      <a:pPr algn="l">
+                        <a:lnSpc>
+                          <a:spcPct val="110000"/>
+                        </a:lnSpc>
+                        <a:spcBef>
+                          <a:spcPts val="0"/>
+                        </a:spcBef>
+                      </a:pPr>
+                      <a:r>
+                        <a:rPr sz="950" b="1" i="0">
+                          <a:solidFill>
+                            <a:srgbClr val="10233A"/>
+                          </a:solidFill>
+                          <a:latin typeface="PingFang HK"/>
+                        </a:rPr>
+                        <a:t>G  觀眾</a:t>
+                      </a:r>
+                    </a:p>
+                  </a:txBody>
+                  <a:tcPr marL="73152" marT="36576" marB="36576">
+                    <a:solidFill>
+                      <a:srgbClr val="FFFFFF"/>
+                    </a:solidFill>
+                  </a:tcPr>
+                </a:tc>
+                <a:tc>
+                  <a:txBody>
+                    <a:bodyPr wrap="square"/>
+                    <a:lstStyle/>
+                    <a:p>
+                      <a:pPr algn="l">
+                        <a:lnSpc>
+                          <a:spcPct val="110000"/>
+                        </a:lnSpc>
+                        <a:spcBef>
+                          <a:spcPts val="0"/>
+                        </a:spcBef>
+                      </a:pPr>
+                      <a:r>
+                        <a:rPr sz="950" b="0" i="0">
+                          <a:solidFill>
+                            <a:srgbClr val="1E3652"/>
+                          </a:solidFill>
+                          <a:latin typeface="PingFang HK"/>
+                        </a:rPr>
+                        <a:t>4</a:t>
+                      </a:r>
+                    </a:p>
+                  </a:txBody>
+                  <a:tcPr marL="73152" marT="36576" marB="36576">
+                    <a:solidFill>
+                      <a:srgbClr val="FFFFFF"/>
+                    </a:solidFill>
+                  </a:tcPr>
+                </a:tc>
+              </a:tr>
+              <a:tr h="310896">
+                <a:tc>
+                  <a:txBody>
+                    <a:bodyPr wrap="square"/>
+                    <a:lstStyle/>
+                    <a:p>
+                      <a:pPr algn="l">
+                        <a:lnSpc>
+                          <a:spcPct val="115000"/>
+                        </a:lnSpc>
+                        <a:spcBef>
+                          <a:spcPts val="0"/>
+                        </a:spcBef>
+                      </a:pPr>
+                      <a:r>
+                        <a:rPr sz="950" b="1" i="0">
+                          <a:solidFill>
+                            <a:srgbClr val="10233A"/>
+                          </a:solidFill>
+                          <a:latin typeface="PingFang HK"/>
+                        </a:rPr>
+                        <a:t>合計</a:t>
+                      </a:r>
+                    </a:p>
+                  </a:txBody>
+                  <a:tcPr marL="73152" marT="36576" marB="36576">
+                    <a:solidFill>
+                      <a:srgbClr val="FFFFFF"/>
+                    </a:solidFill>
+                  </a:tcPr>
+                </a:tc>
+                <a:tc>
+                  <a:txBody>
+                    <a:bodyPr wrap="square"/>
+                    <a:lstStyle/>
+                    <a:p>
+                      <a:pPr algn="l">
+                        <a:lnSpc>
+                          <a:spcPct val="115000"/>
+                        </a:lnSpc>
+                        <a:spcBef>
+                          <a:spcPts val="0"/>
+                        </a:spcBef>
+                      </a:pPr>
+                      <a:r>
+                        <a:rPr sz="950" b="1" i="0">
+                          <a:solidFill>
+                            <a:srgbClr val="C08A2E"/>
+                          </a:solidFill>
+                          <a:latin typeface="PingFang HK"/>
+                        </a:rPr>
+                        <a:t>65</a:t>
+                      </a:r>
+                    </a:p>
+                  </a:txBody>
+                  <a:tcPr marL="73152" marT="36576" marB="36576">
+                    <a:solidFill>
+                      <a:srgbClr val="FFFFFF"/>
+                    </a:solidFill>
+                  </a:tcPr>
+                </a:tc>
+              </a:tr>
+            </a:tbl>
+          </a:graphicData>
+        </a:graphic>
+      </p:graphicFrame>
+      <p:sp>
+        <p:nvSpPr>
+          <p:cNvPr id="9" name="TextBox 8"/>
+          <p:cNvSpPr txBox="1"/>
+          <p:nvPr/>
+        </p:nvSpPr>
+        <p:spPr>
+          <a:xfrm>
+            <a:off x="4800600" y="1691640"/>
+            <a:ext cx="2834640" cy="320040"/>
+          </a:xfrm>
+          <a:prstGeom prst="rect">
+            <a:avLst/>
+          </a:prstGeom>
+          <a:noFill/>
+        </p:spPr>
+        <p:txBody>
+          <a:bodyPr wrap="square" anchor="t" lIns="0" rIns="0" tIns="0" bIns="0">
+            <a:spAutoFit/>
+          </a:bodyPr>
+          <a:lstStyle/>
+          <a:p>
+            <a:pPr algn="l">
+              <a:lnSpc>
+                <a:spcPct val="115000"/>
+              </a:lnSpc>
+              <a:spcBef>
+                <a:spcPts val="0"/>
+              </a:spcBef>
+            </a:pPr>
+            <a:r>
+              <a:rPr sz="1100" b="1" i="0">
+                <a:solidFill>
+                  <a:srgbClr val="10233A"/>
+                </a:solidFill>
+                <a:latin typeface="PingFang HK"/>
+              </a:rPr>
+              <a:t>五個條件</a:t>
+            </a:r>
+          </a:p>
+        </p:txBody>
+      </p:sp>
+      <p:sp>
+        <p:nvSpPr>
+          <p:cNvPr id="10" name="TextBox 9"/>
+          <p:cNvSpPr txBox="1"/>
+          <p:nvPr/>
+        </p:nvSpPr>
+        <p:spPr>
+          <a:xfrm>
+            <a:off x="4800600" y="2057400"/>
+            <a:ext cx="2880360" cy="2194560"/>
+          </a:xfrm>
+          <a:prstGeom prst="rect">
+            <a:avLst/>
+          </a:prstGeom>
+          <a:noFill/>
+        </p:spPr>
+        <p:txBody>
+          <a:bodyPr wrap="square" anchor="t" lIns="0" rIns="0" tIns="0" bIns="0">
+            <a:spAutoFit/>
+          </a:bodyPr>
+          <a:lstStyle/>
+          <a:p>
+            <a:pPr algn="l">
+              <a:lnSpc>
+                <a:spcPct val="120000"/>
+              </a:lnSpc>
+              <a:spcBef>
+                <a:spcPts val="0"/>
+              </a:spcBef>
+            </a:pPr>
+            <a:r>
+              <a:rPr sz="900" b="0" i="0">
+                <a:solidFill>
+                  <a:srgbClr val="1E3652"/>
+                </a:solidFill>
+                <a:latin typeface="PingFang HK"/>
+              </a:rPr>
+              <a:t>-  可判定：不需要參考答案</a:t>
+            </a:r>
+          </a:p>
+          <a:p>
+            <a:pPr algn="l">
+              <a:lnSpc>
+                <a:spcPct val="120000"/>
+              </a:lnSpc>
+              <a:spcBef>
+                <a:spcPts val="700"/>
+              </a:spcBef>
+            </a:pPr>
+            <a:r>
+              <a:rPr sz="900" b="0" i="0">
+                <a:solidFill>
+                  <a:srgbClr val="1E3652"/>
+                </a:solidFill>
+                <a:latin typeface="PingFang HK"/>
+              </a:rPr>
+              <a:t>-  確定性：同一份檔案同一個分數</a:t>
+            </a:r>
+          </a:p>
+          <a:p>
+            <a:pPr algn="l">
+              <a:lnSpc>
+                <a:spcPct val="120000"/>
+              </a:lnSpc>
+              <a:spcBef>
+                <a:spcPts val="700"/>
+              </a:spcBef>
+            </a:pPr>
+            <a:r>
+              <a:rPr sz="900" b="0" i="0">
+                <a:solidFill>
+                  <a:srgbClr val="1E3652"/>
+                </a:solidFill>
+                <a:latin typeface="PingFang HK"/>
+              </a:rPr>
+              <a:t>-  違規就是變壞，不是不同</a:t>
+            </a:r>
+          </a:p>
+          <a:p>
+            <a:pPr algn="l">
+              <a:lnSpc>
+                <a:spcPct val="120000"/>
+              </a:lnSpc>
+              <a:spcBef>
+                <a:spcPts val="700"/>
+              </a:spcBef>
+            </a:pPr>
+            <a:r>
+              <a:rPr sz="900" b="0" i="0">
+                <a:solidFill>
+                  <a:srgbClr val="1E3652"/>
+                </a:solidFill>
+                <a:latin typeface="PingFang HK"/>
+              </a:rPr>
+              <a:t>-  便宜到可以跑在迴圈裡</a:t>
+            </a:r>
+          </a:p>
+          <a:p>
+            <a:pPr algn="l">
+              <a:lnSpc>
+                <a:spcPct val="120000"/>
+              </a:lnSpc>
+              <a:spcBef>
+                <a:spcPts val="700"/>
+              </a:spcBef>
+            </a:pPr>
+            <a:r>
+              <a:rPr sz="900" b="0" i="0">
+                <a:solidFill>
+                  <a:srgbClr val="1E3652"/>
+                </a:solidFill>
+                <a:latin typeface="PingFang HK"/>
+              </a:rPr>
+              <a:t>-  可解釋：指得出形狀、數值、門檻</a:t>
+            </a:r>
+          </a:p>
+        </p:txBody>
+      </p:sp>
+      <p:sp>
+        <p:nvSpPr>
+          <p:cNvPr id="11" name="TextBox 10"/>
+          <p:cNvSpPr txBox="1"/>
+          <p:nvPr/>
+        </p:nvSpPr>
+        <p:spPr>
+          <a:xfrm>
+            <a:off x="7909560" y="1691640"/>
+            <a:ext cx="3429000" cy="320040"/>
+          </a:xfrm>
+          <a:prstGeom prst="rect">
+            <a:avLst/>
+          </a:prstGeom>
+          <a:noFill/>
+        </p:spPr>
+        <p:txBody>
+          <a:bodyPr wrap="square" anchor="t" lIns="0" rIns="0" tIns="0" bIns="0">
+            <a:spAutoFit/>
+          </a:bodyPr>
+          <a:lstStyle/>
+          <a:p>
+            <a:pPr algn="l">
+              <a:lnSpc>
+                <a:spcPct val="115000"/>
+              </a:lnSpc>
+              <a:spcBef>
+                <a:spcPts val="0"/>
+              </a:spcBef>
+            </a:pPr>
+            <a:r>
+              <a:rPr sz="1100" b="1" i="0">
+                <a:solidFill>
+                  <a:srgbClr val="10233A"/>
+                </a:solidFill>
+                <a:latin typeface="PingFang HK"/>
+              </a:rPr>
+              <a:t>最後留下的</a:t>
+            </a:r>
+          </a:p>
+        </p:txBody>
+      </p:sp>
+      <p:graphicFrame>
+        <p:nvGraphicFramePr>
+          <p:cNvPr id="12" name="Table 11"/>
+          <p:cNvGraphicFramePr>
+            <a:graphicFrameLocks noGrp="1"/>
+          </p:cNvGraphicFramePr>
+          <p:nvPr/>
+        </p:nvGraphicFramePr>
+        <p:xfrm>
+          <a:off x="7909560" y="2057400"/>
+          <a:ext cx="3429000" cy="2121408"/>
+        </p:xfrm>
+        <a:graphic>
+          <a:graphicData uri="http://schemas.openxmlformats.org/drawingml/2006/table">
+            <a:tbl>
+              <a:tblPr firstRow="1" bandRow="1">
+                <a:tableStyleId>{5C22544A-7EE6-4342-B048-85BDC9FD1C3A}</a:tableStyleId>
+              </a:tblPr>
+              <a:tblGrid>
+                <a:gridCol w="2606040"/>
+                <a:gridCol w="822960"/>
+              </a:tblGrid>
+              <a:tr h="310896">
+                <a:tc>
+                  <a:txBody>
+                    <a:bodyPr wrap="square"/>
+                    <a:lstStyle/>
+                    <a:p>
+                      <a:pPr algn="l">
+                        <a:lnSpc>
+                          <a:spcPct val="115000"/>
+                        </a:lnSpc>
+                        <a:spcBef>
+                          <a:spcPts val="0"/>
+                        </a:spcBef>
+                      </a:pPr>
+                      <a:r>
+                        <a:rPr sz="900" b="1" i="0">
+                          <a:solidFill>
+                            <a:srgbClr val="10233A"/>
+                          </a:solidFill>
+                          <a:latin typeface="PingFang HK"/>
+                        </a:rPr>
+                        <a:t>gate</a:t>
                       </a:r>
                     </a:p>
                   </a:txBody>
@@ -15011,13 +16714,13 @@
                         </a:spcBef>
                       </a:pPr>
                       <a:r>
-                        <a:rPr sz="950" b="1" i="0">
+                        <a:rPr sz="900" b="1" i="0">
                           <a:solidFill>
                             <a:srgbClr val="10233A"/>
                           </a:solidFill>
                           <a:latin typeface="PingFang HK"/>
                         </a:rPr>
-                        <a:t>DOC2PPT</a:t>
+                        <a:t>來源</a:t>
                       </a:r>
                     </a:p>
                   </a:txBody>
@@ -15043,13 +16746,13 @@
                         </a:spcBef>
                       </a:pPr>
                       <a:r>
-                        <a:rPr sz="1000" b="1" i="0">
+                        <a:rPr sz="950" b="1" i="0">
                           <a:solidFill>
                             <a:srgbClr val="10233A"/>
                           </a:solidFill>
                           <a:latin typeface="PingFang HK"/>
                         </a:rPr>
-                        <a:t>頁數</a:t>
+                        <a:t>G1 出界</a:t>
                       </a:r>
                     </a:p>
                   </a:txBody>
@@ -15073,43 +16776,13 @@
                         </a:spcBef>
                       </a:pPr>
                       <a:r>
-                        <a:rPr sz="1000" b="0" i="0">
+                        <a:rPr sz="950" b="0" i="0">
                           <a:solidFill>
                             <a:srgbClr val="1E3652"/>
                           </a:solidFill>
                           <a:latin typeface="PingFang HK"/>
                         </a:rPr>
-                        <a:t>9</a:t>
-                      </a:r>
-                    </a:p>
-                  </a:txBody>
-                  <a:tcPr marL="73152" marT="36576" marB="36576">
-                    <a:solidFill>
-                      <a:srgbClr val="FFFFFF"/>
-                    </a:solidFill>
-                  </a:tcPr>
-                </a:tc>
-                <a:tc>
-                  <a:txBody>
-                    <a:bodyPr wrap="square"/>
-                    <a:lstStyle/>
-                    <a:p>
-                      <a:pPr algn="l">
-                        <a:lnSpc>
-                          <a:spcPct val="110000"/>
-                        </a:lnSpc>
-                        <a:spcBef>
-                          <a:spcPts val="0"/>
-                        </a:spcBef>
-                      </a:pPr>
-                      <a:r>
-                        <a:rPr sz="1000" b="0" i="0">
-                          <a:solidFill>
-                            <a:srgbClr val="1E3652"/>
-                          </a:solidFill>
-                          <a:latin typeface="PingFang HK"/>
-                        </a:rPr>
-                        <a:t>9</a:t>
+                        <a:t>A1</a:t>
                       </a:r>
                     </a:p>
                   </a:txBody>
@@ -15135,13 +16808,13 @@
                         </a:spcBef>
                       </a:pPr>
                       <a:r>
-                        <a:rPr sz="1000" b="1" i="0">
+                        <a:rPr sz="950" b="1" i="0">
                           <a:solidFill>
                             <a:srgbClr val="10233A"/>
                           </a:solidFill>
                           <a:latin typeface="PingFang HK"/>
                         </a:rPr>
-                        <a:t>合格頁</a:t>
+                        <a:t>G2 重疊</a:t>
                       </a:r>
                     </a:p>
                   </a:txBody>
@@ -15165,43 +16838,13 @@
                         </a:spcBef>
                       </a:pPr>
                       <a:r>
-                        <a:rPr sz="1000" b="0" i="0">
+                        <a:rPr sz="950" b="0" i="0">
                           <a:solidFill>
                             <a:srgbClr val="1E3652"/>
                           </a:solidFill>
                           <a:latin typeface="PingFang HK"/>
                         </a:rPr>
-                        <a:t>0</a:t>
-                      </a:r>
-                    </a:p>
-                  </a:txBody>
-                  <a:tcPr marL="73152" marT="36576" marB="36576">
-                    <a:solidFill>
-                      <a:srgbClr val="FFFFFF"/>
-                    </a:solidFill>
-                  </a:tcPr>
-                </a:tc>
-                <a:tc>
-                  <a:txBody>
-                    <a:bodyPr wrap="square"/>
-                    <a:lstStyle/>
-                    <a:p>
-                      <a:pPr algn="l">
-                        <a:lnSpc>
-                          <a:spcPct val="110000"/>
-                        </a:lnSpc>
-                        <a:spcBef>
-                          <a:spcPts val="0"/>
-                        </a:spcBef>
-                      </a:pPr>
-                      <a:r>
-                        <a:rPr sz="1000" b="0" i="0">
-                          <a:solidFill>
-                            <a:srgbClr val="1E3652"/>
-                          </a:solidFill>
-                          <a:latin typeface="PingFang HK"/>
-                        </a:rPr>
-                        <a:t>0</a:t>
+                        <a:t>A2</a:t>
                       </a:r>
                     </a:p>
                   </a:txBody>
@@ -15227,13 +16870,13 @@
                         </a:spcBef>
                       </a:pPr>
                       <a:r>
-                        <a:rPr sz="1000" b="1" i="0">
+                        <a:rPr sz="950" b="1" i="0">
                           <a:solidFill>
                             <a:srgbClr val="10233A"/>
                           </a:solidFill>
                           <a:latin typeface="PingFang HK"/>
                         </a:rPr>
-                        <a:t>SRR（頁面級）</a:t>
+                        <a:t>G3 字級</a:t>
                       </a:r>
                     </a:p>
                   </a:txBody>
@@ -15257,43 +16900,13 @@
                         </a:spcBef>
                       </a:pPr>
                       <a:r>
-                        <a:rPr sz="1000" b="0" i="0">
+                        <a:rPr sz="950" b="0" i="0">
                           <a:solidFill>
                             <a:srgbClr val="1E3652"/>
                           </a:solidFill>
                           <a:latin typeface="PingFang HK"/>
                         </a:rPr>
-                        <a:t>0.00</a:t>
-                      </a:r>
-                    </a:p>
-                  </a:txBody>
-                  <a:tcPr marL="73152" marT="36576" marB="36576">
-                    <a:solidFill>
-                      <a:srgbClr val="FFFFFF"/>
-                    </a:solidFill>
-                  </a:tcPr>
-                </a:tc>
-                <a:tc>
-                  <a:txBody>
-                    <a:bodyPr wrap="square"/>
-                    <a:lstStyle/>
-                    <a:p>
-                      <a:pPr algn="l">
-                        <a:lnSpc>
-                          <a:spcPct val="110000"/>
-                        </a:lnSpc>
-                        <a:spcBef>
-                          <a:spcPts val="0"/>
-                        </a:spcBef>
-                      </a:pPr>
-                      <a:r>
-                        <a:rPr sz="1000" b="0" i="0">
-                          <a:solidFill>
-                            <a:srgbClr val="1E3652"/>
-                          </a:solidFill>
-                          <a:latin typeface="PingFang HK"/>
-                        </a:rPr>
-                        <a:t>0.00</a:t>
+                        <a:t>B1</a:t>
                       </a:r>
                     </a:p>
                   </a:txBody>
@@ -15319,13 +16932,13 @@
                         </a:spcBef>
                       </a:pPr>
                       <a:r>
-                        <a:rPr sz="1000" b="1" i="0">
+                        <a:rPr sz="950" b="1" i="0">
                           <a:solidFill>
                             <a:srgbClr val="10233A"/>
                           </a:solidFill>
                           <a:latin typeface="PingFang HK"/>
                         </a:rPr>
-                        <a:t>違規數</a:t>
+                        <a:t>G4 對比</a:t>
                       </a:r>
                     </a:p>
                   </a:txBody>
@@ -15349,43 +16962,13 @@
                         </a:spcBef>
                       </a:pPr>
                       <a:r>
-                        <a:rPr sz="1000" b="0" i="0">
+                        <a:rPr sz="950" b="0" i="0">
                           <a:solidFill>
                             <a:srgbClr val="1E3652"/>
                           </a:solidFill>
                           <a:latin typeface="PingFang HK"/>
                         </a:rPr>
-                        <a:t>33</a:t>
-                      </a:r>
-                    </a:p>
-                  </a:txBody>
-                  <a:tcPr marL="73152" marT="36576" marB="36576">
-                    <a:solidFill>
-                      <a:srgbClr val="FFFFFF"/>
-                    </a:solidFill>
-                  </a:tcPr>
-                </a:tc>
-                <a:tc>
-                  <a:txBody>
-                    <a:bodyPr wrap="square"/>
-                    <a:lstStyle/>
-                    <a:p>
-                      <a:pPr algn="l">
-                        <a:lnSpc>
-                          <a:spcPct val="110000"/>
-                        </a:lnSpc>
-                        <a:spcBef>
-                          <a:spcPts val="0"/>
-                        </a:spcBef>
-                      </a:pPr>
-                      <a:r>
-                        <a:rPr sz="1000" b="0" i="0">
-                          <a:solidFill>
-                            <a:srgbClr val="1E3652"/>
-                          </a:solidFill>
-                          <a:latin typeface="PingFang HK"/>
-                        </a:rPr>
-                        <a:t>32</a:t>
+                        <a:t>C1</a:t>
                       </a:r>
                     </a:p>
                   </a:txBody>
@@ -15411,13 +16994,13 @@
                         </a:spcBef>
                       </a:pPr>
                       <a:r>
-                        <a:rPr sz="1000" b="1" i="0">
+                        <a:rPr sz="950" b="1" i="0">
                           <a:solidFill>
                             <a:srgbClr val="10233A"/>
                           </a:solidFill>
                           <a:latin typeface="PingFang HK"/>
                         </a:rPr>
-                        <a:t>G3 違規頁</a:t>
+                        <a:t>G5 文字溢出</a:t>
                       </a:r>
                     </a:p>
                   </a:txBody>
@@ -15441,43 +17024,13 @@
                         </a:spcBef>
                       </a:pPr>
                       <a:r>
-                        <a:rPr sz="1000" b="0" i="0">
+                        <a:rPr sz="950" b="0" i="0">
                           <a:solidFill>
                             <a:srgbClr val="1E3652"/>
                           </a:solidFill>
                           <a:latin typeface="PingFang HK"/>
                         </a:rPr>
-                        <a:t>9 / 9</a:t>
-                      </a:r>
-                    </a:p>
-                  </a:txBody>
-                  <a:tcPr marL="73152" marT="36576" marB="36576">
-                    <a:solidFill>
-                      <a:srgbClr val="FFFFFF"/>
-                    </a:solidFill>
-                  </a:tcPr>
-                </a:tc>
-                <a:tc>
-                  <a:txBody>
-                    <a:bodyPr wrap="square"/>
-                    <a:lstStyle/>
-                    <a:p>
-                      <a:pPr algn="l">
-                        <a:lnSpc>
-                          <a:spcPct val="110000"/>
-                        </a:lnSpc>
-                        <a:spcBef>
-                          <a:spcPts val="0"/>
-                        </a:spcBef>
-                      </a:pPr>
-                      <a:r>
-                        <a:rPr sz="1000" b="0" i="0">
-                          <a:solidFill>
-                            <a:srgbClr val="1E3652"/>
-                          </a:solidFill>
-                          <a:latin typeface="PingFang HK"/>
-                        </a:rPr>
-                        <a:t>9 / 9</a:t>
+                        <a:t>B7</a:t>
                       </a:r>
                     </a:p>
                   </a:txBody>
@@ -15503,13 +17056,13 @@
                         </a:spcBef>
                       </a:pPr>
                       <a:r>
-                        <a:rPr sz="1000" b="1" i="0">
+                        <a:rPr sz="950" b="1" i="0">
                           <a:solidFill>
                             <a:srgbClr val="10233A"/>
                           </a:solidFill>
                           <a:latin typeface="PingFang HK"/>
                         </a:rPr>
-                        <a:t>G6 違規頁</a:t>
+                        <a:t>G6 密度</a:t>
                       </a:r>
                     </a:p>
                   </a:txBody>
@@ -15533,43 +17086,13 @@
                         </a:spcBef>
                       </a:pPr>
                       <a:r>
-                        <a:rPr sz="1000" b="0" i="0">
+                        <a:rPr sz="950" b="0" i="0">
                           <a:solidFill>
                             <a:srgbClr val="1E3652"/>
                           </a:solidFill>
                           <a:latin typeface="PingFang HK"/>
                         </a:rPr>
-                        <a:t>8 / 9</a:t>
-                      </a:r>
-                    </a:p>
-                  </a:txBody>
-                  <a:tcPr marL="73152" marT="36576" marB="36576">
-                    <a:solidFill>
-                      <a:srgbClr val="FFFFFF"/>
-                    </a:solidFill>
-                  </a:tcPr>
-                </a:tc>
-                <a:tc>
-                  <a:txBody>
-                    <a:bodyPr wrap="square"/>
-                    <a:lstStyle/>
-                    <a:p>
-                      <a:pPr algn="l">
-                        <a:lnSpc>
-                          <a:spcPct val="110000"/>
-                        </a:lnSpc>
-                        <a:spcBef>
-                          <a:spcPts val="0"/>
-                        </a:spcBef>
-                      </a:pPr>
-                      <a:r>
-                        <a:rPr sz="1000" b="0" i="0">
-                          <a:solidFill>
-                            <a:srgbClr val="1E3652"/>
-                          </a:solidFill>
-                          <a:latin typeface="PingFang HK"/>
-                        </a:rPr>
-                        <a:t>8 / 9</a:t>
+                        <a:t>B5+B6</a:t>
                       </a:r>
                     </a:p>
                   </a:txBody>
@@ -15586,14 +17109,74 @@
       </p:graphicFrame>
       <p:sp>
         <p:nvSpPr>
-          <p:cNvPr id="11" name="TextBox 10"/>
+          <p:cNvPr id="13" name="Rectangle 12"/>
+          <p:cNvSpPr/>
+          <p:nvPr/>
+        </p:nvSpPr>
+        <p:spPr>
+          <a:xfrm>
+            <a:off x="868680" y="5074920"/>
+            <a:ext cx="10881360" cy="1051560"/>
+          </a:xfrm>
+          <a:prstGeom prst="rect">
+            <a:avLst/>
+          </a:prstGeom>
+          <a:solidFill>
+            <a:srgbClr val="ECF1F5"/>
+          </a:solidFill>
+          <a:ln>
+            <a:noFill/>
+          </a:ln>
+          <a:effectLst/>
+        </p:spPr>
+        <p:txBody>
+          <a:bodyPr rtlCol="0" anchor="ctr" wrap="square"/>
+          <a:lstStyle/>
+          <a:p>
+            <a:pPr algn="ctr"/>
+          </a:p>
+        </p:txBody>
+      </p:sp>
+      <p:sp>
+        <p:nvSpPr>
+          <p:cNvPr id="14" name="Rectangle 13"/>
+          <p:cNvSpPr/>
+          <p:nvPr/>
+        </p:nvSpPr>
+        <p:spPr>
+          <a:xfrm>
+            <a:off x="868680" y="5074920"/>
+            <a:ext cx="64008" cy="1051560"/>
+          </a:xfrm>
+          <a:prstGeom prst="rect">
+            <a:avLst/>
+          </a:prstGeom>
+          <a:solidFill>
+            <a:srgbClr val="A83542"/>
+          </a:solidFill>
+          <a:ln>
+            <a:noFill/>
+          </a:ln>
+          <a:effectLst/>
+        </p:spPr>
+        <p:txBody>
+          <a:bodyPr rtlCol="0" anchor="ctr" wrap="square"/>
+          <a:lstStyle/>
+          <a:p>
+            <a:pPr algn="ctr"/>
+          </a:p>
+        </p:txBody>
+      </p:sp>
+      <p:sp>
+        <p:nvSpPr>
+          <p:cNvPr id="15" name="TextBox 14"/>
           <p:cNvSpPr txBox="1"/>
           <p:nvPr/>
         </p:nvSpPr>
         <p:spPr>
           <a:xfrm>
-            <a:off x="7452360" y="4224528"/>
-            <a:ext cx="4206240" cy="1463040"/>
+            <a:off x="1170432" y="5212080"/>
+            <a:ext cx="10332720" cy="822960"/>
           </a:xfrm>
           <a:prstGeom prst="rect">
             <a:avLst/>
@@ -15608,20 +17191,20 @@
           <a:p>
             <a:pPr algn="l">
               <a:lnSpc>
-                <a:spcPct val="135000"/>
+                <a:spcPct val="130000"/>
               </a:lnSpc>
               <a:spcBef>
                 <a:spcPts val="0"/>
               </a:spcBef>
             </a:pPr>
             <a:r>
-              <a:rPr sz="1000" b="0" i="0">
-                <a:solidFill>
-                  <a:srgbClr val="1E3652"/>
+              <a:rPr sz="1100" b="0" i="0">
+                <a:solidFill>
+                  <a:srgbClr val="10233A"/>
                 </a:solidFill>
                 <a:latin typeface="PingFang HK"/>
               </a:rPr>
-              <a:t>這是預期結果，不是缺陷：baseline 生成器完全不理會這些 gate。重點是這個數字可以重跑，而違規是逐項命名的。</a:t>
+              <a:t>而它看不見什麼：一句 bullet 可以語法正確、長度正常、字級正確 —— 而完全冇意義。這就是機械式量度的邊界，屬於人評。</a:t>
             </a:r>
           </a:p>
         </p:txBody>

--- a/deck/progress_deck_zh.pptx
+++ b/deck/progress_deck_zh.pptx
@@ -14531,7 +14531,7 @@
         </p:nvGraphicFramePr>
         <p:xfrm>
           <a:off x="868680" y="1691640"/>
-          <a:ext cx="6949440" cy="2615184"/>
+          <a:ext cx="6812280" cy="2615184"/>
         </p:xfrm>
         <a:graphic>
           <a:graphicData uri="http://schemas.openxmlformats.org/drawingml/2006/table">
@@ -14540,9 +14540,9 @@
                 <a:tableStyleId>{5C22544A-7EE6-4342-B048-85BDC9FD1C3A}</a:tableStyleId>
               </a:tblPr>
               <a:tblGrid>
-                <a:gridCol w="1737360"/>
-                <a:gridCol w="3017520"/>
-                <a:gridCol w="1097280"/>
+                <a:gridCol w="1691640"/>
+                <a:gridCol w="2971800"/>
+                <a:gridCol w="1051560"/>
                 <a:gridCol w="1097280"/>
               </a:tblGrid>
               <a:tr h="310896">
@@ -14560,7 +14560,7 @@
                         </a:spcBef>
                       </a:pPr>
                       <a:r>
-                        <a:rPr sz="1000" b="1" i="0">
+                        <a:rPr sz="960" b="1" i="0">
                           <a:solidFill>
                             <a:srgbClr val="10233A"/>
                           </a:solidFill>
@@ -14590,7 +14590,7 @@
                         </a:spcBef>
                       </a:pPr>
                       <a:r>
-                        <a:rPr sz="1000" b="1" i="0">
+                        <a:rPr sz="960" b="1" i="0">
                           <a:solidFill>
                             <a:srgbClr val="10233A"/>
                           </a:solidFill>
@@ -14620,7 +14620,7 @@
                         </a:spcBef>
                       </a:pPr>
                       <a:r>
-                        <a:rPr sz="1000" b="1" i="0">
+                        <a:rPr sz="960" b="1" i="0">
                           <a:solidFill>
                             <a:srgbClr val="10233A"/>
                           </a:solidFill>
@@ -14650,7 +14650,7 @@
                         </a:spcBef>
                       </a:pPr>
                       <a:r>
-                        <a:rPr sz="1000" b="1" i="0">
+                        <a:rPr sz="960" b="1" i="0">
                           <a:solidFill>
                             <a:srgbClr val="10233A"/>
                           </a:solidFill>
@@ -14682,7 +14682,7 @@
                         </a:spcBef>
                       </a:pPr>
                       <a:r>
-                        <a:rPr sz="1000" b="1" i="0">
+                        <a:rPr sz="960" b="1" i="0">
                           <a:solidFill>
                             <a:srgbClr val="10233A"/>
                           </a:solidFill>
@@ -14712,7 +14712,7 @@
                         </a:spcBef>
                       </a:pPr>
                       <a:r>
-                        <a:rPr sz="1000" b="0" i="0">
+                        <a:rPr sz="960" b="0" i="0">
                           <a:solidFill>
                             <a:srgbClr val="1E3652"/>
                           </a:solidFill>
@@ -14742,7 +14742,7 @@
                         </a:spcBef>
                       </a:pPr>
                       <a:r>
-                        <a:rPr sz="1000" b="0" i="0">
+                        <a:rPr sz="960" b="0" i="0">
                           <a:solidFill>
                             <a:srgbClr val="1E3652"/>
                           </a:solidFill>
@@ -14772,7 +14772,7 @@
                         </a:spcBef>
                       </a:pPr>
                       <a:r>
-                        <a:rPr sz="1000" b="1" i="0">
+                        <a:rPr sz="960" b="1" i="0">
                           <a:solidFill>
                             <a:srgbClr val="2F7D5D"/>
                           </a:solidFill>
@@ -14804,7 +14804,7 @@
                         </a:spcBef>
                       </a:pPr>
                       <a:r>
-                        <a:rPr sz="1000" b="1" i="0">
+                        <a:rPr sz="960" b="1" i="0">
                           <a:solidFill>
                             <a:srgbClr val="10233A"/>
                           </a:solidFill>
@@ -14834,7 +14834,7 @@
                         </a:spcBef>
                       </a:pPr>
                       <a:r>
-                        <a:rPr sz="1000" b="0" i="0">
+                        <a:rPr sz="960" b="0" i="0">
                           <a:solidFill>
                             <a:srgbClr val="1E3652"/>
                           </a:solidFill>
@@ -14864,7 +14864,7 @@
                         </a:spcBef>
                       </a:pPr>
                       <a:r>
-                        <a:rPr sz="1000" b="0" i="0">
+                        <a:rPr sz="960" b="0" i="0">
                           <a:solidFill>
                             <a:srgbClr val="1E3652"/>
                           </a:solidFill>
@@ -14894,7 +14894,7 @@
                         </a:spcBef>
                       </a:pPr>
                       <a:r>
-                        <a:rPr sz="1000" b="1" i="0">
+                        <a:rPr sz="960" b="1" i="0">
                           <a:solidFill>
                             <a:srgbClr val="2F7D5D"/>
                           </a:solidFill>
@@ -14926,7 +14926,7 @@
                         </a:spcBef>
                       </a:pPr>
                       <a:r>
-                        <a:rPr sz="1000" b="1" i="0">
+                        <a:rPr sz="960" b="1" i="0">
                           <a:solidFill>
                             <a:srgbClr val="10233A"/>
                           </a:solidFill>
@@ -14956,7 +14956,7 @@
                         </a:spcBef>
                       </a:pPr>
                       <a:r>
-                        <a:rPr sz="1000" b="0" i="0">
+                        <a:rPr sz="960" b="0" i="0">
                           <a:solidFill>
                             <a:srgbClr val="1E3652"/>
                           </a:solidFill>
@@ -14986,7 +14986,7 @@
                         </a:spcBef>
                       </a:pPr>
                       <a:r>
-                        <a:rPr sz="1000" b="0" i="0">
+                        <a:rPr sz="960" b="0" i="0">
                           <a:solidFill>
                             <a:srgbClr val="1E3652"/>
                           </a:solidFill>
@@ -15016,7 +15016,7 @@
                         </a:spcBef>
                       </a:pPr>
                       <a:r>
-                        <a:rPr sz="1000" b="1" i="0">
+                        <a:rPr sz="960" b="1" i="0">
                           <a:solidFill>
                             <a:srgbClr val="B07A1E"/>
                           </a:solidFill>
@@ -15048,7 +15048,7 @@
                         </a:spcBef>
                       </a:pPr>
                       <a:r>
-                        <a:rPr sz="1000" b="1" i="0">
+                        <a:rPr sz="960" b="1" i="0">
                           <a:solidFill>
                             <a:srgbClr val="10233A"/>
                           </a:solidFill>
@@ -15078,7 +15078,7 @@
                         </a:spcBef>
                       </a:pPr>
                       <a:r>
-                        <a:rPr sz="1000" b="0" i="0">
+                        <a:rPr sz="960" b="0" i="0">
                           <a:solidFill>
                             <a:srgbClr val="1E3652"/>
                           </a:solidFill>
@@ -15108,7 +15108,7 @@
                         </a:spcBef>
                       </a:pPr>
                       <a:r>
-                        <a:rPr sz="1000" b="0" i="0">
+                        <a:rPr sz="960" b="0" i="0">
                           <a:solidFill>
                             <a:srgbClr val="1E3652"/>
                           </a:solidFill>
@@ -15138,7 +15138,7 @@
                         </a:spcBef>
                       </a:pPr>
                       <a:r>
-                        <a:rPr sz="1000" b="1" i="0">
+                        <a:rPr sz="960" b="1" i="0">
                           <a:solidFill>
                             <a:srgbClr val="B07A1E"/>
                           </a:solidFill>
@@ -15170,7 +15170,7 @@
                         </a:spcBef>
                       </a:pPr>
                       <a:r>
-                        <a:rPr sz="1000" b="1" i="0">
+                        <a:rPr sz="960" b="1" i="0">
                           <a:solidFill>
                             <a:srgbClr val="10233A"/>
                           </a:solidFill>
@@ -15200,7 +15200,7 @@
                         </a:spcBef>
                       </a:pPr>
                       <a:r>
-                        <a:rPr sz="1000" b="0" i="0">
+                        <a:rPr sz="960" b="0" i="0">
                           <a:solidFill>
                             <a:srgbClr val="1E3652"/>
                           </a:solidFill>
@@ -15230,7 +15230,7 @@
                         </a:spcBef>
                       </a:pPr>
                       <a:r>
-                        <a:rPr sz="1000" b="0" i="0">
+                        <a:rPr sz="960" b="0" i="0">
                           <a:solidFill>
                             <a:srgbClr val="1E3652"/>
                           </a:solidFill>
@@ -15260,7 +15260,7 @@
                         </a:spcBef>
                       </a:pPr>
                       <a:r>
-                        <a:rPr sz="1000" b="1" i="0">
+                        <a:rPr sz="960" b="1" i="0">
                           <a:solidFill>
                             <a:srgbClr val="A83542"/>
                           </a:solidFill>
@@ -15292,7 +15292,7 @@
                         </a:spcBef>
                       </a:pPr>
                       <a:r>
-                        <a:rPr sz="1000" b="1" i="0">
+                        <a:rPr sz="960" b="1" i="0">
                           <a:solidFill>
                             <a:srgbClr val="10233A"/>
                           </a:solidFill>
@@ -15322,7 +15322,7 @@
                         </a:spcBef>
                       </a:pPr>
                       <a:r>
-                        <a:rPr sz="1000" b="0" i="0">
+                        <a:rPr sz="960" b="0" i="0">
                           <a:solidFill>
                             <a:srgbClr val="1E3652"/>
                           </a:solidFill>
@@ -15352,7 +15352,7 @@
                         </a:spcBef>
                       </a:pPr>
                       <a:r>
-                        <a:rPr sz="1000" b="0" i="0">
+                        <a:rPr sz="960" b="0" i="0">
                           <a:solidFill>
                             <a:srgbClr val="1E3652"/>
                           </a:solidFill>
@@ -15382,7 +15382,7 @@
                         </a:spcBef>
                       </a:pPr>
                       <a:r>
-                        <a:rPr sz="1000" b="1" i="0">
+                        <a:rPr sz="960" b="1" i="0">
                           <a:solidFill>
                             <a:srgbClr val="A83542"/>
                           </a:solidFill>
@@ -15411,8 +15411,8 @@
         </p:nvSpPr>
         <p:spPr>
           <a:xfrm>
-            <a:off x="8092440" y="1691640"/>
-            <a:ext cx="3611880" cy="1417320"/>
+            <a:off x="7818120" y="1691640"/>
+            <a:ext cx="3520440" cy="1755648"/>
           </a:xfrm>
           <a:prstGeom prst="rect">
             <a:avLst/>
@@ -15441,8 +15441,8 @@
         </p:nvSpPr>
         <p:spPr>
           <a:xfrm>
-            <a:off x="8321040" y="1847088"/>
-            <a:ext cx="3200400" cy="1097280"/>
+            <a:off x="8046720" y="1810512"/>
+            <a:ext cx="3108960" cy="1554480"/>
           </a:xfrm>
           <a:prstGeom prst="rect">
             <a:avLst/>
@@ -15464,7 +15464,7 @@
               </a:spcBef>
             </a:pPr>
             <a:r>
-              <a:rPr sz="1600" b="1" i="0">
+              <a:rPr sz="1500" b="1" i="0">
                 <a:solidFill>
                   <a:srgbClr val="10233A"/>
                 </a:solidFill>
@@ -15476,20 +15476,39 @@
           <a:p>
             <a:pPr algn="l">
               <a:lnSpc>
-                <a:spcPct val="130000"/>
+                <a:spcPct val="115000"/>
               </a:lnSpc>
               <a:spcBef>
-                <a:spcPts val="600"/>
+                <a:spcPts val="500"/>
               </a:spcBef>
             </a:pPr>
             <a:r>
-              <a:rPr sz="1000" b="0" i="0">
-                <a:solidFill>
-                  <a:srgbClr val="1E3652"/>
+              <a:rPr sz="1250" b="0" i="0">
+                <a:solidFill>
+                  <a:srgbClr val="10233A"/>
                 </a:solidFill>
                 <a:latin typeface="PingFang HK"/>
               </a:rPr>
-              <a:t>可判斷的檢查之中，通過的比例。權重全部相等，沒有 fit 出來的數；判斷不到的檢查不計入平均，但會令 deck-ready 不成立。</a:t>
+              <a:t>SRR = Σ P / Σ J</a:t>
+            </a:r>
+          </a:p>
+          <a:p>
+            <a:pPr algn="l">
+              <a:lnSpc>
+                <a:spcPct val="125000"/>
+              </a:lnSpc>
+              <a:spcBef>
+                <a:spcPts val="500"/>
+              </a:spcBef>
+            </a:pPr>
+            <a:r>
+              <a:rPr sz="840" b="0" i="0">
+                <a:solidFill>
+                  <a:srgbClr val="1E3652"/>
+                </a:solidFill>
+                <a:latin typeface="PingFang HK"/>
+              </a:rPr>
+              <a:t>J＝判斷得到的檢查，P＝其中通過的。每個檢查等權，沒有權重被擬合。</a:t>
             </a:r>
           </a:p>
         </p:txBody>
@@ -15502,8 +15521,8 @@
         </p:nvSpPr>
         <p:spPr>
           <a:xfrm>
-            <a:off x="8092440" y="3291840"/>
-            <a:ext cx="3611880" cy="1417320"/>
+            <a:off x="7818120" y="3584448"/>
+            <a:ext cx="3520440" cy="1371600"/>
           </a:xfrm>
           <a:prstGeom prst="rect">
             <a:avLst/>
@@ -15532,8 +15551,8 @@
         </p:nvSpPr>
         <p:spPr>
           <a:xfrm>
-            <a:off x="8321040" y="3447288"/>
-            <a:ext cx="3200400" cy="1097280"/>
+            <a:off x="8046720" y="3694176"/>
+            <a:ext cx="3108960" cy="1188720"/>
           </a:xfrm>
           <a:prstGeom prst="rect">
             <a:avLst/>
@@ -15555,74 +15574,172 @@
               </a:spcBef>
             </a:pPr>
             <a:r>
-              <a:rPr sz="1300" b="1" i="0">
+              <a:rPr sz="1050" b="1" i="0">
                 <a:solidFill>
                   <a:srgbClr val="10233A"/>
                 </a:solidFill>
                 <a:latin typeface="PingFang HK"/>
               </a:rPr>
-              <a:t>為什麼不用權重</a:t>
-            </a:r>
-          </a:p>
+              <a:t>「未知」不等於「不適用」</a:t>
+            </a:r>
+          </a:p>
+          <a:p>
+            <a:pPr algn="l">
+              <a:lnSpc>
+                <a:spcPct val="120000"/>
+              </a:lnSpc>
+              <a:spcBef>
+                <a:spcPts val="400"/>
+              </a:spcBef>
+            </a:pPr>
+            <a:r>
+              <a:rPr sz="819" b="0" i="0">
+                <a:solidFill>
+                  <a:srgbClr val="1E3652"/>
+                </a:solidFill>
+                <a:latin typeface="PingFang HK"/>
+              </a:rPr>
+              <a:t>不適用：條件不成立 —— 只有一個文字框，G2 沒有成對</a:t>
+            </a:r>
+          </a:p>
+          <a:p>
+            <a:pPr algn="l">
+              <a:lnSpc>
+                <a:spcPct val="120000"/>
+              </a:lnSpc>
+              <a:spcBef>
+                <a:spcPts val="300"/>
+              </a:spcBef>
+            </a:pPr>
+            <a:r>
+              <a:rPr sz="819" b="0" i="0">
+                <a:solidFill>
+                  <a:srgbClr val="1E3652"/>
+                </a:solidFill>
+                <a:latin typeface="PingFang HK"/>
+              </a:rPr>
+              <a:t>未知：條件成立但算不出 —— 背景是圖片</a:t>
+            </a:r>
+          </a:p>
+          <a:p>
+            <a:pPr algn="l">
+              <a:lnSpc>
+                <a:spcPct val="120000"/>
+              </a:lnSpc>
+              <a:spcBef>
+                <a:spcPts val="300"/>
+              </a:spcBef>
+            </a:pPr>
+            <a:r>
+              <a:rPr sz="819" b="0" i="0">
+                <a:solidFill>
+                  <a:srgbClr val="5A6B7C"/>
+                </a:solidFill>
+                <a:latin typeface="PingFang HK"/>
+              </a:rPr>
+              <a:t>兩者都不入分母，但都要記 reason code</a:t>
+            </a:r>
+          </a:p>
+        </p:txBody>
+      </p:sp>
+      <p:sp>
+        <p:nvSpPr>
+          <p:cNvPr id="13" name="Rectangle 12"/>
+          <p:cNvSpPr/>
+          <p:nvPr/>
+        </p:nvSpPr>
+        <p:spPr>
+          <a:xfrm>
+            <a:off x="868680" y="5102352"/>
+            <a:ext cx="10469880" cy="841248"/>
+          </a:xfrm>
+          <a:prstGeom prst="rect">
+            <a:avLst/>
+          </a:prstGeom>
+          <a:solidFill>
+            <a:srgbClr val="ECF1F5"/>
+          </a:solidFill>
+          <a:ln>
+            <a:noFill/>
+          </a:ln>
+          <a:effectLst/>
+        </p:spPr>
+        <p:txBody>
+          <a:bodyPr rtlCol="0" anchor="ctr" wrap="square"/>
+          <a:lstStyle/>
+          <a:p>
+            <a:pPr algn="ctr"/>
+          </a:p>
+        </p:txBody>
+      </p:sp>
+      <p:sp>
+        <p:nvSpPr>
+          <p:cNvPr id="14" name="Rectangle 13"/>
+          <p:cNvSpPr/>
+          <p:nvPr/>
+        </p:nvSpPr>
+        <p:spPr>
+          <a:xfrm>
+            <a:off x="868680" y="5102352"/>
+            <a:ext cx="64008" cy="841248"/>
+          </a:xfrm>
+          <a:prstGeom prst="rect">
+            <a:avLst/>
+          </a:prstGeom>
+          <a:solidFill>
+            <a:srgbClr val="C08A2E"/>
+          </a:solidFill>
+          <a:ln>
+            <a:noFill/>
+          </a:ln>
+          <a:effectLst/>
+        </p:spPr>
+        <p:txBody>
+          <a:bodyPr rtlCol="0" anchor="ctr" wrap="square"/>
+          <a:lstStyle/>
+          <a:p>
+            <a:pPr algn="ctr"/>
+          </a:p>
+        </p:txBody>
+      </p:sp>
+      <p:sp>
+        <p:nvSpPr>
+          <p:cNvPr id="15" name="TextBox 14"/>
+          <p:cNvSpPr txBox="1"/>
+          <p:nvPr/>
+        </p:nvSpPr>
+        <p:spPr>
+          <a:xfrm>
+            <a:off x="1170432" y="5212080"/>
+            <a:ext cx="9966960" cy="685800"/>
+          </a:xfrm>
+          <a:prstGeom prst="rect">
+            <a:avLst/>
+          </a:prstGeom>
+          <a:noFill/>
+        </p:spPr>
+        <p:txBody>
+          <a:bodyPr wrap="square" anchor="t" lIns="0" rIns="0" tIns="0" bIns="0">
+            <a:spAutoFit/>
+          </a:bodyPr>
+          <a:lstStyle/>
           <a:p>
             <a:pPr algn="l">
               <a:lnSpc>
                 <a:spcPct val="130000"/>
               </a:lnSpc>
               <a:spcBef>
-                <a:spcPts val="600"/>
-              </a:spcBef>
-            </a:pPr>
-            <a:r>
-              <a:rPr sz="1000" b="0" i="0">
-                <a:solidFill>
-                  <a:srgbClr val="1E3652"/>
-                </a:solidFill>
-                <a:latin typeface="PingFang HK"/>
-              </a:rPr>
-              <a:t>任何權重都是一個沒有證據的數 —— 同報告反對「24 點字」的理由一樣。</a:t>
-            </a:r>
-          </a:p>
-        </p:txBody>
-      </p:sp>
-      <p:sp>
-        <p:nvSpPr>
-          <p:cNvPr id="13" name="TextBox 12"/>
-          <p:cNvSpPr txBox="1"/>
-          <p:nvPr/>
-        </p:nvSpPr>
-        <p:spPr>
-          <a:xfrm>
-            <a:off x="868680" y="4892040"/>
-            <a:ext cx="10881360" cy="1097280"/>
-          </a:xfrm>
-          <a:prstGeom prst="rect">
-            <a:avLst/>
-          </a:prstGeom>
-          <a:noFill/>
-        </p:spPr>
-        <p:txBody>
-          <a:bodyPr wrap="square" anchor="t" lIns="0" rIns="0" tIns="0" bIns="0">
-            <a:spAutoFit/>
-          </a:bodyPr>
-          <a:lstStyle/>
-          <a:p>
-            <a:pPr algn="l">
-              <a:lnSpc>
-                <a:spcPct val="135000"/>
-              </a:lnSpc>
-              <a:spcBef>
                 <a:spcPts val="0"/>
               </a:spcBef>
             </a:pPr>
             <a:r>
               <a:rPr sz="1050" b="0" i="0">
                 <a:solidFill>
-                  <a:srgbClr val="5A6B7C"/>
+                  <a:srgbClr val="10233A"/>
                 </a:solidFill>
                 <a:latin typeface="PingFang HK"/>
               </a:rPr>
-              <a:t>G4 與 G5 是兩個真正需要解析度的：顏色要穿過主題與 z-order 解析，文字高度要用字體度量估算。兩者都排在迴圈之前，因為一個不能信的指標，不能當訊號。</a:t>
+              <a:t>deck-ready ＝ 全份冇任何違規，而且每條 gate 至少被判斷過一次。標題頁不需要 G6，但整份 deck 需要。</a:t>
             </a:r>
           </a:p>
         </p:txBody>

--- a/deck/progress_deck_zh.pptx
+++ b/deck/progress_deck_zh.pptx
@@ -3674,7 +3674,7 @@
                 </a:solidFill>
                 <a:latin typeface="PingFang HK"/>
               </a:rPr>
-              <a:t>生成的 deck 第 2 頁：圖已放入，圖說在下面</a:t>
+              <a:t>這條 pipeline 生成的 PPTAgent deck，第 2 頁</a:t>
             </a:r>
           </a:p>
         </p:txBody>
@@ -3875,7 +3875,7 @@
                           </a:solidFill>
                           <a:latin typeface="PingFang HK"/>
                         </a:rPr>
-                        <a:t>9</a:t>
+                        <a:t>12</a:t>
                       </a:r>
                     </a:p>
                   </a:txBody>
@@ -4151,7 +4151,7 @@
                           </a:solidFill>
                           <a:latin typeface="PingFang HK"/>
                         </a:rPr>
-                        <a:t>32</a:t>
+                        <a:t>40</a:t>
                       </a:r>
                     </a:p>
                   </a:txBody>
@@ -4243,7 +4243,7 @@
                           </a:solidFill>
                           <a:latin typeface="PingFang HK"/>
                         </a:rPr>
-                        <a:t>9 / 9</a:t>
+                        <a:t>12 / 12</a:t>
                       </a:r>
                     </a:p>
                   </a:txBody>
@@ -4335,7 +4335,7 @@
                           </a:solidFill>
                           <a:latin typeface="PingFang HK"/>
                         </a:rPr>
-                        <a:t>8 / 9</a:t>
+                        <a:t>11 / 12</a:t>
                       </a:r>
                     </a:p>
                   </a:txBody>
@@ -4549,7 +4549,7 @@
                 </a:solidFill>
                 <a:latin typeface="PingFang HK"/>
               </a:rPr>
-              <a:t>整條 pipeline 跑得完，而且會老實地報錯</a:t>
+              <a:t>整條 pipeline 跑得完 —— 而且它報出 40 個真問題</a:t>
             </a:r>
           </a:p>
         </p:txBody>
@@ -4748,7 +4748,7 @@
                 </a:solidFill>
                 <a:latin typeface="PingFang HK"/>
               </a:rPr>
-              <a:t>8 個章節、24 個圖說、裁出 11 張圖</a:t>
+              <a:t>12 個章節、25 個圖說、裁出 13 張圖</a:t>
             </a:r>
           </a:p>
         </p:txBody>
@@ -4809,7 +4809,7 @@
                 </a:solidFill>
                 <a:latin typeface="PingFang HK"/>
               </a:rPr>
-              <a:t>8 張 slide，每張 90 秒</a:t>
+              <a:t>11 張 slide，每張約 65 秒</a:t>
             </a:r>
           </a:p>
         </p:txBody>
@@ -4870,7 +4870,7 @@
                 </a:solidFill>
                 <a:latin typeface="PingFang HK"/>
               </a:rPr>
-              <a:t>9 頁 deck，原生可編輯</a:t>
+              <a:t>12 頁 deck，原生可編輯</a:t>
             </a:r>
           </a:p>
         </p:txBody>
@@ -4931,7 +4931,7 @@
                 </a:solidFill>
                 <a:latin typeface="PingFang HK"/>
               </a:rPr>
-              <a:t>32 個違規，SRR 0.00</a:t>
+              <a:t>40 個違規，SRR 0.00</a:t>
             </a:r>
           </a:p>
         </p:txBody>
@@ -5389,7 +5389,7 @@
                 </a:solidFill>
                 <a:latin typeface="PingFang HK"/>
               </a:rPr>
-              <a:t>-  裁圖：樣本上 32 個圖說成功 12 個</a:t>
+              <a:t>-  裁圖：25 個圖說裁出 13 張</a:t>
             </a:r>
           </a:p>
           <a:p>
